--- a/汇报PPT_PPO_vs_SAC_HER.pptx
+++ b/汇报PPT_PPO_vs_SAC_HER.pptx
@@ -14,6 +14,9 @@
     <p:sldId id="262" r:id="rId13"/>
     <p:sldId id="263" r:id="rId14"/>
     <p:sldId id="264" r:id="rId15"/>
+    <p:sldId id="265" r:id="rId16"/>
+    <p:sldId id="266" r:id="rId17"/>
+    <p:sldId id="267" r:id="rId18"/>
   </p:sldIdLst>
   <p:sldSz cx="12191695" cy="6858000" type="screen4x3"/>
   <p:notesSz cx="6858000" cy="9144000"/>
@@ -3264,7 +3267,7 @@
 </p:sld>
 </file>
 
-<file path=ppt/slides/slide2.xml><?xml version="1.0" encoding="utf-8"?>
+<file path=ppt/slides/slide10.xml><?xml version="1.0" encoding="utf-8"?>
 <p:sld xmlns:a="http://schemas.openxmlformats.org/drawingml/2006/main" xmlns:p="http://schemas.openxmlformats.org/presentationml/2006/main" xmlns:r="http://schemas.openxmlformats.org/officeDocument/2006/relationships">
   <p:cSld>
     <p:bg>
@@ -3297,7 +3300,7 @@
             <a:avLst/>
           </a:prstGeom>
           <a:solidFill>
-            <a:srgbClr val="00D2FF"/>
+            <a:srgbClr val="00CC66"/>
           </a:solidFill>
           <a:ln>
             <a:noFill/>
@@ -3334,7 +3337,7 @@
         <p:spPr>
           <a:xfrm>
             <a:off x="548640" y="274320"/>
-            <a:ext cx="4572000" cy="731520"/>
+            <a:ext cx="9144000" cy="640080"/>
           </a:xfrm>
           <a:prstGeom prst="rect">
             <a:avLst/>
@@ -3348,14 +3351,14 @@
           <a:lstStyle/>
           <a:p>
             <a:pPr algn="l">
-              <a:defRPr sz="3200" b="1">
-                <a:solidFill>
-                  <a:srgbClr val="00D2FF"/>
+              <a:defRPr sz="2800" b="1">
+                <a:solidFill>
+                  <a:srgbClr val="FFFFFF"/>
                 </a:solidFill>
               </a:defRPr>
             </a:pPr>
             <a:r>
-              <a:t>实验背景</a:t>
+              <a:t>SAC+HER 为什么成功？</a:t>
             </a:r>
           </a:p>
         </p:txBody>
@@ -3368,14 +3371,14 @@
         </p:nvSpPr>
         <p:spPr>
           <a:xfrm>
-            <a:off x="548640" y="1188720"/>
-            <a:ext cx="109728" cy="109728"/>
+            <a:off x="548640" y="1097280"/>
+            <a:ext cx="109728" cy="914400"/>
           </a:xfrm>
           <a:prstGeom prst="rect">
             <a:avLst/>
           </a:prstGeom>
           <a:solidFill>
-            <a:srgbClr val="00D2FF"/>
+            <a:srgbClr val="00CC66"/>
           </a:solidFill>
           <a:ln>
             <a:noFill/>
@@ -3405,90 +3408,20 @@
       </p:sp>
       <p:sp>
         <p:nvSpPr>
-          <p:cNvPr id="5" name="TextBox 4"/>
-          <p:cNvSpPr txBox="1"/>
-          <p:nvPr/>
-        </p:nvSpPr>
-        <p:spPr>
-          <a:xfrm>
-            <a:off x="914400" y="1143000"/>
-            <a:ext cx="2743200" cy="365760"/>
-          </a:xfrm>
-          <a:prstGeom prst="rect">
-            <a:avLst/>
-          </a:prstGeom>
-          <a:noFill/>
-        </p:spPr>
-        <p:txBody>
-          <a:bodyPr wrap="square">
-            <a:spAutoFit/>
-          </a:bodyPr>
-          <a:lstStyle/>
-          <a:p>
-            <a:pPr algn="l">
-              <a:defRPr sz="1800" b="1">
-                <a:solidFill>
-                  <a:srgbClr val="00D2FF"/>
-                </a:solidFill>
-              </a:defRPr>
-            </a:pPr>
-            <a:r>
-              <a:t>任务环境</a:t>
-            </a:r>
-          </a:p>
-        </p:txBody>
-      </p:sp>
-      <p:sp>
-        <p:nvSpPr>
-          <p:cNvPr id="6" name="TextBox 5"/>
-          <p:cNvSpPr txBox="1"/>
-          <p:nvPr/>
-        </p:nvSpPr>
-        <p:spPr>
-          <a:xfrm>
-            <a:off x="914400" y="1508760"/>
-            <a:ext cx="10058400" cy="731520"/>
-          </a:xfrm>
-          <a:prstGeom prst="rect">
-            <a:avLst/>
-          </a:prstGeom>
-          <a:noFill/>
-        </p:spPr>
-        <p:txBody>
-          <a:bodyPr wrap="square">
-            <a:spAutoFit/>
-          </a:bodyPr>
-          <a:lstStyle/>
-          <a:p>
-            <a:pPr algn="l">
-              <a:defRPr sz="1600" b="0">
-                <a:solidFill>
-                  <a:srgbClr val="CCCCDD"/>
-                </a:solidFill>
-              </a:defRPr>
-            </a:pPr>
-            <a:r>
-              <a:t>Franka Panda 机械臂仿真 (panda_gym)</a:t>
-            </a:r>
-          </a:p>
-        </p:txBody>
-      </p:sp>
-      <p:sp>
-        <p:nvSpPr>
-          <p:cNvPr id="7" name="Rectangle 6"/>
+          <p:cNvPr id="5" name="Rectangle 4"/>
           <p:cNvSpPr/>
           <p:nvPr/>
         </p:nvSpPr>
         <p:spPr>
           <a:xfrm>
-            <a:off x="548640" y="2560320"/>
-            <a:ext cx="109728" cy="109728"/>
+            <a:off x="914400" y="1097280"/>
+            <a:ext cx="10515600" cy="914400"/>
           </a:xfrm>
           <a:prstGeom prst="rect">
             <a:avLst/>
           </a:prstGeom>
           <a:solidFill>
-            <a:srgbClr val="00D2FF"/>
+            <a:srgbClr val="252540"/>
           </a:solidFill>
           <a:ln>
             <a:noFill/>
@@ -3518,14 +3451,14 @@
       </p:sp>
       <p:sp>
         <p:nvSpPr>
-          <p:cNvPr id="8" name="TextBox 7"/>
+          <p:cNvPr id="6" name="TextBox 5"/>
           <p:cNvSpPr txBox="1"/>
           <p:nvPr/>
         </p:nvSpPr>
         <p:spPr>
           <a:xfrm>
-            <a:off x="914400" y="2514600"/>
-            <a:ext cx="2743200" cy="365760"/>
+            <a:off x="1188720" y="1143000"/>
+            <a:ext cx="9144000" cy="365760"/>
           </a:xfrm>
           <a:prstGeom prst="rect">
             <a:avLst/>
@@ -3539,28 +3472,28 @@
           <a:lstStyle/>
           <a:p>
             <a:pPr algn="l">
-              <a:defRPr sz="1800" b="1">
-                <a:solidFill>
-                  <a:srgbClr val="00D2FF"/>
+              <a:defRPr sz="2000" b="1">
+                <a:solidFill>
+                  <a:srgbClr val="00CC66"/>
                 </a:solidFill>
               </a:defRPr>
             </a:pPr>
             <a:r>
-              <a:t>实验平台</a:t>
-            </a:r>
-          </a:p>
-        </p:txBody>
-      </p:sp>
-      <p:sp>
-        <p:nvSpPr>
-          <p:cNvPr id="9" name="TextBox 8"/>
+              <a:t>持久化 Replay Buffer</a:t>
+            </a:r>
+          </a:p>
+        </p:txBody>
+      </p:sp>
+      <p:sp>
+        <p:nvSpPr>
+          <p:cNvPr id="7" name="TextBox 6"/>
           <p:cNvSpPr txBox="1"/>
           <p:nvPr/>
         </p:nvSpPr>
         <p:spPr>
           <a:xfrm>
-            <a:off x="914400" y="2880360"/>
-            <a:ext cx="10058400" cy="731520"/>
+            <a:off x="1188720" y="1508760"/>
+            <a:ext cx="9601200" cy="457200"/>
           </a:xfrm>
           <a:prstGeom prst="rect">
             <a:avLst/>
@@ -3574,34 +3507,38 @@
           <a:lstStyle/>
           <a:p>
             <a:pPr algn="l">
-              <a:defRPr sz="1600" b="0">
+              <a:defRPr sz="1500" b="0">
                 <a:solidFill>
                   <a:srgbClr val="CCCCDD"/>
                 </a:solidFill>
               </a:defRPr>
             </a:pPr>
             <a:r>
-              <a:t>Stable-Baselines3 · PyBullet 物理引擎</a:t>
-            </a:r>
-          </a:p>
-        </p:txBody>
-      </p:sp>
-      <p:sp>
-        <p:nvSpPr>
-          <p:cNvPr id="10" name="Rectangle 9"/>
+              <a:t>SAC 的 replay buffer 保存所有历史轨迹（含失败的），可反复回放学习</a:t>
+            </a:r>
+            <a:br/>
+            <a:r>
+              <a:t>新旧数据融合，样本效率远超 on-policy</a:t>
+            </a:r>
+          </a:p>
+        </p:txBody>
+      </p:sp>
+      <p:sp>
+        <p:nvSpPr>
+          <p:cNvPr id="8" name="Rectangle 7"/>
           <p:cNvSpPr/>
           <p:nvPr/>
         </p:nvSpPr>
         <p:spPr>
           <a:xfrm>
-            <a:off x="548640" y="3931920"/>
-            <a:ext cx="109728" cy="109728"/>
+            <a:off x="548640" y="2377439"/>
+            <a:ext cx="109728" cy="914400"/>
           </a:xfrm>
           <a:prstGeom prst="rect">
             <a:avLst/>
           </a:prstGeom>
           <a:solidFill>
-            <a:srgbClr val="00D2FF"/>
+            <a:srgbClr val="00CC66"/>
           </a:solidFill>
           <a:ln>
             <a:noFill/>
@@ -3631,90 +3568,20 @@
       </p:sp>
       <p:sp>
         <p:nvSpPr>
-          <p:cNvPr id="11" name="TextBox 10"/>
-          <p:cNvSpPr txBox="1"/>
-          <p:nvPr/>
-        </p:nvSpPr>
-        <p:spPr>
-          <a:xfrm>
-            <a:off x="914400" y="3886200"/>
-            <a:ext cx="2743200" cy="365760"/>
-          </a:xfrm>
-          <a:prstGeom prst="rect">
-            <a:avLst/>
-          </a:prstGeom>
-          <a:noFill/>
-        </p:spPr>
-        <p:txBody>
-          <a:bodyPr wrap="square">
-            <a:spAutoFit/>
-          </a:bodyPr>
-          <a:lstStyle/>
-          <a:p>
-            <a:pPr algn="l">
-              <a:defRPr sz="1800" b="1">
-                <a:solidFill>
-                  <a:srgbClr val="00D2FF"/>
-                </a:solidFill>
-              </a:defRPr>
-            </a:pPr>
-            <a:r>
-              <a:t>递进任务</a:t>
-            </a:r>
-          </a:p>
-        </p:txBody>
-      </p:sp>
-      <p:sp>
-        <p:nvSpPr>
-          <p:cNvPr id="12" name="TextBox 11"/>
-          <p:cNvSpPr txBox="1"/>
-          <p:nvPr/>
-        </p:nvSpPr>
-        <p:spPr>
-          <a:xfrm>
-            <a:off x="914400" y="4251959"/>
-            <a:ext cx="10058400" cy="731520"/>
-          </a:xfrm>
-          <a:prstGeom prst="rect">
-            <a:avLst/>
-          </a:prstGeom>
-          <a:noFill/>
-        </p:spPr>
-        <p:txBody>
-          <a:bodyPr wrap="square">
-            <a:spAutoFit/>
-          </a:bodyPr>
-          <a:lstStyle/>
-          <a:p>
-            <a:pPr algn="l">
-              <a:defRPr sz="1600" b="0">
-                <a:solidFill>
-                  <a:srgbClr val="CCCCDD"/>
-                </a:solidFill>
-              </a:defRPr>
-            </a:pPr>
-            <a:r>
-              <a:t>Reach（到达）→ Push（推动）→ PickAndPlace（抓取放置）</a:t>
-            </a:r>
-          </a:p>
-        </p:txBody>
-      </p:sp>
-      <p:sp>
-        <p:nvSpPr>
-          <p:cNvPr id="13" name="Rectangle 12"/>
+          <p:cNvPr id="9" name="Rectangle 8"/>
           <p:cNvSpPr/>
           <p:nvPr/>
         </p:nvSpPr>
         <p:spPr>
           <a:xfrm>
-            <a:off x="548640" y="5303520"/>
-            <a:ext cx="109728" cy="109728"/>
+            <a:off x="914400" y="2377439"/>
+            <a:ext cx="10515600" cy="914400"/>
           </a:xfrm>
           <a:prstGeom prst="rect">
             <a:avLst/>
           </a:prstGeom>
           <a:solidFill>
-            <a:srgbClr val="00D2FF"/>
+            <a:srgbClr val="252540"/>
           </a:solidFill>
           <a:ln>
             <a:noFill/>
@@ -3744,14 +3611,14 @@
       </p:sp>
       <p:sp>
         <p:nvSpPr>
-          <p:cNvPr id="14" name="TextBox 13"/>
+          <p:cNvPr id="10" name="TextBox 9"/>
           <p:cNvSpPr txBox="1"/>
           <p:nvPr/>
         </p:nvSpPr>
         <p:spPr>
           <a:xfrm>
-            <a:off x="914400" y="5257800"/>
-            <a:ext cx="2743200" cy="365760"/>
+            <a:off x="1188720" y="2423159"/>
+            <a:ext cx="9144000" cy="365760"/>
           </a:xfrm>
           <a:prstGeom prst="rect">
             <a:avLst/>
@@ -3765,28 +3632,28 @@
           <a:lstStyle/>
           <a:p>
             <a:pPr algn="l">
-              <a:defRPr sz="1800" b="1">
-                <a:solidFill>
-                  <a:srgbClr val="00D2FF"/>
+              <a:defRPr sz="2000" b="1">
+                <a:solidFill>
+                  <a:srgbClr val="00CC66"/>
                 </a:solidFill>
               </a:defRPr>
             </a:pPr>
             <a:r>
-              <a:t>核心任务</a:t>
-            </a:r>
-          </a:p>
-        </p:txBody>
-      </p:sp>
-      <p:sp>
-        <p:nvSpPr>
-          <p:cNvPr id="15" name="TextBox 14"/>
+              <a:t>HER 重标目标</a:t>
+            </a:r>
+          </a:p>
+        </p:txBody>
+      </p:sp>
+      <p:sp>
+        <p:nvSpPr>
+          <p:cNvPr id="11" name="TextBox 10"/>
           <p:cNvSpPr txBox="1"/>
           <p:nvPr/>
         </p:nvSpPr>
         <p:spPr>
           <a:xfrm>
-            <a:off x="914400" y="5623559"/>
-            <a:ext cx="10058400" cy="731520"/>
+            <a:off x="1188720" y="2788920"/>
+            <a:ext cx="9601200" cy="457200"/>
           </a:xfrm>
           <a:prstGeom prst="rect">
             <a:avLst/>
@@ -3800,22 +3667,338 @@
           <a:lstStyle/>
           <a:p>
             <a:pPr algn="l">
-              <a:defRPr sz="1600" b="0">
+              <a:defRPr sz="1500" b="0">
                 <a:solidFill>
                   <a:srgbClr val="CCCCDD"/>
                 </a:solidFill>
               </a:defRPr>
             </a:pPr>
             <a:r>
-              <a:t>PandaPickAndPlaceDense-v3</a:t>
+              <a:t>把没抓到的轨迹 → 目标改成手的位置 → 就变成了"差一点就成功"的正样本</a:t>
             </a:r>
             <a:br/>
             <a:r>
-              <a:t>多阶段：接近→抓取→抬起→移动→放置</a:t>
+              <a:t>失败不再是浪费，而是下一次学习的基础</a:t>
+            </a:r>
+          </a:p>
+        </p:txBody>
+      </p:sp>
+      <p:sp>
+        <p:nvSpPr>
+          <p:cNvPr id="12" name="Rectangle 11"/>
+          <p:cNvSpPr/>
+          <p:nvPr/>
+        </p:nvSpPr>
+        <p:spPr>
+          <a:xfrm>
+            <a:off x="548640" y="3657600"/>
+            <a:ext cx="109728" cy="914400"/>
+          </a:xfrm>
+          <a:prstGeom prst="rect">
+            <a:avLst/>
+          </a:prstGeom>
+          <a:solidFill>
+            <a:srgbClr val="00CC66"/>
+          </a:solidFill>
+          <a:ln>
+            <a:noFill/>
+          </a:ln>
+        </p:spPr>
+        <p:style>
+          <a:lnRef idx="1">
+            <a:schemeClr val="accent1"/>
+          </a:lnRef>
+          <a:fillRef idx="3">
+            <a:schemeClr val="accent1"/>
+          </a:fillRef>
+          <a:effectRef idx="2">
+            <a:schemeClr val="accent1"/>
+          </a:effectRef>
+          <a:fontRef idx="minor">
+            <a:schemeClr val="lt1"/>
+          </a:fontRef>
+        </p:style>
+        <p:txBody>
+          <a:bodyPr rtlCol="0" anchor="ctr"/>
+          <a:lstStyle/>
+          <a:p>
+            <a:pPr algn="ctr"/>
+          </a:p>
+        </p:txBody>
+      </p:sp>
+      <p:sp>
+        <p:nvSpPr>
+          <p:cNvPr id="13" name="Rectangle 12"/>
+          <p:cNvSpPr/>
+          <p:nvPr/>
+        </p:nvSpPr>
+        <p:spPr>
+          <a:xfrm>
+            <a:off x="914400" y="3657600"/>
+            <a:ext cx="10515600" cy="914400"/>
+          </a:xfrm>
+          <a:prstGeom prst="rect">
+            <a:avLst/>
+          </a:prstGeom>
+          <a:solidFill>
+            <a:srgbClr val="252540"/>
+          </a:solidFill>
+          <a:ln>
+            <a:noFill/>
+          </a:ln>
+        </p:spPr>
+        <p:style>
+          <a:lnRef idx="1">
+            <a:schemeClr val="accent1"/>
+          </a:lnRef>
+          <a:fillRef idx="3">
+            <a:schemeClr val="accent1"/>
+          </a:fillRef>
+          <a:effectRef idx="2">
+            <a:schemeClr val="accent1"/>
+          </a:effectRef>
+          <a:fontRef idx="minor">
+            <a:schemeClr val="lt1"/>
+          </a:fontRef>
+        </p:style>
+        <p:txBody>
+          <a:bodyPr rtlCol="0" anchor="ctr"/>
+          <a:lstStyle/>
+          <a:p>
+            <a:pPr algn="ctr"/>
+          </a:p>
+        </p:txBody>
+      </p:sp>
+      <p:sp>
+        <p:nvSpPr>
+          <p:cNvPr id="14" name="TextBox 13"/>
+          <p:cNvSpPr txBox="1"/>
+          <p:nvPr/>
+        </p:nvSpPr>
+        <p:spPr>
+          <a:xfrm>
+            <a:off x="1188720" y="3703320"/>
+            <a:ext cx="9144000" cy="365760"/>
+          </a:xfrm>
+          <a:prstGeom prst="rect">
+            <a:avLst/>
+          </a:prstGeom>
+          <a:noFill/>
+        </p:spPr>
+        <p:txBody>
+          <a:bodyPr wrap="square">
+            <a:spAutoFit/>
+          </a:bodyPr>
+          <a:lstStyle/>
+          <a:p>
+            <a:pPr algn="l">
+              <a:defRPr sz="2000" b="1">
+                <a:solidFill>
+                  <a:srgbClr val="00CC66"/>
+                </a:solidFill>
+              </a:defRPr>
+            </a:pPr>
+            <a:r>
+              <a:t>样本效率对比</a:t>
+            </a:r>
+          </a:p>
+        </p:txBody>
+      </p:sp>
+      <p:sp>
+        <p:nvSpPr>
+          <p:cNvPr id="15" name="TextBox 14"/>
+          <p:cNvSpPr txBox="1"/>
+          <p:nvPr/>
+        </p:nvSpPr>
+        <p:spPr>
+          <a:xfrm>
+            <a:off x="1188720" y="4069080"/>
+            <a:ext cx="9601200" cy="457200"/>
+          </a:xfrm>
+          <a:prstGeom prst="rect">
+            <a:avLst/>
+          </a:prstGeom>
+          <a:noFill/>
+        </p:spPr>
+        <p:txBody>
+          <a:bodyPr wrap="square">
+            <a:spAutoFit/>
+          </a:bodyPr>
+          <a:lstStyle/>
+          <a:p>
+            <a:pPr algn="l">
+              <a:defRPr sz="1500" b="0">
+                <a:solidFill>
+                  <a:srgbClr val="CCCCDD"/>
+                </a:solidFill>
+              </a:defRPr>
+            </a:pPr>
+            <a:r>
+              <a:t>40 万步 → 87% 成功率</a:t>
             </a:r>
             <a:br/>
             <a:r>
-              <a:t>一类失败则整体失败，是典型的复杂多阶段任务</a:t>
+              <a:t>100 万步 → 99~100% 成功率</a:t>
+            </a:r>
+            <a:br/>
+            <a:r>
+              <a:t>而 PPO 760 万步仅 4%</a:t>
+            </a:r>
+          </a:p>
+        </p:txBody>
+      </p:sp>
+      <p:sp>
+        <p:nvSpPr>
+          <p:cNvPr id="16" name="Rectangle 15"/>
+          <p:cNvSpPr/>
+          <p:nvPr/>
+        </p:nvSpPr>
+        <p:spPr>
+          <a:xfrm>
+            <a:off x="548640" y="4937759"/>
+            <a:ext cx="109728" cy="914400"/>
+          </a:xfrm>
+          <a:prstGeom prst="rect">
+            <a:avLst/>
+          </a:prstGeom>
+          <a:solidFill>
+            <a:srgbClr val="00CC66"/>
+          </a:solidFill>
+          <a:ln>
+            <a:noFill/>
+          </a:ln>
+        </p:spPr>
+        <p:style>
+          <a:lnRef idx="1">
+            <a:schemeClr val="accent1"/>
+          </a:lnRef>
+          <a:fillRef idx="3">
+            <a:schemeClr val="accent1"/>
+          </a:fillRef>
+          <a:effectRef idx="2">
+            <a:schemeClr val="accent1"/>
+          </a:effectRef>
+          <a:fontRef idx="minor">
+            <a:schemeClr val="lt1"/>
+          </a:fontRef>
+        </p:style>
+        <p:txBody>
+          <a:bodyPr rtlCol="0" anchor="ctr"/>
+          <a:lstStyle/>
+          <a:p>
+            <a:pPr algn="ctr"/>
+          </a:p>
+        </p:txBody>
+      </p:sp>
+      <p:sp>
+        <p:nvSpPr>
+          <p:cNvPr id="17" name="Rectangle 16"/>
+          <p:cNvSpPr/>
+          <p:nvPr/>
+        </p:nvSpPr>
+        <p:spPr>
+          <a:xfrm>
+            <a:off x="914400" y="4937759"/>
+            <a:ext cx="10515600" cy="914400"/>
+          </a:xfrm>
+          <a:prstGeom prst="rect">
+            <a:avLst/>
+          </a:prstGeom>
+          <a:solidFill>
+            <a:srgbClr val="252540"/>
+          </a:solidFill>
+          <a:ln>
+            <a:noFill/>
+          </a:ln>
+        </p:spPr>
+        <p:style>
+          <a:lnRef idx="1">
+            <a:schemeClr val="accent1"/>
+          </a:lnRef>
+          <a:fillRef idx="3">
+            <a:schemeClr val="accent1"/>
+          </a:fillRef>
+          <a:effectRef idx="2">
+            <a:schemeClr val="accent1"/>
+          </a:effectRef>
+          <a:fontRef idx="minor">
+            <a:schemeClr val="lt1"/>
+          </a:fontRef>
+        </p:style>
+        <p:txBody>
+          <a:bodyPr rtlCol="0" anchor="ctr"/>
+          <a:lstStyle/>
+          <a:p>
+            <a:pPr algn="ctr"/>
+          </a:p>
+        </p:txBody>
+      </p:sp>
+      <p:sp>
+        <p:nvSpPr>
+          <p:cNvPr id="18" name="TextBox 17"/>
+          <p:cNvSpPr txBox="1"/>
+          <p:nvPr/>
+        </p:nvSpPr>
+        <p:spPr>
+          <a:xfrm>
+            <a:off x="1188720" y="4983479"/>
+            <a:ext cx="9144000" cy="365760"/>
+          </a:xfrm>
+          <a:prstGeom prst="rect">
+            <a:avLst/>
+          </a:prstGeom>
+          <a:noFill/>
+        </p:spPr>
+        <p:txBody>
+          <a:bodyPr wrap="square">
+            <a:spAutoFit/>
+          </a:bodyPr>
+          <a:lstStyle/>
+          <a:p>
+            <a:pPr algn="l">
+              <a:defRPr sz="2000" b="1">
+                <a:solidFill>
+                  <a:srgbClr val="00CC66"/>
+                </a:solidFill>
+              </a:defRPr>
+            </a:pPr>
+            <a:r>
+              <a:t>结论</a:t>
+            </a:r>
+          </a:p>
+        </p:txBody>
+      </p:sp>
+      <p:sp>
+        <p:nvSpPr>
+          <p:cNvPr id="19" name="TextBox 18"/>
+          <p:cNvSpPr txBox="1"/>
+          <p:nvPr/>
+        </p:nvSpPr>
+        <p:spPr>
+          <a:xfrm>
+            <a:off x="1188720" y="5349240"/>
+            <a:ext cx="9601200" cy="457200"/>
+          </a:xfrm>
+          <a:prstGeom prst="rect">
+            <a:avLst/>
+          </a:prstGeom>
+          <a:noFill/>
+        </p:spPr>
+        <p:txBody>
+          <a:bodyPr wrap="square">
+            <a:spAutoFit/>
+          </a:bodyPr>
+          <a:lstStyle/>
+          <a:p>
+            <a:pPr algn="l">
+              <a:defRPr sz="1500" b="0">
+                <a:solidFill>
+                  <a:srgbClr val="CCCCDD"/>
+                </a:solidFill>
+              </a:defRPr>
+            </a:pPr>
+            <a:r>
+              <a:t>Off-policy + HER 天然适合多阶段任务，是近三年 RL 领域的重要成果</a:t>
             </a:r>
           </a:p>
         </p:txBody>
@@ -3828,7 +4011,7 @@
 </p:sld>
 </file>
 
-<file path=ppt/slides/slide3.xml><?xml version="1.0" encoding="utf-8"?>
+<file path=ppt/slides/slide11.xml><?xml version="1.0" encoding="utf-8"?>
 <p:sld xmlns:a="http://schemas.openxmlformats.org/drawingml/2006/main" xmlns:p="http://schemas.openxmlformats.org/presentationml/2006/main" xmlns:r="http://schemas.openxmlformats.org/officeDocument/2006/relationships">
   <p:cSld>
     <p:bg>
@@ -3861,7 +4044,7 @@
             <a:avLst/>
           </a:prstGeom>
           <a:solidFill>
-            <a:srgbClr val="E86C00"/>
+            <a:srgbClr val="FF69B4"/>
           </a:solidFill>
           <a:ln>
             <a:noFill/>
@@ -3897,8 +4080,8 @@
         </p:nvSpPr>
         <p:spPr>
           <a:xfrm>
-            <a:off x="548640" y="274320"/>
-            <a:ext cx="4572000" cy="731520"/>
+            <a:off x="548640" y="182880"/>
+            <a:ext cx="5486400" cy="548640"/>
           </a:xfrm>
           <a:prstGeom prst="rect">
             <a:avLst/>
@@ -3912,803 +4095,14 @@
           <a:lstStyle/>
           <a:p>
             <a:pPr algn="l">
-              <a:defRPr sz="3200" b="1">
-                <a:solidFill>
-                  <a:srgbClr val="E86C00"/>
+              <a:defRPr sz="2800" b="1">
+                <a:solidFill>
+                  <a:srgbClr val="FFFFFF"/>
                 </a:solidFill>
               </a:defRPr>
             </a:pPr>
             <a:r>
-              <a:t>算法介绍：PPO</a:t>
-            </a:r>
-          </a:p>
-        </p:txBody>
-      </p:sp>
-      <p:pic>
-        <p:nvPicPr>
-          <p:cNvPr id="4" name="Picture 3" descr="66fa1378d30f7bc13830dd1067ded3ee.png"/>
-          <p:cNvPicPr>
-            <a:picLocks noChangeAspect="1"/>
-          </p:cNvPicPr>
-          <p:nvPr/>
-        </p:nvPicPr>
-        <p:blipFill>
-          <a:blip r:embed="rId2"/>
-          <a:stretch>
-            <a:fillRect/>
-          </a:stretch>
-        </p:blipFill>
-        <p:spPr>
-          <a:xfrm>
-            <a:off x="457200" y="1188720"/>
-            <a:ext cx="5486400" cy="3874770"/>
-          </a:xfrm>
-          <a:prstGeom prst="rect">
-            <a:avLst/>
-          </a:prstGeom>
-        </p:spPr>
-      </p:pic>
-      <p:pic>
-        <p:nvPicPr>
-          <p:cNvPr id="5" name="Picture 4" descr="a8884ed5a1217ffca92d90c278e2d7ba.png"/>
-          <p:cNvPicPr>
-            <a:picLocks noChangeAspect="1"/>
-          </p:cNvPicPr>
-          <p:nvPr/>
-        </p:nvPicPr>
-        <p:blipFill>
-          <a:blip r:embed="rId3"/>
-          <a:stretch>
-            <a:fillRect/>
-          </a:stretch>
-        </p:blipFill>
-        <p:spPr>
-          <a:xfrm>
-            <a:off x="6217920" y="1188720"/>
-            <a:ext cx="5486400" cy="3821753"/>
-          </a:xfrm>
-          <a:prstGeom prst="rect">
-            <a:avLst/>
-          </a:prstGeom>
-        </p:spPr>
-      </p:pic>
-      <p:sp>
-        <p:nvSpPr>
-          <p:cNvPr id="6" name="TextBox 5"/>
-          <p:cNvSpPr txBox="1"/>
-          <p:nvPr/>
-        </p:nvSpPr>
-        <p:spPr>
-          <a:xfrm>
-            <a:off x="457200" y="4389120"/>
-            <a:ext cx="5486400" cy="365760"/>
-          </a:xfrm>
-          <a:prstGeom prst="rect">
-            <a:avLst/>
-          </a:prstGeom>
-          <a:noFill/>
-        </p:spPr>
-        <p:txBody>
-          <a:bodyPr wrap="square">
-            <a:spAutoFit/>
-          </a:bodyPr>
-          <a:lstStyle/>
-          <a:p>
-            <a:pPr algn="ctr">
-              <a:defRPr sz="1400" b="0">
-                <a:solidFill>
-                  <a:srgbClr val="8888AA"/>
-                </a:solidFill>
-              </a:defRPr>
-            </a:pPr>
-            <a:r>
-              <a:t>PandaReach 训练曲线（PPO, 4万步达100%成功率）</a:t>
-            </a:r>
-          </a:p>
-        </p:txBody>
-      </p:sp>
-      <p:sp>
-        <p:nvSpPr>
-          <p:cNvPr id="7" name="TextBox 6"/>
-          <p:cNvSpPr txBox="1"/>
-          <p:nvPr/>
-        </p:nvSpPr>
-        <p:spPr>
-          <a:xfrm>
-            <a:off x="6217920" y="4389120"/>
-            <a:ext cx="5486400" cy="365760"/>
-          </a:xfrm>
-          <a:prstGeom prst="rect">
-            <a:avLst/>
-          </a:prstGeom>
-          <a:noFill/>
-        </p:spPr>
-        <p:txBody>
-          <a:bodyPr wrap="square">
-            <a:spAutoFit/>
-          </a:bodyPr>
-          <a:lstStyle/>
-          <a:p>
-            <a:pPr algn="ctr">
-              <a:defRPr sz="1400" b="0">
-                <a:solidFill>
-                  <a:srgbClr val="8888AA"/>
-                </a:solidFill>
-              </a:defRPr>
-            </a:pPr>
-            <a:r>
-              <a:t>PandaReach 成功率先升至100%</a:t>
-            </a:r>
-          </a:p>
-        </p:txBody>
-      </p:sp>
-      <p:sp>
-        <p:nvSpPr>
-          <p:cNvPr id="8" name="TextBox 7"/>
-          <p:cNvSpPr txBox="1"/>
-          <p:nvPr/>
-        </p:nvSpPr>
-        <p:spPr>
-          <a:xfrm>
-            <a:off x="548640" y="4937760"/>
-            <a:ext cx="10058400" cy="365760"/>
-          </a:xfrm>
-          <a:prstGeom prst="rect">
-            <a:avLst/>
-          </a:prstGeom>
-          <a:noFill/>
-        </p:spPr>
-        <p:txBody>
-          <a:bodyPr wrap="square">
-            <a:spAutoFit/>
-          </a:bodyPr>
-          <a:lstStyle/>
-          <a:p>
-            <a:pPr algn="l">
-              <a:defRPr sz="1600" b="0">
-                <a:solidFill>
-                  <a:srgbClr val="CCCCDD"/>
-                </a:solidFill>
-              </a:defRPr>
-            </a:pPr>
-            <a:r>
-              <a:t>• On-policy 算法：采集一批数据 → 更新策略 → 丢弃</a:t>
-            </a:r>
-          </a:p>
-        </p:txBody>
-      </p:sp>
-      <p:sp>
-        <p:nvSpPr>
-          <p:cNvPr id="9" name="TextBox 8"/>
-          <p:cNvSpPr txBox="1"/>
-          <p:nvPr/>
-        </p:nvSpPr>
-        <p:spPr>
-          <a:xfrm>
-            <a:off x="548640" y="5394960"/>
-            <a:ext cx="10058400" cy="365760"/>
-          </a:xfrm>
-          <a:prstGeom prst="rect">
-            <a:avLst/>
-          </a:prstGeom>
-          <a:noFill/>
-        </p:spPr>
-        <p:txBody>
-          <a:bodyPr wrap="square">
-            <a:spAutoFit/>
-          </a:bodyPr>
-          <a:lstStyle/>
-          <a:p>
-            <a:pPr algn="l">
-              <a:defRPr sz="1600" b="0">
-                <a:solidFill>
-                  <a:srgbClr val="CCCCDD"/>
-                </a:solidFill>
-              </a:defRPr>
-            </a:pPr>
-            <a:r>
-              <a:t>• 适合单阶段任务（如 Reach），100% 成功</a:t>
-            </a:r>
-          </a:p>
-        </p:txBody>
-      </p:sp>
-      <p:sp>
-        <p:nvSpPr>
-          <p:cNvPr id="10" name="TextBox 9"/>
-          <p:cNvSpPr txBox="1"/>
-          <p:nvPr/>
-        </p:nvSpPr>
-        <p:spPr>
-          <a:xfrm>
-            <a:off x="548640" y="5852160"/>
-            <a:ext cx="10058400" cy="365760"/>
-          </a:xfrm>
-          <a:prstGeom prst="rect">
-            <a:avLst/>
-          </a:prstGeom>
-          <a:noFill/>
-        </p:spPr>
-        <p:txBody>
-          <a:bodyPr wrap="square">
-            <a:spAutoFit/>
-          </a:bodyPr>
-          <a:lstStyle/>
-          <a:p>
-            <a:pPr algn="l">
-              <a:defRPr sz="1600" b="0">
-                <a:solidFill>
-                  <a:srgbClr val="CCCCDD"/>
-                </a:solidFill>
-              </a:defRPr>
-            </a:pPr>
-            <a:r>
-              <a:t>• 样本效率低，每步数据只用一次</a:t>
-            </a:r>
-          </a:p>
-        </p:txBody>
-      </p:sp>
-    </p:spTree>
-  </p:cSld>
-  <p:clrMapOvr>
-    <a:masterClrMapping/>
-  </p:clrMapOvr>
-</p:sld>
-</file>
-
-<file path=ppt/slides/slide4.xml><?xml version="1.0" encoding="utf-8"?>
-<p:sld xmlns:a="http://schemas.openxmlformats.org/drawingml/2006/main" xmlns:p="http://schemas.openxmlformats.org/presentationml/2006/main" xmlns:r="http://schemas.openxmlformats.org/officeDocument/2006/relationships">
-  <p:cSld>
-    <p:bg>
-      <p:bgPr>
-        <a:solidFill>
-          <a:srgbClr val="1A1A2E"/>
-        </a:solidFill>
-        <a:effectLst/>
-      </p:bgPr>
-    </p:bg>
-    <p:spTree>
-      <p:nvGrpSpPr>
-        <p:cNvPr id="1" name=""/>
-        <p:cNvGrpSpPr/>
-        <p:nvPr/>
-      </p:nvGrpSpPr>
-      <p:grpSpPr/>
-      <p:sp>
-        <p:nvSpPr>
-          <p:cNvPr id="2" name="Rectangle 1"/>
-          <p:cNvSpPr/>
-          <p:nvPr/>
-        </p:nvSpPr>
-        <p:spPr>
-          <a:xfrm>
-            <a:off x="0" y="0"/>
-            <a:ext cx="109728" cy="6858000"/>
-          </a:xfrm>
-          <a:prstGeom prst="rect">
-            <a:avLst/>
-          </a:prstGeom>
-          <a:solidFill>
-            <a:srgbClr val="00CC66"/>
-          </a:solidFill>
-          <a:ln>
-            <a:noFill/>
-          </a:ln>
-        </p:spPr>
-        <p:style>
-          <a:lnRef idx="1">
-            <a:schemeClr val="accent1"/>
-          </a:lnRef>
-          <a:fillRef idx="3">
-            <a:schemeClr val="accent1"/>
-          </a:fillRef>
-          <a:effectRef idx="2">
-            <a:schemeClr val="accent1"/>
-          </a:effectRef>
-          <a:fontRef idx="minor">
-            <a:schemeClr val="lt1"/>
-          </a:fontRef>
-        </p:style>
-        <p:txBody>
-          <a:bodyPr rtlCol="0" anchor="ctr"/>
-          <a:lstStyle/>
-          <a:p>
-            <a:pPr algn="ctr"/>
-          </a:p>
-        </p:txBody>
-      </p:sp>
-      <p:sp>
-        <p:nvSpPr>
-          <p:cNvPr id="3" name="TextBox 2"/>
-          <p:cNvSpPr txBox="1"/>
-          <p:nvPr/>
-        </p:nvSpPr>
-        <p:spPr>
-          <a:xfrm>
-            <a:off x="548640" y="274320"/>
-            <a:ext cx="5486400" cy="731520"/>
-          </a:xfrm>
-          <a:prstGeom prst="rect">
-            <a:avLst/>
-          </a:prstGeom>
-          <a:noFill/>
-        </p:spPr>
-        <p:txBody>
-          <a:bodyPr wrap="square">
-            <a:spAutoFit/>
-          </a:bodyPr>
-          <a:lstStyle/>
-          <a:p>
-            <a:pPr algn="l">
-              <a:defRPr sz="3200" b="1">
-                <a:solidFill>
-                  <a:srgbClr val="00CC66"/>
-                </a:solidFill>
-              </a:defRPr>
-            </a:pPr>
-            <a:r>
-              <a:t>算法介绍：SAC + HER</a:t>
-            </a:r>
-          </a:p>
-        </p:txBody>
-      </p:sp>
-      <p:sp>
-        <p:nvSpPr>
-          <p:cNvPr id="4" name="TextBox 3"/>
-          <p:cNvSpPr txBox="1"/>
-          <p:nvPr/>
-        </p:nvSpPr>
-        <p:spPr>
-          <a:xfrm>
-            <a:off x="548640" y="1188720"/>
-            <a:ext cx="4572000" cy="365760"/>
-          </a:xfrm>
-          <a:prstGeom prst="rect">
-            <a:avLst/>
-          </a:prstGeom>
-          <a:noFill/>
-        </p:spPr>
-        <p:txBody>
-          <a:bodyPr wrap="square">
-            <a:spAutoFit/>
-          </a:bodyPr>
-          <a:lstStyle/>
-          <a:p>
-            <a:pPr algn="l">
-              <a:defRPr sz="2200" b="1">
-                <a:solidFill>
-                  <a:srgbClr val="00D2FF"/>
-                </a:solidFill>
-              </a:defRPr>
-            </a:pPr>
-            <a:r>
-              <a:t>SAC (Soft Actor-Critic)</a:t>
-            </a:r>
-          </a:p>
-        </p:txBody>
-      </p:sp>
-      <p:sp>
-        <p:nvSpPr>
-          <p:cNvPr id="5" name="TextBox 4"/>
-          <p:cNvSpPr txBox="1"/>
-          <p:nvPr/>
-        </p:nvSpPr>
-        <p:spPr>
-          <a:xfrm>
-            <a:off x="731520" y="1645920"/>
-            <a:ext cx="4572000" cy="365760"/>
-          </a:xfrm>
-          <a:prstGeom prst="rect">
-            <a:avLst/>
-          </a:prstGeom>
-          <a:noFill/>
-        </p:spPr>
-        <p:txBody>
-          <a:bodyPr wrap="square">
-            <a:spAutoFit/>
-          </a:bodyPr>
-          <a:lstStyle/>
-          <a:p>
-            <a:pPr algn="l">
-              <a:defRPr sz="1600" b="0">
-                <a:solidFill>
-                  <a:srgbClr val="CCCCDD"/>
-                </a:solidFill>
-              </a:defRPr>
-            </a:pPr>
-            <a:r>
-              <a:t>• Off-policy 算法，有 replay buffer</a:t>
-            </a:r>
-          </a:p>
-        </p:txBody>
-      </p:sp>
-      <p:sp>
-        <p:nvSpPr>
-          <p:cNvPr id="6" name="TextBox 5"/>
-          <p:cNvSpPr txBox="1"/>
-          <p:nvPr/>
-        </p:nvSpPr>
-        <p:spPr>
-          <a:xfrm>
-            <a:off x="731520" y="2103120"/>
-            <a:ext cx="4572000" cy="365760"/>
-          </a:xfrm>
-          <a:prstGeom prst="rect">
-            <a:avLst/>
-          </a:prstGeom>
-          <a:noFill/>
-        </p:spPr>
-        <p:txBody>
-          <a:bodyPr wrap="square">
-            <a:spAutoFit/>
-          </a:bodyPr>
-          <a:lstStyle/>
-          <a:p>
-            <a:pPr algn="l">
-              <a:defRPr sz="1600" b="0">
-                <a:solidFill>
-                  <a:srgbClr val="CCCCDD"/>
-                </a:solidFill>
-              </a:defRPr>
-            </a:pPr>
-            <a:r>
-              <a:t>• 最大熵框架：在奖励和探索之间平衡</a:t>
-            </a:r>
-          </a:p>
-        </p:txBody>
-      </p:sp>
-      <p:sp>
-        <p:nvSpPr>
-          <p:cNvPr id="7" name="TextBox 6"/>
-          <p:cNvSpPr txBox="1"/>
-          <p:nvPr/>
-        </p:nvSpPr>
-        <p:spPr>
-          <a:xfrm>
-            <a:off x="731520" y="2560320"/>
-            <a:ext cx="4572000" cy="365760"/>
-          </a:xfrm>
-          <a:prstGeom prst="rect">
-            <a:avLst/>
-          </a:prstGeom>
-          <a:noFill/>
-        </p:spPr>
-        <p:txBody>
-          <a:bodyPr wrap="square">
-            <a:spAutoFit/>
-          </a:bodyPr>
-          <a:lstStyle/>
-          <a:p>
-            <a:pPr algn="l">
-              <a:defRPr sz="1600" b="0">
-                <a:solidFill>
-                  <a:srgbClr val="CCCCDD"/>
-                </a:solidFill>
-              </a:defRPr>
-            </a:pPr>
-            <a:r>
-              <a:t>• 历史数据可反复使用，样本效率高</a:t>
-            </a:r>
-          </a:p>
-        </p:txBody>
-      </p:sp>
-      <p:sp>
-        <p:nvSpPr>
-          <p:cNvPr id="8" name="TextBox 7"/>
-          <p:cNvSpPr txBox="1"/>
-          <p:nvPr/>
-        </p:nvSpPr>
-        <p:spPr>
-          <a:xfrm>
-            <a:off x="5943600" y="1188720"/>
-            <a:ext cx="5486400" cy="365760"/>
-          </a:xfrm>
-          <a:prstGeom prst="rect">
-            <a:avLst/>
-          </a:prstGeom>
-          <a:noFill/>
-        </p:spPr>
-        <p:txBody>
-          <a:bodyPr wrap="square">
-            <a:spAutoFit/>
-          </a:bodyPr>
-          <a:lstStyle/>
-          <a:p>
-            <a:pPr algn="l">
-              <a:defRPr sz="2200" b="1">
-                <a:solidFill>
-                  <a:srgbClr val="00D2FF"/>
-                </a:solidFill>
-              </a:defRPr>
-            </a:pPr>
-            <a:r>
-              <a:t>HER (Hindsight Experience Replay)</a:t>
-            </a:r>
-          </a:p>
-        </p:txBody>
-      </p:sp>
-      <p:sp>
-        <p:nvSpPr>
-          <p:cNvPr id="9" name="TextBox 8"/>
-          <p:cNvSpPr txBox="1"/>
-          <p:nvPr/>
-        </p:nvSpPr>
-        <p:spPr>
-          <a:xfrm>
-            <a:off x="6126480" y="1645920"/>
-            <a:ext cx="5486400" cy="365760"/>
-          </a:xfrm>
-          <a:prstGeom prst="rect">
-            <a:avLst/>
-          </a:prstGeom>
-          <a:noFill/>
-        </p:spPr>
-        <p:txBody>
-          <a:bodyPr wrap="square">
-            <a:spAutoFit/>
-          </a:bodyPr>
-          <a:lstStyle/>
-          <a:p>
-            <a:pPr algn="l">
-              <a:defRPr sz="1600" b="0">
-                <a:solidFill>
-                  <a:srgbClr val="CCCCDD"/>
-                </a:solidFill>
-              </a:defRPr>
-            </a:pPr>
-            <a:r>
-              <a:t>• 把失败轨迹"重新标目标"变成有用经验</a:t>
-            </a:r>
-          </a:p>
-        </p:txBody>
-      </p:sp>
-      <p:sp>
-        <p:nvSpPr>
-          <p:cNvPr id="10" name="TextBox 9"/>
-          <p:cNvSpPr txBox="1"/>
-          <p:nvPr/>
-        </p:nvSpPr>
-        <p:spPr>
-          <a:xfrm>
-            <a:off x="6126480" y="2103120"/>
-            <a:ext cx="5486400" cy="365760"/>
-          </a:xfrm>
-          <a:prstGeom prst="rect">
-            <a:avLst/>
-          </a:prstGeom>
-          <a:noFill/>
-        </p:spPr>
-        <p:txBody>
-          <a:bodyPr wrap="square">
-            <a:spAutoFit/>
-          </a:bodyPr>
-          <a:lstStyle/>
-          <a:p>
-            <a:pPr algn="l">
-              <a:defRPr sz="1600" b="0">
-                <a:solidFill>
-                  <a:srgbClr val="CCCCDD"/>
-                </a:solidFill>
-              </a:defRPr>
-            </a:pPr>
-            <a:r>
-              <a:t>• 例如：没抓到物体 → 目标改为手的位置</a:t>
-            </a:r>
-          </a:p>
-        </p:txBody>
-      </p:sp>
-      <p:sp>
-        <p:nvSpPr>
-          <p:cNvPr id="11" name="TextBox 10"/>
-          <p:cNvSpPr txBox="1"/>
-          <p:nvPr/>
-        </p:nvSpPr>
-        <p:spPr>
-          <a:xfrm>
-            <a:off x="6126480" y="2560320"/>
-            <a:ext cx="5486400" cy="365760"/>
-          </a:xfrm>
-          <a:prstGeom prst="rect">
-            <a:avLst/>
-          </a:prstGeom>
-          <a:noFill/>
-        </p:spPr>
-        <p:txBody>
-          <a:bodyPr wrap="square">
-            <a:spAutoFit/>
-          </a:bodyPr>
-          <a:lstStyle/>
-          <a:p>
-            <a:pPr algn="l">
-              <a:defRPr sz="1600" b="0">
-                <a:solidFill>
-                  <a:srgbClr val="CCCCDD"/>
-                </a:solidFill>
-              </a:defRPr>
-            </a:pPr>
-            <a:r>
-              <a:t>• 失败=下一次学习的正样本</a:t>
-            </a:r>
-          </a:p>
-        </p:txBody>
-      </p:sp>
-      <p:sp>
-        <p:nvSpPr>
-          <p:cNvPr id="12" name="Rectangle 11"/>
-          <p:cNvSpPr/>
-          <p:nvPr/>
-        </p:nvSpPr>
-        <p:spPr>
-          <a:xfrm>
-            <a:off x="548640" y="3474720"/>
-            <a:ext cx="10972800" cy="36576"/>
-          </a:xfrm>
-          <a:prstGeom prst="rect">
-            <a:avLst/>
-          </a:prstGeom>
-          <a:solidFill>
-            <a:srgbClr val="FFFFFF"/>
-          </a:solidFill>
-          <a:ln>
-            <a:noFill/>
-          </a:ln>
-        </p:spPr>
-        <p:style>
-          <a:lnRef idx="1">
-            <a:schemeClr val="accent1"/>
-          </a:lnRef>
-          <a:fillRef idx="3">
-            <a:schemeClr val="accent1"/>
-          </a:fillRef>
-          <a:effectRef idx="2">
-            <a:schemeClr val="accent1"/>
-          </a:effectRef>
-          <a:fontRef idx="minor">
-            <a:schemeClr val="lt1"/>
-          </a:fontRef>
-        </p:style>
-        <p:txBody>
-          <a:bodyPr rtlCol="0" anchor="ctr"/>
-          <a:lstStyle/>
-          <a:p>
-            <a:pPr algn="ctr"/>
-          </a:p>
-        </p:txBody>
-      </p:sp>
-      <p:sp>
-        <p:nvSpPr>
-          <p:cNvPr id="13" name="TextBox 12"/>
-          <p:cNvSpPr txBox="1"/>
-          <p:nvPr/>
-        </p:nvSpPr>
-        <p:spPr>
-          <a:xfrm>
-            <a:off x="548640" y="3657600"/>
-            <a:ext cx="10972800" cy="457200"/>
-          </a:xfrm>
-          <a:prstGeom prst="rect">
-            <a:avLst/>
-          </a:prstGeom>
-          <a:noFill/>
-        </p:spPr>
-        <p:txBody>
-          <a:bodyPr wrap="square">
-            <a:spAutoFit/>
-          </a:bodyPr>
-          <a:lstStyle/>
-          <a:p>
-            <a:pPr algn="ctr">
-              <a:defRPr sz="1800" b="1">
-                <a:solidFill>
-                  <a:srgbClr val="00CC66"/>
-                </a:solidFill>
-              </a:defRPr>
-            </a:pPr>
-            <a:r>
-              <a:t>SAC 提供 replay buffer + 高样本效率，HER 将失败转化为有用经验 → 天然互补</a:t>
-            </a:r>
-          </a:p>
-        </p:txBody>
-      </p:sp>
-    </p:spTree>
-  </p:cSld>
-  <p:clrMapOvr>
-    <a:masterClrMapping/>
-  </p:clrMapOvr>
-</p:sld>
-</file>
-
-<file path=ppt/slides/slide5.xml><?xml version="1.0" encoding="utf-8"?>
-<p:sld xmlns:a="http://schemas.openxmlformats.org/drawingml/2006/main" xmlns:p="http://schemas.openxmlformats.org/presentationml/2006/main" xmlns:r="http://schemas.openxmlformats.org/officeDocument/2006/relationships">
-  <p:cSld>
-    <p:bg>
-      <p:bgPr>
-        <a:solidFill>
-          <a:srgbClr val="1A1A2E"/>
-        </a:solidFill>
-        <a:effectLst/>
-      </p:bgPr>
-    </p:bg>
-    <p:spTree>
-      <p:nvGrpSpPr>
-        <p:cNvPr id="1" name=""/>
-        <p:cNvGrpSpPr/>
-        <p:nvPr/>
-      </p:nvGrpSpPr>
-      <p:grpSpPr/>
-      <p:sp>
-        <p:nvSpPr>
-          <p:cNvPr id="2" name="Rectangle 1"/>
-          <p:cNvSpPr/>
-          <p:nvPr/>
-        </p:nvSpPr>
-        <p:spPr>
-          <a:xfrm>
-            <a:off x="0" y="0"/>
-            <a:ext cx="109728" cy="6858000"/>
-          </a:xfrm>
-          <a:prstGeom prst="rect">
-            <a:avLst/>
-          </a:prstGeom>
-          <a:solidFill>
-            <a:srgbClr val="FFD700"/>
-          </a:solidFill>
-          <a:ln>
-            <a:noFill/>
-          </a:ln>
-        </p:spPr>
-        <p:style>
-          <a:lnRef idx="1">
-            <a:schemeClr val="accent1"/>
-          </a:lnRef>
-          <a:fillRef idx="3">
-            <a:schemeClr val="accent1"/>
-          </a:fillRef>
-          <a:effectRef idx="2">
-            <a:schemeClr val="accent1"/>
-          </a:effectRef>
-          <a:fontRef idx="minor">
-            <a:schemeClr val="lt1"/>
-          </a:fontRef>
-        </p:style>
-        <p:txBody>
-          <a:bodyPr rtlCol="0" anchor="ctr"/>
-          <a:lstStyle/>
-          <a:p>
-            <a:pPr algn="ctr"/>
-          </a:p>
-        </p:txBody>
-      </p:sp>
-      <p:sp>
-        <p:nvSpPr>
-          <p:cNvPr id="3" name="TextBox 2"/>
-          <p:cNvSpPr txBox="1"/>
-          <p:nvPr/>
-        </p:nvSpPr>
-        <p:spPr>
-          <a:xfrm>
-            <a:off x="548640" y="274320"/>
-            <a:ext cx="7315200" cy="731520"/>
-          </a:xfrm>
-          <a:prstGeom prst="rect">
-            <a:avLst/>
-          </a:prstGeom>
-          <a:noFill/>
-        </p:spPr>
-        <p:txBody>
-          <a:bodyPr wrap="square">
-            <a:spAutoFit/>
-          </a:bodyPr>
-          <a:lstStyle/>
-          <a:p>
-            <a:pPr algn="l">
-              <a:defRPr sz="3200" b="1">
-                <a:solidFill>
-                  <a:srgbClr val="FFD700"/>
-                </a:solidFill>
-              </a:defRPr>
-            </a:pPr>
-            <a:r>
-              <a:t>实验结果对比：PickAndPlace</a:t>
+              <a:t>演示视频对比</a:t>
             </a:r>
           </a:p>
         </p:txBody>
@@ -4722,8 +4116,8 @@
           <p:nvPr/>
         </p:nvGraphicFramePr>
         <p:xfrm>
-          <a:off x="731520" y="1188720"/>
-          <a:ext cx="10515600" cy="3200400"/>
+          <a:off x="457200" y="1097280"/>
+          <a:ext cx="11247120" cy="1828800"/>
         </p:xfrm>
         <a:graphic>
           <a:graphicData uri="http://schemas.openxmlformats.org/drawingml/2006/table">
@@ -4732,532 +4126,10 @@
                 <a:tableStyleId>{5C22544A-7EE6-4342-B048-85BDC9FD1C3A}</a:tableStyleId>
               </a:tblPr>
               <a:tblGrid>
-                <a:gridCol w="3657600"/>
-                <a:gridCol w="3429000"/>
-                <a:gridCol w="3429000"/>
-              </a:tblGrid>
-              <a:tr h="640080">
-                <a:tc>
-                  <a:txBody>
-                    <a:bodyPr/>
-                    <a:lstStyle/>
-                    <a:p>
-                      <a:pPr algn="ctr">
-                        <a:defRPr sz="1800" b="1">
-                          <a:solidFill>
-                            <a:srgbClr val="FFFFFF"/>
-                          </a:solidFill>
-                        </a:defRPr>
-                      </a:pPr>
-                      <a:r>
-                        <a:t>指标</a:t>
-                      </a:r>
-                    </a:p>
-                  </a:txBody>
-                  <a:tcPr/>
-                </a:tc>
-                <a:tc>
-                  <a:txBody>
-                    <a:bodyPr/>
-                    <a:lstStyle/>
-                    <a:p>
-                      <a:pPr algn="ctr">
-                        <a:defRPr sz="1800" b="1">
-                          <a:solidFill>
-                            <a:srgbClr val="FFFFFF"/>
-                          </a:solidFill>
-                        </a:defRPr>
-                      </a:pPr>
-                      <a:r>
-                        <a:t>PPO</a:t>
-                      </a:r>
-                    </a:p>
-                  </a:txBody>
-                  <a:tcPr/>
-                </a:tc>
-                <a:tc>
-                  <a:txBody>
-                    <a:bodyPr/>
-                    <a:lstStyle/>
-                    <a:p>
-                      <a:pPr algn="ctr">
-                        <a:defRPr sz="1800" b="1">
-                          <a:solidFill>
-                            <a:srgbClr val="FFFFFF"/>
-                          </a:solidFill>
-                        </a:defRPr>
-                      </a:pPr>
-                      <a:r>
-                        <a:t>SAC + HER</a:t>
-                      </a:r>
-                    </a:p>
-                  </a:txBody>
-                  <a:tcPr/>
-                </a:tc>
-              </a:tr>
-              <a:tr h="640080">
-                <a:tc>
-                  <a:txBody>
-                    <a:bodyPr/>
-                    <a:lstStyle/>
-                    <a:p>
-                      <a:pPr algn="ctr">
-                        <a:defRPr sz="1600">
-                          <a:solidFill>
-                            <a:srgbClr val="FFFFFF"/>
-                          </a:solidFill>
-                        </a:defRPr>
-                      </a:pPr>
-                      <a:r>
-                        <a:t>训练步数</a:t>
-                      </a:r>
-                    </a:p>
-                  </a:txBody>
-                  <a:tcPr/>
-                </a:tc>
-                <a:tc>
-                  <a:txBody>
-                    <a:bodyPr/>
-                    <a:lstStyle/>
-                    <a:p>
-                      <a:pPr algn="ctr">
-                        <a:defRPr sz="1600">
-                          <a:solidFill>
-                            <a:srgbClr val="FFFFFF"/>
-                          </a:solidFill>
-                        </a:defRPr>
-                      </a:pPr>
-                      <a:r>
-                        <a:t>760 万</a:t>
-                      </a:r>
-                    </a:p>
-                  </a:txBody>
-                  <a:tcPr/>
-                </a:tc>
-                <a:tc>
-                  <a:txBody>
-                    <a:bodyPr/>
-                    <a:lstStyle/>
-                    <a:p>
-                      <a:pPr algn="ctr">
-                        <a:defRPr sz="1600">
-                          <a:solidFill>
-                            <a:srgbClr val="FFFFFF"/>
-                          </a:solidFill>
-                        </a:defRPr>
-                      </a:pPr>
-                      <a:r>
-                        <a:t>100 万</a:t>
-                      </a:r>
-                    </a:p>
-                  </a:txBody>
-                  <a:tcPr/>
-                </a:tc>
-              </a:tr>
-              <a:tr h="640080">
-                <a:tc>
-                  <a:txBody>
-                    <a:bodyPr/>
-                    <a:lstStyle/>
-                    <a:p>
-                      <a:pPr algn="ctr">
-                        <a:defRPr sz="1600">
-                          <a:solidFill>
-                            <a:srgbClr val="FFFFFF"/>
-                          </a:solidFill>
-                        </a:defRPr>
-                      </a:pPr>
-                      <a:r>
-                        <a:t>测试成功率</a:t>
-                      </a:r>
-                    </a:p>
-                  </a:txBody>
-                  <a:tcPr/>
-                </a:tc>
-                <a:tc>
-                  <a:txBody>
-                    <a:bodyPr/>
-                    <a:lstStyle/>
-                    <a:p>
-                      <a:pPr algn="ctr">
-                        <a:defRPr sz="1600">
-                          <a:solidFill>
-                            <a:srgbClr val="FFFFFF"/>
-                          </a:solidFill>
-                        </a:defRPr>
-                      </a:pPr>
-                      <a:r>
-                        <a:t>4%</a:t>
-                      </a:r>
-                    </a:p>
-                  </a:txBody>
-                  <a:tcPr/>
-                </a:tc>
-                <a:tc>
-                  <a:txBody>
-                    <a:bodyPr/>
-                    <a:lstStyle/>
-                    <a:p>
-                      <a:pPr algn="ctr">
-                        <a:defRPr sz="1600">
-                          <a:solidFill>
-                            <a:srgbClr val="FFFFFF"/>
-                          </a:solidFill>
-                        </a:defRPr>
-                      </a:pPr>
-                      <a:r>
-                        <a:t>99%</a:t>
-                      </a:r>
-                    </a:p>
-                  </a:txBody>
-                  <a:tcPr/>
-                </a:tc>
-              </a:tr>
-              <a:tr h="640080">
-                <a:tc>
-                  <a:txBody>
-                    <a:bodyPr/>
-                    <a:lstStyle/>
-                    <a:p>
-                      <a:pPr algn="ctr">
-                        <a:defRPr sz="1600">
-                          <a:solidFill>
-                            <a:srgbClr val="FFFFFF"/>
-                          </a:solidFill>
-                        </a:defRPr>
-                      </a:pPr>
-                      <a:r>
-                        <a:t>平均完成步数</a:t>
-                      </a:r>
-                    </a:p>
-                  </a:txBody>
-                  <a:tcPr/>
-                </a:tc>
-                <a:tc>
-                  <a:txBody>
-                    <a:bodyPr/>
-                    <a:lstStyle/>
-                    <a:p>
-                      <a:pPr algn="ctr">
-                        <a:defRPr sz="1600">
-                          <a:solidFill>
-                            <a:srgbClr val="FFFFFF"/>
-                          </a:solidFill>
-                        </a:defRPr>
-                      </a:pPr>
-                      <a:r>
-                        <a:t>50（超时）</a:t>
-                      </a:r>
-                    </a:p>
-                  </a:txBody>
-                  <a:tcPr/>
-                </a:tc>
-                <a:tc>
-                  <a:txBody>
-                    <a:bodyPr/>
-                    <a:lstStyle/>
-                    <a:p>
-                      <a:pPr algn="ctr">
-                        <a:defRPr sz="1600">
-                          <a:solidFill>
-                            <a:srgbClr val="FFFFFF"/>
-                          </a:solidFill>
-                        </a:defRPr>
-                      </a:pPr>
-                      <a:r>
-                        <a:t>8.5 步</a:t>
-                      </a:r>
-                    </a:p>
-                  </a:txBody>
-                  <a:tcPr/>
-                </a:tc>
-              </a:tr>
-              <a:tr h="640080">
-                <a:tc>
-                  <a:txBody>
-                    <a:bodyPr/>
-                    <a:lstStyle/>
-                    <a:p>
-                      <a:pPr algn="ctr">
-                        <a:defRPr sz="1600">
-                          <a:solidFill>
-                            <a:srgbClr val="FFFFFF"/>
-                          </a:solidFill>
-                        </a:defRPr>
-                      </a:pPr>
-                      <a:r>
-                        <a:t>完成1轮所需步数（最快）</a:t>
-                      </a:r>
-                    </a:p>
-                  </a:txBody>
-                  <a:tcPr/>
-                </a:tc>
-                <a:tc>
-                  <a:txBody>
-                    <a:bodyPr/>
-                    <a:lstStyle/>
-                    <a:p>
-                      <a:pPr algn="ctr">
-                        <a:defRPr sz="1600">
-                          <a:solidFill>
-                            <a:srgbClr val="FFFFFF"/>
-                          </a:solidFill>
-                        </a:defRPr>
-                      </a:pPr>
-                      <a:r>
-                        <a:t>50 步全部失败</a:t>
-                      </a:r>
-                    </a:p>
-                  </a:txBody>
-                  <a:tcPr/>
-                </a:tc>
-                <a:tc>
-                  <a:txBody>
-                    <a:bodyPr/>
-                    <a:lstStyle/>
-                    <a:p>
-                      <a:pPr algn="ctr">
-                        <a:defRPr sz="1600">
-                          <a:solidFill>
-                            <a:srgbClr val="FFFFFF"/>
-                          </a:solidFill>
-                        </a:defRPr>
-                      </a:pPr>
-                      <a:r>
-                        <a:t>5 步成功</a:t>
-                      </a:r>
-                    </a:p>
-                  </a:txBody>
-                  <a:tcPr/>
-                </a:tc>
-              </a:tr>
-            </a:tbl>
-          </a:graphicData>
-        </a:graphic>
-      </p:graphicFrame>
-      <p:pic>
-        <p:nvPicPr>
-          <p:cNvPr id="5" name="Picture 4" descr="09bc5469299131d4fc954b1dd36f6d26.png"/>
-          <p:cNvPicPr>
-            <a:picLocks noChangeAspect="1"/>
-          </p:cNvPicPr>
-          <p:nvPr/>
-        </p:nvPicPr>
-        <p:blipFill>
-          <a:blip r:embed="rId2"/>
-          <a:stretch>
-            <a:fillRect/>
-          </a:stretch>
-        </p:blipFill>
-        <p:spPr>
-          <a:xfrm>
-            <a:off x="457200" y="4572000"/>
-            <a:ext cx="2743200" cy="1008863"/>
-          </a:xfrm>
-          <a:prstGeom prst="rect">
-            <a:avLst/>
-          </a:prstGeom>
-        </p:spPr>
-      </p:pic>
-      <p:pic>
-        <p:nvPicPr>
-          <p:cNvPr id="6" name="Picture 5" descr="09ebe14fa9615ec77f6585c060862148.png"/>
-          <p:cNvPicPr>
-            <a:picLocks noChangeAspect="1"/>
-          </p:cNvPicPr>
-          <p:nvPr/>
-        </p:nvPicPr>
-        <p:blipFill>
-          <a:blip r:embed="rId3"/>
-          <a:stretch>
-            <a:fillRect/>
-          </a:stretch>
-        </p:blipFill>
-        <p:spPr>
-          <a:xfrm>
-            <a:off x="3383280" y="4572000"/>
-            <a:ext cx="2743200" cy="1467150"/>
-          </a:xfrm>
-          <a:prstGeom prst="rect">
-            <a:avLst/>
-          </a:prstGeom>
-        </p:spPr>
-      </p:pic>
-      <p:pic>
-        <p:nvPicPr>
-          <p:cNvPr id="7" name="Picture 6" descr="59d5b45f5efed7c0d6e0c6b5b95b2f3e.png"/>
-          <p:cNvPicPr>
-            <a:picLocks noChangeAspect="1"/>
-          </p:cNvPicPr>
-          <p:nvPr/>
-        </p:nvPicPr>
-        <p:blipFill>
-          <a:blip r:embed="rId4"/>
-          <a:stretch>
-            <a:fillRect/>
-          </a:stretch>
-        </p:blipFill>
-        <p:spPr>
-          <a:xfrm>
-            <a:off x="6309360" y="4572000"/>
-            <a:ext cx="2743200" cy="1480211"/>
-          </a:xfrm>
-          <a:prstGeom prst="rect">
-            <a:avLst/>
-          </a:prstGeom>
-        </p:spPr>
-      </p:pic>
-      <p:pic>
-        <p:nvPicPr>
-          <p:cNvPr id="8" name="Picture 7" descr="cbe012e68294c8e1acfb801d606c9fe8.png"/>
-          <p:cNvPicPr>
-            <a:picLocks noChangeAspect="1"/>
-          </p:cNvPicPr>
-          <p:nvPr/>
-        </p:nvPicPr>
-        <p:blipFill>
-          <a:blip r:embed="rId5"/>
-          <a:stretch>
-            <a:fillRect/>
-          </a:stretch>
-        </p:blipFill>
-        <p:spPr>
-          <a:xfrm>
-            <a:off x="9235440" y="4572000"/>
-            <a:ext cx="2743200" cy="1458097"/>
-          </a:xfrm>
-          <a:prstGeom prst="rect">
-            <a:avLst/>
-          </a:prstGeom>
-        </p:spPr>
-      </p:pic>
-    </p:spTree>
-  </p:cSld>
-  <p:clrMapOvr>
-    <a:masterClrMapping/>
-  </p:clrMapOvr>
-</p:sld>
-</file>
-
-<file path=ppt/slides/slide6.xml><?xml version="1.0" encoding="utf-8"?>
-<p:sld xmlns:a="http://schemas.openxmlformats.org/drawingml/2006/main" xmlns:p="http://schemas.openxmlformats.org/presentationml/2006/main" xmlns:r="http://schemas.openxmlformats.org/officeDocument/2006/relationships">
-  <p:cSld>
-    <p:bg>
-      <p:bgPr>
-        <a:solidFill>
-          <a:srgbClr val="1A1A2E"/>
-        </a:solidFill>
-        <a:effectLst/>
-      </p:bgPr>
-    </p:bg>
-    <p:spTree>
-      <p:nvGrpSpPr>
-        <p:cNvPr id="1" name=""/>
-        <p:cNvGrpSpPr/>
-        <p:nvPr/>
-      </p:nvGrpSpPr>
-      <p:grpSpPr/>
-      <p:sp>
-        <p:nvSpPr>
-          <p:cNvPr id="2" name="Rectangle 1"/>
-          <p:cNvSpPr/>
-          <p:nvPr/>
-        </p:nvSpPr>
-        <p:spPr>
-          <a:xfrm>
-            <a:off x="0" y="0"/>
-            <a:ext cx="109728" cy="6858000"/>
-          </a:xfrm>
-          <a:prstGeom prst="rect">
-            <a:avLst/>
-          </a:prstGeom>
-          <a:solidFill>
-            <a:srgbClr val="FF69B4"/>
-          </a:solidFill>
-          <a:ln>
-            <a:noFill/>
-          </a:ln>
-        </p:spPr>
-        <p:style>
-          <a:lnRef idx="1">
-            <a:schemeClr val="accent1"/>
-          </a:lnRef>
-          <a:fillRef idx="3">
-            <a:schemeClr val="accent1"/>
-          </a:fillRef>
-          <a:effectRef idx="2">
-            <a:schemeClr val="accent1"/>
-          </a:effectRef>
-          <a:fontRef idx="minor">
-            <a:schemeClr val="lt1"/>
-          </a:fontRef>
-        </p:style>
-        <p:txBody>
-          <a:bodyPr rtlCol="0" anchor="ctr"/>
-          <a:lstStyle/>
-          <a:p>
-            <a:pPr algn="ctr"/>
-          </a:p>
-        </p:txBody>
-      </p:sp>
-      <p:sp>
-        <p:nvSpPr>
-          <p:cNvPr id="3" name="TextBox 2"/>
-          <p:cNvSpPr txBox="1"/>
-          <p:nvPr/>
-        </p:nvSpPr>
-        <p:spPr>
-          <a:xfrm>
-            <a:off x="548640" y="274320"/>
-            <a:ext cx="5486400" cy="731520"/>
-          </a:xfrm>
-          <a:prstGeom prst="rect">
-            <a:avLst/>
-          </a:prstGeom>
-          <a:noFill/>
-        </p:spPr>
-        <p:txBody>
-          <a:bodyPr wrap="square">
-            <a:spAutoFit/>
-          </a:bodyPr>
-          <a:lstStyle/>
-          <a:p>
-            <a:pPr algn="l">
-              <a:defRPr sz="3200" b="1">
-                <a:solidFill>
-                  <a:srgbClr val="FF69B4"/>
-                </a:solidFill>
-              </a:defRPr>
-            </a:pPr>
-            <a:r>
-              <a:t>演示视频对比</a:t>
-            </a:r>
-          </a:p>
-        </p:txBody>
-      </p:sp>
-      <p:graphicFrame>
-        <p:nvGraphicFramePr>
-          <p:cNvPr id="4" name="Table 3"/>
-          <p:cNvGraphicFramePr>
-            <a:graphicFrameLocks noGrp="1"/>
-          </p:cNvGraphicFramePr>
-          <p:nvPr/>
-        </p:nvGraphicFramePr>
-        <p:xfrm>
-          <a:off x="731520" y="1371600"/>
-          <a:ext cx="10515600" cy="1828800"/>
-        </p:xfrm>
-        <a:graphic>
-          <a:graphicData uri="http://schemas.openxmlformats.org/drawingml/2006/table">
-            <a:tbl>
-              <a:tblPr firstRow="1" bandRow="1">
-                <a:tableStyleId>{5C22544A-7EE6-4342-B048-85BDC9FD1C3A}</a:tableStyleId>
-              </a:tblPr>
-              <a:tblGrid>
-                <a:gridCol w="2628900"/>
-                <a:gridCol w="2628900"/>
-                <a:gridCol w="2628900"/>
-                <a:gridCol w="2628900"/>
+                <a:gridCol w="2811780"/>
+                <a:gridCol w="2811780"/>
+                <a:gridCol w="2811780"/>
+                <a:gridCol w="2811780"/>
               </a:tblGrid>
               <a:tr h="914400">
                 <a:tc>
@@ -5272,9 +4144,6 @@
                           </a:solidFill>
                         </a:defRPr>
                       </a:pPr>
-                      <a:r>
-                        <a:t>任务</a:t>
-                      </a:r>
                     </a:p>
                   </a:txBody>
                   <a:tcPr/>
@@ -5363,19 +4232,19 @@
                     <a:lstStyle/>
                     <a:p>
                       <a:pPr algn="ctr">
-                        <a:defRPr sz="1400">
+                        <a:defRPr sz="1600">
                           <a:solidFill>
                             <a:srgbClr val="FFFFFF"/>
                           </a:solidFill>
                         </a:defRPr>
                       </a:pPr>
                       <a:r>
-                        <a:t>❌ 全部失败</a:t>
+                        <a:t>❌ 10轮全失败</a:t>
                       </a:r>
                     </a:p>
                     <a:p>
                       <a:pPr algn="ctr">
-                        <a:defRPr sz="1400">
+                        <a:defRPr sz="1600">
                           <a:solidFill>
                             <a:srgbClr val="FFFFFF"/>
                           </a:solidFill>
@@ -5394,26 +4263,26 @@
                     <a:lstStyle/>
                     <a:p>
                       <a:pPr algn="ctr">
-                        <a:defRPr sz="1400">
+                        <a:defRPr sz="1600">
                           <a:solidFill>
                             <a:srgbClr val="FFFFFF"/>
                           </a:solidFill>
                         </a:defRPr>
                       </a:pPr>
                       <a:r>
-                        <a:t>✅ 100%成功</a:t>
+                        <a:t>✅ 10轮全成功</a:t>
                       </a:r>
                     </a:p>
                     <a:p>
                       <a:pPr algn="ctr">
-                        <a:defRPr sz="1400">
+                        <a:defRPr sz="1600">
                           <a:solidFill>
                             <a:srgbClr val="FFFFFF"/>
                           </a:solidFill>
                         </a:defRPr>
                       </a:pPr>
                       <a:r>
-                        <a:t>平均8.5步</a:t>
+                        <a:t>平均8步</a:t>
                       </a:r>
                     </a:p>
                   </a:txBody>
@@ -5425,19 +4294,19 @@
                     <a:lstStyle/>
                     <a:p>
                       <a:pPr algn="ctr">
-                        <a:defRPr sz="1400">
+                        <a:defRPr sz="1600">
                           <a:solidFill>
                             <a:srgbClr val="FFFFFF"/>
                           </a:solidFill>
                         </a:defRPr>
                       </a:pPr>
                       <a:r>
-                        <a:t>✅ 100%成功</a:t>
+                        <a:t>✅ 10轮全成功</a:t>
                       </a:r>
                     </a:p>
                     <a:p>
                       <a:pPr algn="ctr">
-                        <a:defRPr sz="1400">
+                        <a:defRPr sz="1600">
                           <a:solidFill>
                             <a:srgbClr val="FFFFFF"/>
                           </a:solidFill>
@@ -5463,8 +4332,8 @@
         </p:nvSpPr>
         <p:spPr>
           <a:xfrm>
-            <a:off x="731520" y="3474720"/>
-            <a:ext cx="10058400" cy="365760"/>
+            <a:off x="548640" y="3200400"/>
+            <a:ext cx="10972800" cy="365760"/>
           </a:xfrm>
           <a:prstGeom prst="rect">
             <a:avLst/>
@@ -5485,7 +4354,7 @@
               </a:defRPr>
             </a:pPr>
             <a:r>
-              <a:t>视频文件路径（PPT 中可插入视频）：</a:t>
+              <a:t>视频文件路径（PPT 中插入 → 视频 → 此设备）：</a:t>
             </a:r>
           </a:p>
         </p:txBody>
@@ -5498,7 +4367,7 @@
         </p:nvSpPr>
         <p:spPr>
           <a:xfrm>
-            <a:off x="914400" y="4023360"/>
+            <a:off x="731520" y="3749039"/>
             <a:ext cx="10058400" cy="365760"/>
           </a:xfrm>
           <a:prstGeom prst="rect">
@@ -5520,7 +4389,7 @@
               </a:defRPr>
             </a:pPr>
             <a:r>
-              <a:t>• Reach 成功演示：demo/reach_demo/</a:t>
+              <a:t>• demo/reach_demo/ — Reach PPO 成功（1-2步完成）</a:t>
             </a:r>
           </a:p>
         </p:txBody>
@@ -5533,7 +4402,7 @@
         </p:nvSpPr>
         <p:spPr>
           <a:xfrm>
-            <a:off x="914400" y="4480560"/>
+            <a:off x="731520" y="4206240"/>
             <a:ext cx="10058400" cy="365760"/>
           </a:xfrm>
           <a:prstGeom prst="rect">
@@ -5555,7 +4424,7 @@
               </a:defRPr>
             </a:pPr>
             <a:r>
-              <a:t>• PPO PickAndPlace 失败演示：demo/ppo_pickandplace_demo/</a:t>
+              <a:t>• demo/ppo_pickandplace_demo/ — PPO PickAndPlace 全部失败</a:t>
             </a:r>
           </a:p>
         </p:txBody>
@@ -5568,7 +4437,7 @@
         </p:nvSpPr>
         <p:spPr>
           <a:xfrm>
-            <a:off x="914400" y="4937760"/>
+            <a:off x="731520" y="4663440"/>
             <a:ext cx="10058400" cy="365760"/>
           </a:xfrm>
           <a:prstGeom prst="rect">
@@ -5590,21 +4459,90 @@
               </a:defRPr>
             </a:pPr>
             <a:r>
-              <a:t>• SAC+HER PickAndPlace 成功演示：demo/sac_her_demo/</a:t>
-            </a:r>
-          </a:p>
-        </p:txBody>
-      </p:sp>
-      <p:sp>
-        <p:nvSpPr>
-          <p:cNvPr id="9" name="TextBox 8"/>
+              <a:t>• demo/sac_her_demo/ — SAC+HER PickAndPlace 全部成功</a:t>
+            </a:r>
+          </a:p>
+        </p:txBody>
+      </p:sp>
+    </p:spTree>
+  </p:cSld>
+  <p:clrMapOvr>
+    <a:masterClrMapping/>
+  </p:clrMapOvr>
+</p:sld>
+</file>
+
+<file path=ppt/slides/slide12.xml><?xml version="1.0" encoding="utf-8"?>
+<p:sld xmlns:a="http://schemas.openxmlformats.org/drawingml/2006/main" xmlns:p="http://schemas.openxmlformats.org/presentationml/2006/main" xmlns:r="http://schemas.openxmlformats.org/officeDocument/2006/relationships">
+  <p:cSld>
+    <p:bg>
+      <p:bgPr>
+        <a:solidFill>
+          <a:srgbClr val="1A1A2E"/>
+        </a:solidFill>
+        <a:effectLst/>
+      </p:bgPr>
+    </p:bg>
+    <p:spTree>
+      <p:nvGrpSpPr>
+        <p:cNvPr id="1" name=""/>
+        <p:cNvGrpSpPr/>
+        <p:nvPr/>
+      </p:nvGrpSpPr>
+      <p:grpSpPr/>
+      <p:sp>
+        <p:nvSpPr>
+          <p:cNvPr id="2" name="Rectangle 1"/>
+          <p:cNvSpPr/>
+          <p:nvPr/>
+        </p:nvSpPr>
+        <p:spPr>
+          <a:xfrm>
+            <a:off x="0" y="0"/>
+            <a:ext cx="109728" cy="6858000"/>
+          </a:xfrm>
+          <a:prstGeom prst="rect">
+            <a:avLst/>
+          </a:prstGeom>
+          <a:solidFill>
+            <a:srgbClr val="FFD700"/>
+          </a:solidFill>
+          <a:ln>
+            <a:noFill/>
+          </a:ln>
+        </p:spPr>
+        <p:style>
+          <a:lnRef idx="1">
+            <a:schemeClr val="accent1"/>
+          </a:lnRef>
+          <a:fillRef idx="3">
+            <a:schemeClr val="accent1"/>
+          </a:fillRef>
+          <a:effectRef idx="2">
+            <a:schemeClr val="accent1"/>
+          </a:effectRef>
+          <a:fontRef idx="minor">
+            <a:schemeClr val="lt1"/>
+          </a:fontRef>
+        </p:style>
+        <p:txBody>
+          <a:bodyPr rtlCol="0" anchor="ctr"/>
+          <a:lstStyle/>
+          <a:p>
+            <a:pPr algn="ctr"/>
+          </a:p>
+        </p:txBody>
+      </p:sp>
+      <p:sp>
+        <p:nvSpPr>
+          <p:cNvPr id="3" name="TextBox 2"/>
           <p:cNvSpPr txBox="1"/>
           <p:nvPr/>
         </p:nvSpPr>
         <p:spPr>
           <a:xfrm>
-            <a:off x="731520" y="5303520"/>
-            <a:ext cx="10058400" cy="365760"/>
+            <a:off x="548640" y="182880"/>
+            <a:ext cx="4572000" cy="548640"/>
           </a:xfrm>
           <a:prstGeom prst="rect">
             <a:avLst/>
@@ -5618,6 +4556,657 @@
           <a:lstStyle/>
           <a:p>
             <a:pPr algn="l">
+              <a:defRPr sz="3200" b="1">
+                <a:solidFill>
+                  <a:srgbClr val="FFFFFF"/>
+                </a:solidFill>
+              </a:defRPr>
+            </a:pPr>
+            <a:r>
+              <a:t>总结</a:t>
+            </a:r>
+          </a:p>
+        </p:txBody>
+      </p:sp>
+      <p:sp>
+        <p:nvSpPr>
+          <p:cNvPr id="4" name="Rectangle 3"/>
+          <p:cNvSpPr/>
+          <p:nvPr/>
+        </p:nvSpPr>
+        <p:spPr>
+          <a:xfrm>
+            <a:off x="548640" y="914400"/>
+            <a:ext cx="109728" cy="1371600"/>
+          </a:xfrm>
+          <a:prstGeom prst="rect">
+            <a:avLst/>
+          </a:prstGeom>
+          <a:solidFill>
+            <a:srgbClr val="E86C00"/>
+          </a:solidFill>
+          <a:ln>
+            <a:noFill/>
+          </a:ln>
+        </p:spPr>
+        <p:style>
+          <a:lnRef idx="1">
+            <a:schemeClr val="accent1"/>
+          </a:lnRef>
+          <a:fillRef idx="3">
+            <a:schemeClr val="accent1"/>
+          </a:fillRef>
+          <a:effectRef idx="2">
+            <a:schemeClr val="accent1"/>
+          </a:effectRef>
+          <a:fontRef idx="minor">
+            <a:schemeClr val="lt1"/>
+          </a:fontRef>
+        </p:style>
+        <p:txBody>
+          <a:bodyPr rtlCol="0" anchor="ctr"/>
+          <a:lstStyle/>
+          <a:p>
+            <a:pPr algn="ctr"/>
+          </a:p>
+        </p:txBody>
+      </p:sp>
+      <p:sp>
+        <p:nvSpPr>
+          <p:cNvPr id="5" name="Rectangle 4"/>
+          <p:cNvSpPr/>
+          <p:nvPr/>
+        </p:nvSpPr>
+        <p:spPr>
+          <a:xfrm>
+            <a:off x="914400" y="914400"/>
+            <a:ext cx="10515600" cy="1371600"/>
+          </a:xfrm>
+          <a:prstGeom prst="rect">
+            <a:avLst/>
+          </a:prstGeom>
+          <a:solidFill>
+            <a:srgbClr val="252540"/>
+          </a:solidFill>
+          <a:ln>
+            <a:noFill/>
+          </a:ln>
+        </p:spPr>
+        <p:style>
+          <a:lnRef idx="1">
+            <a:schemeClr val="accent1"/>
+          </a:lnRef>
+          <a:fillRef idx="3">
+            <a:schemeClr val="accent1"/>
+          </a:fillRef>
+          <a:effectRef idx="2">
+            <a:schemeClr val="accent1"/>
+          </a:effectRef>
+          <a:fontRef idx="minor">
+            <a:schemeClr val="lt1"/>
+          </a:fontRef>
+        </p:style>
+        <p:txBody>
+          <a:bodyPr rtlCol="0" anchor="ctr"/>
+          <a:lstStyle/>
+          <a:p>
+            <a:pPr algn="ctr"/>
+          </a:p>
+        </p:txBody>
+      </p:sp>
+      <p:sp>
+        <p:nvSpPr>
+          <p:cNvPr id="6" name="TextBox 5"/>
+          <p:cNvSpPr txBox="1"/>
+          <p:nvPr/>
+        </p:nvSpPr>
+        <p:spPr>
+          <a:xfrm>
+            <a:off x="1188720" y="1005840"/>
+            <a:ext cx="2743200" cy="457200"/>
+          </a:xfrm>
+          <a:prstGeom prst="rect">
+            <a:avLst/>
+          </a:prstGeom>
+          <a:noFill/>
+        </p:spPr>
+        <p:txBody>
+          <a:bodyPr wrap="square">
+            <a:spAutoFit/>
+          </a:bodyPr>
+          <a:lstStyle/>
+          <a:p>
+            <a:pPr algn="l">
+              <a:defRPr sz="2400" b="1">
+                <a:solidFill>
+                  <a:srgbClr val="E86C00"/>
+                </a:solidFill>
+              </a:defRPr>
+            </a:pPr>
+            <a:r>
+              <a:t>PPO</a:t>
+            </a:r>
+          </a:p>
+        </p:txBody>
+      </p:sp>
+      <p:sp>
+        <p:nvSpPr>
+          <p:cNvPr id="7" name="TextBox 6"/>
+          <p:cNvSpPr txBox="1"/>
+          <p:nvPr/>
+        </p:nvSpPr>
+        <p:spPr>
+          <a:xfrm>
+            <a:off x="1188720" y="1417320"/>
+            <a:ext cx="9601200" cy="365760"/>
+          </a:xfrm>
+          <a:prstGeom prst="rect">
+            <a:avLst/>
+          </a:prstGeom>
+          <a:noFill/>
+        </p:spPr>
+        <p:txBody>
+          <a:bodyPr wrap="square">
+            <a:spAutoFit/>
+          </a:bodyPr>
+          <a:lstStyle/>
+          <a:p>
+            <a:pPr algn="l">
+              <a:defRPr sz="1500" b="0">
+                <a:solidFill>
+                  <a:srgbClr val="CCCCDD"/>
+                </a:solidFill>
+              </a:defRPr>
+            </a:pPr>
+            <a:r>
+              <a:t>单阶段任务（Reach）表现优异，100% 成功 ✅</a:t>
+            </a:r>
+          </a:p>
+        </p:txBody>
+      </p:sp>
+      <p:sp>
+        <p:nvSpPr>
+          <p:cNvPr id="8" name="TextBox 7"/>
+          <p:cNvSpPr txBox="1"/>
+          <p:nvPr/>
+        </p:nvSpPr>
+        <p:spPr>
+          <a:xfrm>
+            <a:off x="1188720" y="1783080"/>
+            <a:ext cx="9601200" cy="365760"/>
+          </a:xfrm>
+          <a:prstGeom prst="rect">
+            <a:avLst/>
+          </a:prstGeom>
+          <a:noFill/>
+        </p:spPr>
+        <p:txBody>
+          <a:bodyPr wrap="square">
+            <a:spAutoFit/>
+          </a:bodyPr>
+          <a:lstStyle/>
+          <a:p>
+            <a:pPr algn="l">
+              <a:defRPr sz="1500" b="0">
+                <a:solidFill>
+                  <a:srgbClr val="CCCCDD"/>
+                </a:solidFill>
+              </a:defRPr>
+            </a:pPr>
+            <a:r>
+              <a:t>多阶段任务（PickAndPlace）样本效率严重不足，仅 4% ❌</a:t>
+            </a:r>
+          </a:p>
+        </p:txBody>
+      </p:sp>
+      <p:sp>
+        <p:nvSpPr>
+          <p:cNvPr id="9" name="Rectangle 8"/>
+          <p:cNvSpPr/>
+          <p:nvPr/>
+        </p:nvSpPr>
+        <p:spPr>
+          <a:xfrm>
+            <a:off x="548640" y="2560320"/>
+            <a:ext cx="109728" cy="1371600"/>
+          </a:xfrm>
+          <a:prstGeom prst="rect">
+            <a:avLst/>
+          </a:prstGeom>
+          <a:solidFill>
+            <a:srgbClr val="00CC66"/>
+          </a:solidFill>
+          <a:ln>
+            <a:noFill/>
+          </a:ln>
+        </p:spPr>
+        <p:style>
+          <a:lnRef idx="1">
+            <a:schemeClr val="accent1"/>
+          </a:lnRef>
+          <a:fillRef idx="3">
+            <a:schemeClr val="accent1"/>
+          </a:fillRef>
+          <a:effectRef idx="2">
+            <a:schemeClr val="accent1"/>
+          </a:effectRef>
+          <a:fontRef idx="minor">
+            <a:schemeClr val="lt1"/>
+          </a:fontRef>
+        </p:style>
+        <p:txBody>
+          <a:bodyPr rtlCol="0" anchor="ctr"/>
+          <a:lstStyle/>
+          <a:p>
+            <a:pPr algn="ctr"/>
+          </a:p>
+        </p:txBody>
+      </p:sp>
+      <p:sp>
+        <p:nvSpPr>
+          <p:cNvPr id="10" name="Rectangle 9"/>
+          <p:cNvSpPr/>
+          <p:nvPr/>
+        </p:nvSpPr>
+        <p:spPr>
+          <a:xfrm>
+            <a:off x="914400" y="2560320"/>
+            <a:ext cx="10515600" cy="1371600"/>
+          </a:xfrm>
+          <a:prstGeom prst="rect">
+            <a:avLst/>
+          </a:prstGeom>
+          <a:solidFill>
+            <a:srgbClr val="252540"/>
+          </a:solidFill>
+          <a:ln>
+            <a:noFill/>
+          </a:ln>
+        </p:spPr>
+        <p:style>
+          <a:lnRef idx="1">
+            <a:schemeClr val="accent1"/>
+          </a:lnRef>
+          <a:fillRef idx="3">
+            <a:schemeClr val="accent1"/>
+          </a:fillRef>
+          <a:effectRef idx="2">
+            <a:schemeClr val="accent1"/>
+          </a:effectRef>
+          <a:fontRef idx="minor">
+            <a:schemeClr val="lt1"/>
+          </a:fontRef>
+        </p:style>
+        <p:txBody>
+          <a:bodyPr rtlCol="0" anchor="ctr"/>
+          <a:lstStyle/>
+          <a:p>
+            <a:pPr algn="ctr"/>
+          </a:p>
+        </p:txBody>
+      </p:sp>
+      <p:sp>
+        <p:nvSpPr>
+          <p:cNvPr id="11" name="TextBox 10"/>
+          <p:cNvSpPr txBox="1"/>
+          <p:nvPr/>
+        </p:nvSpPr>
+        <p:spPr>
+          <a:xfrm>
+            <a:off x="1188720" y="2651760"/>
+            <a:ext cx="2743200" cy="457200"/>
+          </a:xfrm>
+          <a:prstGeom prst="rect">
+            <a:avLst/>
+          </a:prstGeom>
+          <a:noFill/>
+        </p:spPr>
+        <p:txBody>
+          <a:bodyPr wrap="square">
+            <a:spAutoFit/>
+          </a:bodyPr>
+          <a:lstStyle/>
+          <a:p>
+            <a:pPr algn="l">
+              <a:defRPr sz="2400" b="1">
+                <a:solidFill>
+                  <a:srgbClr val="00CC66"/>
+                </a:solidFill>
+              </a:defRPr>
+            </a:pPr>
+            <a:r>
+              <a:t>SAC+HER</a:t>
+            </a:r>
+          </a:p>
+        </p:txBody>
+      </p:sp>
+      <p:sp>
+        <p:nvSpPr>
+          <p:cNvPr id="12" name="TextBox 11"/>
+          <p:cNvSpPr txBox="1"/>
+          <p:nvPr/>
+        </p:nvSpPr>
+        <p:spPr>
+          <a:xfrm>
+            <a:off x="1188720" y="3063239"/>
+            <a:ext cx="9601200" cy="365760"/>
+          </a:xfrm>
+          <a:prstGeom prst="rect">
+            <a:avLst/>
+          </a:prstGeom>
+          <a:noFill/>
+        </p:spPr>
+        <p:txBody>
+          <a:bodyPr wrap="square">
+            <a:spAutoFit/>
+          </a:bodyPr>
+          <a:lstStyle/>
+          <a:p>
+            <a:pPr algn="l">
+              <a:defRPr sz="1500" b="0">
+                <a:solidFill>
+                  <a:srgbClr val="CCCCDD"/>
+                </a:solidFill>
+              </a:defRPr>
+            </a:pPr>
+            <a:r>
+              <a:t>Off-policy + 失败重标目标，天然适合多阶段复杂任务</a:t>
+            </a:r>
+          </a:p>
+        </p:txBody>
+      </p:sp>
+      <p:sp>
+        <p:nvSpPr>
+          <p:cNvPr id="13" name="TextBox 12"/>
+          <p:cNvSpPr txBox="1"/>
+          <p:nvPr/>
+        </p:nvSpPr>
+        <p:spPr>
+          <a:xfrm>
+            <a:off x="1188720" y="3429000"/>
+            <a:ext cx="9601200" cy="365760"/>
+          </a:xfrm>
+          <a:prstGeom prst="rect">
+            <a:avLst/>
+          </a:prstGeom>
+          <a:noFill/>
+        </p:spPr>
+        <p:txBody>
+          <a:bodyPr wrap="square">
+            <a:spAutoFit/>
+          </a:bodyPr>
+          <a:lstStyle/>
+          <a:p>
+            <a:pPr algn="l">
+              <a:defRPr sz="1500" b="0">
+                <a:solidFill>
+                  <a:srgbClr val="CCCCDD"/>
+                </a:solidFill>
+              </a:defRPr>
+            </a:pPr>
+            <a:r>
+              <a:t>100 万步达 99% 成功率，样本效率远超 PPO</a:t>
+            </a:r>
+          </a:p>
+        </p:txBody>
+      </p:sp>
+      <p:sp>
+        <p:nvSpPr>
+          <p:cNvPr id="14" name="Rectangle 13"/>
+          <p:cNvSpPr/>
+          <p:nvPr/>
+        </p:nvSpPr>
+        <p:spPr>
+          <a:xfrm>
+            <a:off x="548640" y="4206240"/>
+            <a:ext cx="109728" cy="1371600"/>
+          </a:xfrm>
+          <a:prstGeom prst="rect">
+            <a:avLst/>
+          </a:prstGeom>
+          <a:solidFill>
+            <a:srgbClr val="00D2FF"/>
+          </a:solidFill>
+          <a:ln>
+            <a:noFill/>
+          </a:ln>
+        </p:spPr>
+        <p:style>
+          <a:lnRef idx="1">
+            <a:schemeClr val="accent1"/>
+          </a:lnRef>
+          <a:fillRef idx="3">
+            <a:schemeClr val="accent1"/>
+          </a:fillRef>
+          <a:effectRef idx="2">
+            <a:schemeClr val="accent1"/>
+          </a:effectRef>
+          <a:fontRef idx="minor">
+            <a:schemeClr val="lt1"/>
+          </a:fontRef>
+        </p:style>
+        <p:txBody>
+          <a:bodyPr rtlCol="0" anchor="ctr"/>
+          <a:lstStyle/>
+          <a:p>
+            <a:pPr algn="ctr"/>
+          </a:p>
+        </p:txBody>
+      </p:sp>
+      <p:sp>
+        <p:nvSpPr>
+          <p:cNvPr id="15" name="Rectangle 14"/>
+          <p:cNvSpPr/>
+          <p:nvPr/>
+        </p:nvSpPr>
+        <p:spPr>
+          <a:xfrm>
+            <a:off x="914400" y="4206240"/>
+            <a:ext cx="10515600" cy="1371600"/>
+          </a:xfrm>
+          <a:prstGeom prst="rect">
+            <a:avLst/>
+          </a:prstGeom>
+          <a:solidFill>
+            <a:srgbClr val="252540"/>
+          </a:solidFill>
+          <a:ln>
+            <a:noFill/>
+          </a:ln>
+        </p:spPr>
+        <p:style>
+          <a:lnRef idx="1">
+            <a:schemeClr val="accent1"/>
+          </a:lnRef>
+          <a:fillRef idx="3">
+            <a:schemeClr val="accent1"/>
+          </a:fillRef>
+          <a:effectRef idx="2">
+            <a:schemeClr val="accent1"/>
+          </a:effectRef>
+          <a:fontRef idx="minor">
+            <a:schemeClr val="lt1"/>
+          </a:fontRef>
+        </p:style>
+        <p:txBody>
+          <a:bodyPr rtlCol="0" anchor="ctr"/>
+          <a:lstStyle/>
+          <a:p>
+            <a:pPr algn="ctr"/>
+          </a:p>
+        </p:txBody>
+      </p:sp>
+      <p:sp>
+        <p:nvSpPr>
+          <p:cNvPr id="16" name="TextBox 15"/>
+          <p:cNvSpPr txBox="1"/>
+          <p:nvPr/>
+        </p:nvSpPr>
+        <p:spPr>
+          <a:xfrm>
+            <a:off x="1188720" y="4297679"/>
+            <a:ext cx="2743200" cy="457200"/>
+          </a:xfrm>
+          <a:prstGeom prst="rect">
+            <a:avLst/>
+          </a:prstGeom>
+          <a:noFill/>
+        </p:spPr>
+        <p:txBody>
+          <a:bodyPr wrap="square">
+            <a:spAutoFit/>
+          </a:bodyPr>
+          <a:lstStyle/>
+          <a:p>
+            <a:pPr algn="l">
+              <a:defRPr sz="2400" b="1">
+                <a:solidFill>
+                  <a:srgbClr val="00D2FF"/>
+                </a:solidFill>
+              </a:defRPr>
+            </a:pPr>
+            <a:r>
+              <a:t>实验结论</a:t>
+            </a:r>
+          </a:p>
+        </p:txBody>
+      </p:sp>
+      <p:sp>
+        <p:nvSpPr>
+          <p:cNvPr id="17" name="TextBox 16"/>
+          <p:cNvSpPr txBox="1"/>
+          <p:nvPr/>
+        </p:nvSpPr>
+        <p:spPr>
+          <a:xfrm>
+            <a:off x="1188720" y="4709159"/>
+            <a:ext cx="9601200" cy="365760"/>
+          </a:xfrm>
+          <a:prstGeom prst="rect">
+            <a:avLst/>
+          </a:prstGeom>
+          <a:noFill/>
+        </p:spPr>
+        <p:txBody>
+          <a:bodyPr wrap="square">
+            <a:spAutoFit/>
+          </a:bodyPr>
+          <a:lstStyle/>
+          <a:p>
+            <a:pPr algn="l">
+              <a:defRPr sz="1500" b="0">
+                <a:solidFill>
+                  <a:srgbClr val="CCCCDD"/>
+                </a:solidFill>
+              </a:defRPr>
+            </a:pPr>
+            <a:r>
+              <a:t>算法选择应匹配任务特性</a:t>
+            </a:r>
+          </a:p>
+        </p:txBody>
+      </p:sp>
+      <p:sp>
+        <p:nvSpPr>
+          <p:cNvPr id="18" name="TextBox 17"/>
+          <p:cNvSpPr txBox="1"/>
+          <p:nvPr/>
+        </p:nvSpPr>
+        <p:spPr>
+          <a:xfrm>
+            <a:off x="1188720" y="5074920"/>
+            <a:ext cx="9601200" cy="365760"/>
+          </a:xfrm>
+          <a:prstGeom prst="rect">
+            <a:avLst/>
+          </a:prstGeom>
+          <a:noFill/>
+        </p:spPr>
+        <p:txBody>
+          <a:bodyPr wrap="square">
+            <a:spAutoFit/>
+          </a:bodyPr>
+          <a:lstStyle/>
+          <a:p>
+            <a:pPr algn="l">
+              <a:defRPr sz="1500" b="0">
+                <a:solidFill>
+                  <a:srgbClr val="CCCCDD"/>
+                </a:solidFill>
+              </a:defRPr>
+            </a:pPr>
+            <a:r>
+              <a:t>HER 是近三年解决稀疏奖励 / 多阶段问题的重要突破</a:t>
+            </a:r>
+          </a:p>
+        </p:txBody>
+      </p:sp>
+      <p:sp>
+        <p:nvSpPr>
+          <p:cNvPr id="19" name="Rectangle 18"/>
+          <p:cNvSpPr/>
+          <p:nvPr/>
+        </p:nvSpPr>
+        <p:spPr>
+          <a:xfrm>
+            <a:off x="548640" y="6217920"/>
+            <a:ext cx="10972800" cy="36576"/>
+          </a:xfrm>
+          <a:prstGeom prst="rect">
+            <a:avLst/>
+          </a:prstGeom>
+          <a:solidFill>
+            <a:srgbClr val="00D2FF"/>
+          </a:solidFill>
+          <a:ln>
+            <a:noFill/>
+          </a:ln>
+        </p:spPr>
+        <p:style>
+          <a:lnRef idx="1">
+            <a:schemeClr val="accent1"/>
+          </a:lnRef>
+          <a:fillRef idx="3">
+            <a:schemeClr val="accent1"/>
+          </a:fillRef>
+          <a:effectRef idx="2">
+            <a:schemeClr val="accent1"/>
+          </a:effectRef>
+          <a:fontRef idx="minor">
+            <a:schemeClr val="lt1"/>
+          </a:fontRef>
+        </p:style>
+        <p:txBody>
+          <a:bodyPr rtlCol="0" anchor="ctr"/>
+          <a:lstStyle/>
+          <a:p>
+            <a:pPr algn="ctr"/>
+          </a:p>
+        </p:txBody>
+      </p:sp>
+      <p:sp>
+        <p:nvSpPr>
+          <p:cNvPr id="20" name="TextBox 19"/>
+          <p:cNvSpPr txBox="1"/>
+          <p:nvPr/>
+        </p:nvSpPr>
+        <p:spPr>
+          <a:xfrm>
+            <a:off x="548640" y="6309360"/>
+            <a:ext cx="10972800" cy="365760"/>
+          </a:xfrm>
+          <a:prstGeom prst="rect">
+            <a:avLst/>
+          </a:prstGeom>
+          <a:noFill/>
+        </p:spPr>
+        <p:txBody>
+          <a:bodyPr wrap="square">
+            <a:spAutoFit/>
+          </a:bodyPr>
+          <a:lstStyle/>
+          <a:p>
+            <a:pPr algn="ctr">
               <a:defRPr sz="1400" b="0">
                 <a:solidFill>
                   <a:srgbClr val="8888AA"/>
@@ -5625,14 +5214,676 @@
               </a:defRPr>
             </a:pPr>
             <a:r>
-              <a:t>操作：插入 → 视频 → 此设备 → 选择对应 mp4 文件</a:t>
+              <a:t>HER 论文：Hindsight Experience Replay (Andrychowicz et al., 2017)</a:t>
+            </a:r>
+          </a:p>
+        </p:txBody>
+      </p:sp>
+    </p:spTree>
+  </p:cSld>
+  <p:clrMapOvr>
+    <a:masterClrMapping/>
+  </p:clrMapOvr>
+</p:sld>
+</file>
+
+<file path=ppt/slides/slide2.xml><?xml version="1.0" encoding="utf-8"?>
+<p:sld xmlns:a="http://schemas.openxmlformats.org/drawingml/2006/main" xmlns:p="http://schemas.openxmlformats.org/presentationml/2006/main" xmlns:r="http://schemas.openxmlformats.org/officeDocument/2006/relationships">
+  <p:cSld>
+    <p:bg>
+      <p:bgPr>
+        <a:solidFill>
+          <a:srgbClr val="1A1A2E"/>
+        </a:solidFill>
+        <a:effectLst/>
+      </p:bgPr>
+    </p:bg>
+    <p:spTree>
+      <p:nvGrpSpPr>
+        <p:cNvPr id="1" name=""/>
+        <p:cNvGrpSpPr/>
+        <p:nvPr/>
+      </p:nvGrpSpPr>
+      <p:grpSpPr/>
+      <p:sp>
+        <p:nvSpPr>
+          <p:cNvPr id="2" name="Rectangle 1"/>
+          <p:cNvSpPr/>
+          <p:nvPr/>
+        </p:nvSpPr>
+        <p:spPr>
+          <a:xfrm>
+            <a:off x="0" y="0"/>
+            <a:ext cx="109728" cy="6858000"/>
+          </a:xfrm>
+          <a:prstGeom prst="rect">
+            <a:avLst/>
+          </a:prstGeom>
+          <a:solidFill>
+            <a:srgbClr val="00D2FF"/>
+          </a:solidFill>
+          <a:ln>
+            <a:noFill/>
+          </a:ln>
+        </p:spPr>
+        <p:style>
+          <a:lnRef idx="1">
+            <a:schemeClr val="accent1"/>
+          </a:lnRef>
+          <a:fillRef idx="3">
+            <a:schemeClr val="accent1"/>
+          </a:fillRef>
+          <a:effectRef idx="2">
+            <a:schemeClr val="accent1"/>
+          </a:effectRef>
+          <a:fontRef idx="minor">
+            <a:schemeClr val="lt1"/>
+          </a:fontRef>
+        </p:style>
+        <p:txBody>
+          <a:bodyPr rtlCol="0" anchor="ctr"/>
+          <a:lstStyle/>
+          <a:p>
+            <a:pPr algn="ctr"/>
+          </a:p>
+        </p:txBody>
+      </p:sp>
+      <p:sp>
+        <p:nvSpPr>
+          <p:cNvPr id="3" name="TextBox 2"/>
+          <p:cNvSpPr txBox="1"/>
+          <p:nvPr/>
+        </p:nvSpPr>
+        <p:spPr>
+          <a:xfrm>
+            <a:off x="548640" y="274320"/>
+            <a:ext cx="7315200" cy="640080"/>
+          </a:xfrm>
+          <a:prstGeom prst="rect">
+            <a:avLst/>
+          </a:prstGeom>
+          <a:noFill/>
+        </p:spPr>
+        <p:txBody>
+          <a:bodyPr wrap="square">
+            <a:spAutoFit/>
+          </a:bodyPr>
+          <a:lstStyle/>
+          <a:p>
+            <a:pPr algn="l">
+              <a:defRPr sz="3200" b="1">
+                <a:solidFill>
+                  <a:srgbClr val="FFFFFF"/>
+                </a:solidFill>
+              </a:defRPr>
+            </a:pPr>
+            <a:r>
+              <a:t>实验背景</a:t>
+            </a:r>
+          </a:p>
+        </p:txBody>
+      </p:sp>
+      <p:sp>
+        <p:nvSpPr>
+          <p:cNvPr id="4" name="TextBox 3"/>
+          <p:cNvSpPr txBox="1"/>
+          <p:nvPr/>
+        </p:nvSpPr>
+        <p:spPr>
+          <a:xfrm>
+            <a:off x="731520" y="1188720"/>
+            <a:ext cx="10058400" cy="457200"/>
+          </a:xfrm>
+          <a:prstGeom prst="rect">
+            <a:avLst/>
+          </a:prstGeom>
+          <a:noFill/>
+        </p:spPr>
+        <p:txBody>
+          <a:bodyPr wrap="square">
+            <a:spAutoFit/>
+          </a:bodyPr>
+          <a:lstStyle/>
+          <a:p>
+            <a:pPr algn="l">
+              <a:defRPr sz="1700" b="0">
+                <a:solidFill>
+                  <a:srgbClr val="CCCCDD"/>
+                </a:solidFill>
+              </a:defRPr>
+            </a:pPr>
+            <a:r>
+              <a:t>▸ 任务环境：Franka Panda 机械臂仿真 (panda_gym + PyBullet)</a:t>
+            </a:r>
+          </a:p>
+        </p:txBody>
+      </p:sp>
+      <p:sp>
+        <p:nvSpPr>
+          <p:cNvPr id="5" name="TextBox 4"/>
+          <p:cNvSpPr txBox="1"/>
+          <p:nvPr/>
+        </p:nvSpPr>
+        <p:spPr>
+          <a:xfrm>
+            <a:off x="731520" y="1783080"/>
+            <a:ext cx="10058400" cy="457200"/>
+          </a:xfrm>
+          <a:prstGeom prst="rect">
+            <a:avLst/>
+          </a:prstGeom>
+          <a:noFill/>
+        </p:spPr>
+        <p:txBody>
+          <a:bodyPr wrap="square">
+            <a:spAutoFit/>
+          </a:bodyPr>
+          <a:lstStyle/>
+          <a:p>
+            <a:pPr algn="l">
+              <a:defRPr sz="1700" b="0">
+                <a:solidFill>
+                  <a:srgbClr val="CCCCDD"/>
+                </a:solidFill>
+              </a:defRPr>
+            </a:pPr>
+            <a:r>
+              <a:t>▸ 技术栈：Stable-Baselines3 · Gymnasium</a:t>
+            </a:r>
+          </a:p>
+        </p:txBody>
+      </p:sp>
+      <p:sp>
+        <p:nvSpPr>
+          <p:cNvPr id="6" name="TextBox 5"/>
+          <p:cNvSpPr txBox="1"/>
+          <p:nvPr/>
+        </p:nvSpPr>
+        <p:spPr>
+          <a:xfrm>
+            <a:off x="731520" y="2377440"/>
+            <a:ext cx="10058400" cy="457200"/>
+          </a:xfrm>
+          <a:prstGeom prst="rect">
+            <a:avLst/>
+          </a:prstGeom>
+          <a:noFill/>
+        </p:spPr>
+        <p:txBody>
+          <a:bodyPr wrap="square">
+            <a:spAutoFit/>
+          </a:bodyPr>
+          <a:lstStyle/>
+          <a:p>
+            <a:pPr algn="l">
+              <a:defRPr sz="1700" b="0">
+                <a:solidFill>
+                  <a:srgbClr val="CCCCDD"/>
+                </a:solidFill>
+              </a:defRPr>
+            </a:pPr>
+            <a:r>
+              <a:t>▸ 核心任务：PandaPickAndPlaceDense-v3</a:t>
+            </a:r>
+          </a:p>
+        </p:txBody>
+      </p:sp>
+      <p:sp>
+        <p:nvSpPr>
+          <p:cNvPr id="7" name="TextBox 6"/>
+          <p:cNvSpPr txBox="1"/>
+          <p:nvPr/>
+        </p:nvSpPr>
+        <p:spPr>
+          <a:xfrm>
+            <a:off x="731520" y="2971800"/>
+            <a:ext cx="10058400" cy="457200"/>
+          </a:xfrm>
+          <a:prstGeom prst="rect">
+            <a:avLst/>
+          </a:prstGeom>
+          <a:noFill/>
+        </p:spPr>
+        <p:txBody>
+          <a:bodyPr wrap="square">
+            <a:spAutoFit/>
+          </a:bodyPr>
+          <a:lstStyle/>
+          <a:p>
+            <a:pPr algn="l">
+              <a:defRPr sz="1700" b="0">
+                <a:solidFill>
+                  <a:srgbClr val="CCCCDD"/>
+                </a:solidFill>
+              </a:defRPr>
+            </a:pPr>
+            <a:r>
+              <a:t>▸ 任务流程：接近物体 → 抓取 → 抬起 → 移动 → 放置</a:t>
+            </a:r>
+          </a:p>
+        </p:txBody>
+      </p:sp>
+      <p:sp>
+        <p:nvSpPr>
+          <p:cNvPr id="8" name="TextBox 7"/>
+          <p:cNvSpPr txBox="1"/>
+          <p:nvPr/>
+        </p:nvSpPr>
+        <p:spPr>
+          <a:xfrm>
+            <a:off x="731520" y="3566160"/>
+            <a:ext cx="10058400" cy="457200"/>
+          </a:xfrm>
+          <a:prstGeom prst="rect">
+            <a:avLst/>
+          </a:prstGeom>
+          <a:noFill/>
+        </p:spPr>
+        <p:txBody>
+          <a:bodyPr wrap="square">
+            <a:spAutoFit/>
+          </a:bodyPr>
+          <a:lstStyle/>
+          <a:p>
+            <a:pPr algn="l">
+              <a:defRPr sz="1700" b="0">
+                <a:solidFill>
+                  <a:srgbClr val="CCCCDD"/>
+                </a:solidFill>
+              </a:defRPr>
+            </a:pPr>
+            <a:r>
+              <a:t>▸ 难点：多阶段复杂度，一步错则整体失败</a:t>
+            </a:r>
+          </a:p>
+        </p:txBody>
+      </p:sp>
+    </p:spTree>
+  </p:cSld>
+  <p:clrMapOvr>
+    <a:masterClrMapping/>
+  </p:clrMapOvr>
+</p:sld>
+</file>
+
+<file path=ppt/slides/slide3.xml><?xml version="1.0" encoding="utf-8"?>
+<p:sld xmlns:a="http://schemas.openxmlformats.org/drawingml/2006/main" xmlns:p="http://schemas.openxmlformats.org/presentationml/2006/main" xmlns:r="http://schemas.openxmlformats.org/officeDocument/2006/relationships">
+  <p:cSld>
+    <p:bg>
+      <p:bgPr>
+        <a:solidFill>
+          <a:srgbClr val="1A1A2E"/>
+        </a:solidFill>
+        <a:effectLst/>
+      </p:bgPr>
+    </p:bg>
+    <p:spTree>
+      <p:nvGrpSpPr>
+        <p:cNvPr id="1" name=""/>
+        <p:cNvGrpSpPr/>
+        <p:nvPr/>
+      </p:nvGrpSpPr>
+      <p:grpSpPr/>
+      <p:sp>
+        <p:nvSpPr>
+          <p:cNvPr id="2" name="Rectangle 1"/>
+          <p:cNvSpPr/>
+          <p:nvPr/>
+        </p:nvSpPr>
+        <p:spPr>
+          <a:xfrm>
+            <a:off x="0" y="0"/>
+            <a:ext cx="109728" cy="6858000"/>
+          </a:xfrm>
+          <a:prstGeom prst="rect">
+            <a:avLst/>
+          </a:prstGeom>
+          <a:solidFill>
+            <a:srgbClr val="E86C00"/>
+          </a:solidFill>
+          <a:ln>
+            <a:noFill/>
+          </a:ln>
+        </p:spPr>
+        <p:style>
+          <a:lnRef idx="1">
+            <a:schemeClr val="accent1"/>
+          </a:lnRef>
+          <a:fillRef idx="3">
+            <a:schemeClr val="accent1"/>
+          </a:fillRef>
+          <a:effectRef idx="2">
+            <a:schemeClr val="accent1"/>
+          </a:effectRef>
+          <a:fontRef idx="minor">
+            <a:schemeClr val="lt1"/>
+          </a:fontRef>
+        </p:style>
+        <p:txBody>
+          <a:bodyPr rtlCol="0" anchor="ctr"/>
+          <a:lstStyle/>
+          <a:p>
+            <a:pPr algn="ctr"/>
+          </a:p>
+        </p:txBody>
+      </p:sp>
+      <p:sp>
+        <p:nvSpPr>
+          <p:cNvPr id="3" name="TextBox 2"/>
+          <p:cNvSpPr txBox="1"/>
+          <p:nvPr/>
+        </p:nvSpPr>
+        <p:spPr>
+          <a:xfrm>
+            <a:off x="548640" y="274320"/>
+            <a:ext cx="9144000" cy="640080"/>
+          </a:xfrm>
+          <a:prstGeom prst="rect">
+            <a:avLst/>
+          </a:prstGeom>
+          <a:noFill/>
+        </p:spPr>
+        <p:txBody>
+          <a:bodyPr wrap="square">
+            <a:spAutoFit/>
+          </a:bodyPr>
+          <a:lstStyle/>
+          <a:p>
+            <a:pPr algn="l">
+              <a:defRPr sz="2800" b="1">
+                <a:solidFill>
+                  <a:srgbClr val="FFFFFF"/>
+                </a:solidFill>
+              </a:defRPr>
+            </a:pPr>
+            <a:r>
+              <a:t>算法一：PPO (Proximal Policy Optimization)</a:t>
+            </a:r>
+          </a:p>
+        </p:txBody>
+      </p:sp>
+      <p:sp>
+        <p:nvSpPr>
+          <p:cNvPr id="4" name="TextBox 3"/>
+          <p:cNvSpPr txBox="1"/>
+          <p:nvPr/>
+        </p:nvSpPr>
+        <p:spPr>
+          <a:xfrm>
+            <a:off x="731520" y="1097280"/>
+            <a:ext cx="10058400" cy="457200"/>
+          </a:xfrm>
+          <a:prstGeom prst="rect">
+            <a:avLst/>
+          </a:prstGeom>
+          <a:noFill/>
+        </p:spPr>
+        <p:txBody>
+          <a:bodyPr wrap="square">
+            <a:spAutoFit/>
+          </a:bodyPr>
+          <a:lstStyle/>
+          <a:p>
+            <a:pPr algn="l">
+              <a:defRPr sz="1600" b="0">
+                <a:solidFill>
+                  <a:srgbClr val="CCCCDD"/>
+                </a:solidFill>
+              </a:defRPr>
+            </a:pPr>
+            <a:r>
+              <a:t>• On-policy 算法：当前策略采数据 → 更新策略 → 丢弃数据</a:t>
+            </a:r>
+          </a:p>
+        </p:txBody>
+      </p:sp>
+      <p:sp>
+        <p:nvSpPr>
+          <p:cNvPr id="5" name="TextBox 4"/>
+          <p:cNvSpPr txBox="1"/>
+          <p:nvPr/>
+        </p:nvSpPr>
+        <p:spPr>
+          <a:xfrm>
+            <a:off x="731520" y="1600200"/>
+            <a:ext cx="10058400" cy="457200"/>
+          </a:xfrm>
+          <a:prstGeom prst="rect">
+            <a:avLst/>
+          </a:prstGeom>
+          <a:noFill/>
+        </p:spPr>
+        <p:txBody>
+          <a:bodyPr wrap="square">
+            <a:spAutoFit/>
+          </a:bodyPr>
+          <a:lstStyle/>
+          <a:p>
+            <a:pPr algn="l">
+              <a:defRPr sz="1600" b="0">
+                <a:solidFill>
+                  <a:srgbClr val="CCCCDD"/>
+                </a:solidFill>
+              </a:defRPr>
+            </a:pPr>
+            <a:r>
+              <a:t>• 有 rollout buffer（临时存储一批经验），但更新即清空</a:t>
+            </a:r>
+          </a:p>
+        </p:txBody>
+      </p:sp>
+      <p:sp>
+        <p:nvSpPr>
+          <p:cNvPr id="6" name="TextBox 5"/>
+          <p:cNvSpPr txBox="1"/>
+          <p:nvPr/>
+        </p:nvSpPr>
+        <p:spPr>
+          <a:xfrm>
+            <a:off x="731520" y="2103120"/>
+            <a:ext cx="10058400" cy="457200"/>
+          </a:xfrm>
+          <a:prstGeom prst="rect">
+            <a:avLst/>
+          </a:prstGeom>
+          <a:noFill/>
+        </p:spPr>
+        <p:txBody>
+          <a:bodyPr wrap="square">
+            <a:spAutoFit/>
+          </a:bodyPr>
+          <a:lstStyle/>
+          <a:p>
+            <a:pPr algn="l">
+              <a:defRPr sz="1600" b="0">
+                <a:solidFill>
+                  <a:srgbClr val="CCCCDD"/>
+                </a:solidFill>
+              </a:defRPr>
+            </a:pPr>
+            <a:r>
+              <a:t>• 优势：训练稳定，适合单阶段简单任务</a:t>
+            </a:r>
+          </a:p>
+        </p:txBody>
+      </p:sp>
+      <p:sp>
+        <p:nvSpPr>
+          <p:cNvPr id="7" name="TextBox 6"/>
+          <p:cNvSpPr txBox="1"/>
+          <p:nvPr/>
+        </p:nvSpPr>
+        <p:spPr>
+          <a:xfrm>
+            <a:off x="731520" y="2606040"/>
+            <a:ext cx="10058400" cy="457200"/>
+          </a:xfrm>
+          <a:prstGeom prst="rect">
+            <a:avLst/>
+          </a:prstGeom>
+          <a:noFill/>
+        </p:spPr>
+        <p:txBody>
+          <a:bodyPr wrap="square">
+            <a:spAutoFit/>
+          </a:bodyPr>
+          <a:lstStyle/>
+          <a:p>
+            <a:pPr algn="l">
+              <a:defRPr sz="1600" b="0">
+                <a:solidFill>
+                  <a:srgbClr val="CCCCDD"/>
+                </a:solidFill>
+              </a:defRPr>
+            </a:pPr>
+            <a:r>
+              <a:t>• 劣势：样本效率低，多阶段任务表现不佳</a:t>
+            </a:r>
+          </a:p>
+        </p:txBody>
+      </p:sp>
+      <p:sp>
+        <p:nvSpPr>
+          <p:cNvPr id="8" name="TextBox 7"/>
+          <p:cNvSpPr txBox="1"/>
+          <p:nvPr/>
+        </p:nvSpPr>
+        <p:spPr>
+          <a:xfrm>
+            <a:off x="731520" y="3474720"/>
+            <a:ext cx="10058400" cy="457200"/>
+          </a:xfrm>
+          <a:prstGeom prst="rect">
+            <a:avLst/>
+          </a:prstGeom>
+          <a:noFill/>
+        </p:spPr>
+        <p:txBody>
+          <a:bodyPr wrap="square">
+            <a:spAutoFit/>
+          </a:bodyPr>
+          <a:lstStyle/>
+          <a:p>
+            <a:pPr algn="l">
+              <a:defRPr sz="1800" b="1">
+                <a:solidFill>
+                  <a:srgbClr val="E86C00"/>
+                </a:solidFill>
+              </a:defRPr>
+            </a:pPr>
+            <a:r>
+              <a:t>关键：PPO 没有持久化的 replay buffer，无法做 HER</a:t>
+            </a:r>
+          </a:p>
+        </p:txBody>
+      </p:sp>
+    </p:spTree>
+  </p:cSld>
+  <p:clrMapOvr>
+    <a:masterClrMapping/>
+  </p:clrMapOvr>
+</p:sld>
+</file>
+
+<file path=ppt/slides/slide4.xml><?xml version="1.0" encoding="utf-8"?>
+<p:sld xmlns:a="http://schemas.openxmlformats.org/drawingml/2006/main" xmlns:p="http://schemas.openxmlformats.org/presentationml/2006/main" xmlns:r="http://schemas.openxmlformats.org/officeDocument/2006/relationships">
+  <p:cSld>
+    <p:bg>
+      <p:bgPr>
+        <a:solidFill>
+          <a:srgbClr val="1A1A2E"/>
+        </a:solidFill>
+        <a:effectLst/>
+      </p:bgPr>
+    </p:bg>
+    <p:spTree>
+      <p:nvGrpSpPr>
+        <p:cNvPr id="1" name=""/>
+        <p:cNvGrpSpPr/>
+        <p:nvPr/>
+      </p:nvGrpSpPr>
+      <p:grpSpPr/>
+      <p:sp>
+        <p:nvSpPr>
+          <p:cNvPr id="2" name="Rectangle 1"/>
+          <p:cNvSpPr/>
+          <p:nvPr/>
+        </p:nvSpPr>
+        <p:spPr>
+          <a:xfrm>
+            <a:off x="0" y="0"/>
+            <a:ext cx="109728" cy="6858000"/>
+          </a:xfrm>
+          <a:prstGeom prst="rect">
+            <a:avLst/>
+          </a:prstGeom>
+          <a:solidFill>
+            <a:srgbClr val="E86C00"/>
+          </a:solidFill>
+          <a:ln>
+            <a:noFill/>
+          </a:ln>
+        </p:spPr>
+        <p:style>
+          <a:lnRef idx="1">
+            <a:schemeClr val="accent1"/>
+          </a:lnRef>
+          <a:fillRef idx="3">
+            <a:schemeClr val="accent1"/>
+          </a:fillRef>
+          <a:effectRef idx="2">
+            <a:schemeClr val="accent1"/>
+          </a:effectRef>
+          <a:fontRef idx="minor">
+            <a:schemeClr val="lt1"/>
+          </a:fontRef>
+        </p:style>
+        <p:txBody>
+          <a:bodyPr rtlCol="0" anchor="ctr"/>
+          <a:lstStyle/>
+          <a:p>
+            <a:pPr algn="ctr"/>
+          </a:p>
+        </p:txBody>
+      </p:sp>
+      <p:sp>
+        <p:nvSpPr>
+          <p:cNvPr id="3" name="TextBox 2"/>
+          <p:cNvSpPr txBox="1"/>
+          <p:nvPr/>
+        </p:nvSpPr>
+        <p:spPr>
+          <a:xfrm>
+            <a:off x="548640" y="137160"/>
+            <a:ext cx="9144000" cy="457200"/>
+          </a:xfrm>
+          <a:prstGeom prst="rect">
+            <a:avLst/>
+          </a:prstGeom>
+          <a:noFill/>
+        </p:spPr>
+        <p:txBody>
+          <a:bodyPr wrap="square">
+            <a:spAutoFit/>
+          </a:bodyPr>
+          <a:lstStyle/>
+          <a:p>
+            <a:pPr algn="l">
+              <a:defRPr sz="2600" b="1">
+                <a:solidFill>
+                  <a:srgbClr val="FFFFFF"/>
+                </a:solidFill>
+              </a:defRPr>
+            </a:pPr>
+            <a:r>
+              <a:t>PPO — PandaReach 训练曲线</a:t>
             </a:r>
           </a:p>
         </p:txBody>
       </p:sp>
       <p:pic>
         <p:nvPicPr>
-          <p:cNvPr id="10" name="Picture 9" descr="8690929472d650ef4562661878cdc4ec.png"/>
+          <p:cNvPr id="4" name="Picture 3" descr="66fa1378d30f7bc13830dd1067ded3ee.png"/>
           <p:cNvPicPr>
             <a:picLocks noChangeAspect="1"/>
           </p:cNvPicPr>
@@ -5646,14 +5897,1095 @@
         </p:blipFill>
         <p:spPr>
           <a:xfrm>
-            <a:off x="5943600" y="3657600"/>
-            <a:ext cx="2743200" cy="844409"/>
+            <a:off x="457200" y="822960"/>
+            <a:ext cx="5486400" cy="3874770"/>
           </a:xfrm>
           <a:prstGeom prst="rect">
             <a:avLst/>
           </a:prstGeom>
         </p:spPr>
       </p:pic>
+      <p:pic>
+        <p:nvPicPr>
+          <p:cNvPr id="5" name="Picture 4" descr="a8884ed5a1217ffca92d90c278e2d7ba.png"/>
+          <p:cNvPicPr>
+            <a:picLocks noChangeAspect="1"/>
+          </p:cNvPicPr>
+          <p:nvPr/>
+        </p:nvPicPr>
+        <p:blipFill>
+          <a:blip r:embed="rId3"/>
+          <a:stretch>
+            <a:fillRect/>
+          </a:stretch>
+        </p:blipFill>
+        <p:spPr>
+          <a:xfrm>
+            <a:off x="6217920" y="822960"/>
+            <a:ext cx="5486400" cy="3821753"/>
+          </a:xfrm>
+          <a:prstGeom prst="rect">
+            <a:avLst/>
+          </a:prstGeom>
+        </p:spPr>
+      </p:pic>
+      <p:pic>
+        <p:nvPicPr>
+          <p:cNvPr id="6" name="Picture 5" descr="cf84646c7f3c60738dc8341bcc23fa8d.png"/>
+          <p:cNvPicPr>
+            <a:picLocks noChangeAspect="1"/>
+          </p:cNvPicPr>
+          <p:nvPr/>
+        </p:nvPicPr>
+        <p:blipFill>
+          <a:blip r:embed="rId4"/>
+          <a:stretch>
+            <a:fillRect/>
+          </a:stretch>
+        </p:blipFill>
+        <p:spPr>
+          <a:xfrm>
+            <a:off x="457200" y="3657600"/>
+            <a:ext cx="5486400" cy="3684998"/>
+          </a:xfrm>
+          <a:prstGeom prst="rect">
+            <a:avLst/>
+          </a:prstGeom>
+        </p:spPr>
+      </p:pic>
+      <p:pic>
+        <p:nvPicPr>
+          <p:cNvPr id="7" name="Picture 6" descr="训练曲线.png"/>
+          <p:cNvPicPr>
+            <a:picLocks noChangeAspect="1"/>
+          </p:cNvPicPr>
+          <p:nvPr/>
+        </p:nvPicPr>
+        <p:blipFill>
+          <a:blip r:embed="rId5"/>
+          <a:stretch>
+            <a:fillRect/>
+          </a:stretch>
+        </p:blipFill>
+        <p:spPr>
+          <a:xfrm>
+            <a:off x="6217920" y="3657600"/>
+            <a:ext cx="5486400" cy="2253022"/>
+          </a:xfrm>
+          <a:prstGeom prst="rect">
+            <a:avLst/>
+          </a:prstGeom>
+        </p:spPr>
+      </p:pic>
+      <p:sp>
+        <p:nvSpPr>
+          <p:cNvPr id="8" name="TextBox 7"/>
+          <p:cNvSpPr txBox="1"/>
+          <p:nvPr/>
+        </p:nvSpPr>
+        <p:spPr>
+          <a:xfrm>
+            <a:off x="457200" y="6400800"/>
+            <a:ext cx="10972800" cy="365760"/>
+          </a:xfrm>
+          <a:prstGeom prst="rect">
+            <a:avLst/>
+          </a:prstGeom>
+          <a:noFill/>
+        </p:spPr>
+        <p:txBody>
+          <a:bodyPr wrap="square">
+            <a:spAutoFit/>
+          </a:bodyPr>
+          <a:lstStyle/>
+          <a:p>
+            <a:pPr algn="ctr">
+              <a:defRPr sz="1500" b="0">
+                <a:solidFill>
+                  <a:srgbClr val="8888AA"/>
+                </a:solidFill>
+              </a:defRPr>
+            </a:pPr>
+            <a:r>
+              <a:t>PandaReachDense-v3 — PPO 4 万步达到 100% 成功率，单阶段任务表现优异</a:t>
+            </a:r>
+          </a:p>
+        </p:txBody>
+      </p:sp>
+    </p:spTree>
+  </p:cSld>
+  <p:clrMapOvr>
+    <a:masterClrMapping/>
+  </p:clrMapOvr>
+</p:sld>
+</file>
+
+<file path=ppt/slides/slide5.xml><?xml version="1.0" encoding="utf-8"?>
+<p:sld xmlns:a="http://schemas.openxmlformats.org/drawingml/2006/main" xmlns:p="http://schemas.openxmlformats.org/presentationml/2006/main" xmlns:r="http://schemas.openxmlformats.org/officeDocument/2006/relationships">
+  <p:cSld>
+    <p:bg>
+      <p:bgPr>
+        <a:solidFill>
+          <a:srgbClr val="1A1A2E"/>
+        </a:solidFill>
+        <a:effectLst/>
+      </p:bgPr>
+    </p:bg>
+    <p:spTree>
+      <p:nvGrpSpPr>
+        <p:cNvPr id="1" name=""/>
+        <p:cNvGrpSpPr/>
+        <p:nvPr/>
+      </p:nvGrpSpPr>
+      <p:grpSpPr/>
+      <p:sp>
+        <p:nvSpPr>
+          <p:cNvPr id="2" name="Rectangle 1"/>
+          <p:cNvSpPr/>
+          <p:nvPr/>
+        </p:nvSpPr>
+        <p:spPr>
+          <a:xfrm>
+            <a:off x="0" y="0"/>
+            <a:ext cx="109728" cy="6858000"/>
+          </a:xfrm>
+          <a:prstGeom prst="rect">
+            <a:avLst/>
+          </a:prstGeom>
+          <a:solidFill>
+            <a:srgbClr val="00CC66"/>
+          </a:solidFill>
+          <a:ln>
+            <a:noFill/>
+          </a:ln>
+        </p:spPr>
+        <p:style>
+          <a:lnRef idx="1">
+            <a:schemeClr val="accent1"/>
+          </a:lnRef>
+          <a:fillRef idx="3">
+            <a:schemeClr val="accent1"/>
+          </a:fillRef>
+          <a:effectRef idx="2">
+            <a:schemeClr val="accent1"/>
+          </a:effectRef>
+          <a:fontRef idx="minor">
+            <a:schemeClr val="lt1"/>
+          </a:fontRef>
+        </p:style>
+        <p:txBody>
+          <a:bodyPr rtlCol="0" anchor="ctr"/>
+          <a:lstStyle/>
+          <a:p>
+            <a:pPr algn="ctr"/>
+          </a:p>
+        </p:txBody>
+      </p:sp>
+      <p:sp>
+        <p:nvSpPr>
+          <p:cNvPr id="3" name="TextBox 2"/>
+          <p:cNvSpPr txBox="1"/>
+          <p:nvPr/>
+        </p:nvSpPr>
+        <p:spPr>
+          <a:xfrm>
+            <a:off x="548640" y="274320"/>
+            <a:ext cx="7315200" cy="640080"/>
+          </a:xfrm>
+          <a:prstGeom prst="rect">
+            <a:avLst/>
+          </a:prstGeom>
+          <a:noFill/>
+        </p:spPr>
+        <p:txBody>
+          <a:bodyPr wrap="square">
+            <a:spAutoFit/>
+          </a:bodyPr>
+          <a:lstStyle/>
+          <a:p>
+            <a:pPr algn="l">
+              <a:defRPr sz="2800" b="1">
+                <a:solidFill>
+                  <a:srgbClr val="FFFFFF"/>
+                </a:solidFill>
+              </a:defRPr>
+            </a:pPr>
+            <a:r>
+              <a:t>算法二：SAC + HER</a:t>
+            </a:r>
+          </a:p>
+        </p:txBody>
+      </p:sp>
+      <p:sp>
+        <p:nvSpPr>
+          <p:cNvPr id="4" name="Rectangle 3"/>
+          <p:cNvSpPr/>
+          <p:nvPr/>
+        </p:nvSpPr>
+        <p:spPr>
+          <a:xfrm>
+            <a:off x="548640" y="1005840"/>
+            <a:ext cx="5029200" cy="36576"/>
+          </a:xfrm>
+          <a:prstGeom prst="rect">
+            <a:avLst/>
+          </a:prstGeom>
+          <a:solidFill>
+            <a:srgbClr val="00D2FF"/>
+          </a:solidFill>
+          <a:ln>
+            <a:noFill/>
+          </a:ln>
+        </p:spPr>
+        <p:style>
+          <a:lnRef idx="1">
+            <a:schemeClr val="accent1"/>
+          </a:lnRef>
+          <a:fillRef idx="3">
+            <a:schemeClr val="accent1"/>
+          </a:fillRef>
+          <a:effectRef idx="2">
+            <a:schemeClr val="accent1"/>
+          </a:effectRef>
+          <a:fontRef idx="minor">
+            <a:schemeClr val="lt1"/>
+          </a:fontRef>
+        </p:style>
+        <p:txBody>
+          <a:bodyPr rtlCol="0" anchor="ctr"/>
+          <a:lstStyle/>
+          <a:p>
+            <a:pPr algn="ctr"/>
+          </a:p>
+        </p:txBody>
+      </p:sp>
+      <p:sp>
+        <p:nvSpPr>
+          <p:cNvPr id="5" name="TextBox 4"/>
+          <p:cNvSpPr txBox="1"/>
+          <p:nvPr/>
+        </p:nvSpPr>
+        <p:spPr>
+          <a:xfrm>
+            <a:off x="548640" y="1188720"/>
+            <a:ext cx="4572000" cy="365760"/>
+          </a:xfrm>
+          <a:prstGeom prst="rect">
+            <a:avLst/>
+          </a:prstGeom>
+          <a:noFill/>
+        </p:spPr>
+        <p:txBody>
+          <a:bodyPr wrap="square">
+            <a:spAutoFit/>
+          </a:bodyPr>
+          <a:lstStyle/>
+          <a:p>
+            <a:pPr algn="l">
+              <a:defRPr sz="2200" b="1">
+                <a:solidFill>
+                  <a:srgbClr val="FFFFFF"/>
+                </a:solidFill>
+              </a:defRPr>
+            </a:pPr>
+            <a:r>
+              <a:t>SAC (Soft Actor-Critic)</a:t>
+            </a:r>
+          </a:p>
+        </p:txBody>
+      </p:sp>
+      <p:sp>
+        <p:nvSpPr>
+          <p:cNvPr id="6" name="TextBox 5"/>
+          <p:cNvSpPr txBox="1"/>
+          <p:nvPr/>
+        </p:nvSpPr>
+        <p:spPr>
+          <a:xfrm>
+            <a:off x="731520" y="1737360"/>
+            <a:ext cx="4572000" cy="365760"/>
+          </a:xfrm>
+          <a:prstGeom prst="rect">
+            <a:avLst/>
+          </a:prstGeom>
+          <a:noFill/>
+        </p:spPr>
+        <p:txBody>
+          <a:bodyPr wrap="square">
+            <a:spAutoFit/>
+          </a:bodyPr>
+          <a:lstStyle/>
+          <a:p>
+            <a:pPr algn="l">
+              <a:defRPr sz="1600" b="0">
+                <a:solidFill>
+                  <a:srgbClr val="CCCCDD"/>
+                </a:solidFill>
+              </a:defRPr>
+            </a:pPr>
+            <a:r>
+              <a:t>• Off-policy 算法，有持久化 replay buffer</a:t>
+            </a:r>
+          </a:p>
+        </p:txBody>
+      </p:sp>
+      <p:sp>
+        <p:nvSpPr>
+          <p:cNvPr id="7" name="TextBox 6"/>
+          <p:cNvSpPr txBox="1"/>
+          <p:nvPr/>
+        </p:nvSpPr>
+        <p:spPr>
+          <a:xfrm>
+            <a:off x="731520" y="2148840"/>
+            <a:ext cx="4572000" cy="365760"/>
+          </a:xfrm>
+          <a:prstGeom prst="rect">
+            <a:avLst/>
+          </a:prstGeom>
+          <a:noFill/>
+        </p:spPr>
+        <p:txBody>
+          <a:bodyPr wrap="square">
+            <a:spAutoFit/>
+          </a:bodyPr>
+          <a:lstStyle/>
+          <a:p>
+            <a:pPr algn="l">
+              <a:defRPr sz="1600" b="0">
+                <a:solidFill>
+                  <a:srgbClr val="CCCCDD"/>
+                </a:solidFill>
+              </a:defRPr>
+            </a:pPr>
+            <a:r>
+              <a:t>• 最大熵框架：在奖励和探索之间取得平衡</a:t>
+            </a:r>
+          </a:p>
+        </p:txBody>
+      </p:sp>
+      <p:sp>
+        <p:nvSpPr>
+          <p:cNvPr id="8" name="TextBox 7"/>
+          <p:cNvSpPr txBox="1"/>
+          <p:nvPr/>
+        </p:nvSpPr>
+        <p:spPr>
+          <a:xfrm>
+            <a:off x="731520" y="2560320"/>
+            <a:ext cx="4572000" cy="365760"/>
+          </a:xfrm>
+          <a:prstGeom prst="rect">
+            <a:avLst/>
+          </a:prstGeom>
+          <a:noFill/>
+        </p:spPr>
+        <p:txBody>
+          <a:bodyPr wrap="square">
+            <a:spAutoFit/>
+          </a:bodyPr>
+          <a:lstStyle/>
+          <a:p>
+            <a:pPr algn="l">
+              <a:defRPr sz="1600" b="0">
+                <a:solidFill>
+                  <a:srgbClr val="CCCCDD"/>
+                </a:solidFill>
+              </a:defRPr>
+            </a:pPr>
+            <a:r>
+              <a:t>• 历史数据可反复使用，样本效率高</a:t>
+            </a:r>
+          </a:p>
+        </p:txBody>
+      </p:sp>
+      <p:sp>
+        <p:nvSpPr>
+          <p:cNvPr id="9" name="Rectangle 8"/>
+          <p:cNvSpPr/>
+          <p:nvPr/>
+        </p:nvSpPr>
+        <p:spPr>
+          <a:xfrm>
+            <a:off x="6400800" y="1005840"/>
+            <a:ext cx="5029200" cy="36576"/>
+          </a:xfrm>
+          <a:prstGeom prst="rect">
+            <a:avLst/>
+          </a:prstGeom>
+          <a:solidFill>
+            <a:srgbClr val="00D2FF"/>
+          </a:solidFill>
+          <a:ln>
+            <a:noFill/>
+          </a:ln>
+        </p:spPr>
+        <p:style>
+          <a:lnRef idx="1">
+            <a:schemeClr val="accent1"/>
+          </a:lnRef>
+          <a:fillRef idx="3">
+            <a:schemeClr val="accent1"/>
+          </a:fillRef>
+          <a:effectRef idx="2">
+            <a:schemeClr val="accent1"/>
+          </a:effectRef>
+          <a:fontRef idx="minor">
+            <a:schemeClr val="lt1"/>
+          </a:fontRef>
+        </p:style>
+        <p:txBody>
+          <a:bodyPr rtlCol="0" anchor="ctr"/>
+          <a:lstStyle/>
+          <a:p>
+            <a:pPr algn="ctr"/>
+          </a:p>
+        </p:txBody>
+      </p:sp>
+      <p:sp>
+        <p:nvSpPr>
+          <p:cNvPr id="10" name="TextBox 9"/>
+          <p:cNvSpPr txBox="1"/>
+          <p:nvPr/>
+        </p:nvSpPr>
+        <p:spPr>
+          <a:xfrm>
+            <a:off x="6400800" y="1188720"/>
+            <a:ext cx="5486400" cy="365760"/>
+          </a:xfrm>
+          <a:prstGeom prst="rect">
+            <a:avLst/>
+          </a:prstGeom>
+          <a:noFill/>
+        </p:spPr>
+        <p:txBody>
+          <a:bodyPr wrap="square">
+            <a:spAutoFit/>
+          </a:bodyPr>
+          <a:lstStyle/>
+          <a:p>
+            <a:pPr algn="l">
+              <a:defRPr sz="2200" b="1">
+                <a:solidFill>
+                  <a:srgbClr val="FFFFFF"/>
+                </a:solidFill>
+              </a:defRPr>
+            </a:pPr>
+            <a:r>
+              <a:t>HER (Hindsight Experience Replay)</a:t>
+            </a:r>
+          </a:p>
+        </p:txBody>
+      </p:sp>
+      <p:sp>
+        <p:nvSpPr>
+          <p:cNvPr id="11" name="TextBox 10"/>
+          <p:cNvSpPr txBox="1"/>
+          <p:nvPr/>
+        </p:nvSpPr>
+        <p:spPr>
+          <a:xfrm>
+            <a:off x="6583680" y="1737360"/>
+            <a:ext cx="5029200" cy="365760"/>
+          </a:xfrm>
+          <a:prstGeom prst="rect">
+            <a:avLst/>
+          </a:prstGeom>
+          <a:noFill/>
+        </p:spPr>
+        <p:txBody>
+          <a:bodyPr wrap="square">
+            <a:spAutoFit/>
+          </a:bodyPr>
+          <a:lstStyle/>
+          <a:p>
+            <a:pPr algn="l">
+              <a:defRPr sz="1600" b="0">
+                <a:solidFill>
+                  <a:srgbClr val="CCCCDD"/>
+                </a:solidFill>
+              </a:defRPr>
+            </a:pPr>
+            <a:r>
+              <a:t>• 将失败轨迹"重标目标"转化为有用经验</a:t>
+            </a:r>
+          </a:p>
+        </p:txBody>
+      </p:sp>
+      <p:sp>
+        <p:nvSpPr>
+          <p:cNvPr id="12" name="TextBox 11"/>
+          <p:cNvSpPr txBox="1"/>
+          <p:nvPr/>
+        </p:nvSpPr>
+        <p:spPr>
+          <a:xfrm>
+            <a:off x="6583680" y="2148840"/>
+            <a:ext cx="5029200" cy="365760"/>
+          </a:xfrm>
+          <a:prstGeom prst="rect">
+            <a:avLst/>
+          </a:prstGeom>
+          <a:noFill/>
+        </p:spPr>
+        <p:txBody>
+          <a:bodyPr wrap="square">
+            <a:spAutoFit/>
+          </a:bodyPr>
+          <a:lstStyle/>
+          <a:p>
+            <a:pPr algn="l">
+              <a:defRPr sz="1600" b="0">
+                <a:solidFill>
+                  <a:srgbClr val="CCCCDD"/>
+                </a:solidFill>
+              </a:defRPr>
+            </a:pPr>
+            <a:r>
+              <a:t>• 例：没抓到物体 → 目标改为手的位置</a:t>
+            </a:r>
+          </a:p>
+        </p:txBody>
+      </p:sp>
+      <p:sp>
+        <p:nvSpPr>
+          <p:cNvPr id="13" name="TextBox 12"/>
+          <p:cNvSpPr txBox="1"/>
+          <p:nvPr/>
+        </p:nvSpPr>
+        <p:spPr>
+          <a:xfrm>
+            <a:off x="6583680" y="2560320"/>
+            <a:ext cx="5029200" cy="365760"/>
+          </a:xfrm>
+          <a:prstGeom prst="rect">
+            <a:avLst/>
+          </a:prstGeom>
+          <a:noFill/>
+        </p:spPr>
+        <p:txBody>
+          <a:bodyPr wrap="square">
+            <a:spAutoFit/>
+          </a:bodyPr>
+          <a:lstStyle/>
+          <a:p>
+            <a:pPr algn="l">
+              <a:defRPr sz="1600" b="0">
+                <a:solidFill>
+                  <a:srgbClr val="CCCCDD"/>
+                </a:solidFill>
+              </a:defRPr>
+            </a:pPr>
+            <a:r>
+              <a:t>• 失败 = 下一次学习的正样本</a:t>
+            </a:r>
+          </a:p>
+        </p:txBody>
+      </p:sp>
+      <p:sp>
+        <p:nvSpPr>
+          <p:cNvPr id="14" name="Rectangle 13"/>
+          <p:cNvSpPr/>
+          <p:nvPr/>
+        </p:nvSpPr>
+        <p:spPr>
+          <a:xfrm>
+            <a:off x="548640" y="3291840"/>
+            <a:ext cx="10972800" cy="36576"/>
+          </a:xfrm>
+          <a:prstGeom prst="rect">
+            <a:avLst/>
+          </a:prstGeom>
+          <a:solidFill>
+            <a:srgbClr val="FFFFFF"/>
+          </a:solidFill>
+          <a:ln>
+            <a:noFill/>
+          </a:ln>
+        </p:spPr>
+        <p:style>
+          <a:lnRef idx="1">
+            <a:schemeClr val="accent1"/>
+          </a:lnRef>
+          <a:fillRef idx="3">
+            <a:schemeClr val="accent1"/>
+          </a:fillRef>
+          <a:effectRef idx="2">
+            <a:schemeClr val="accent1"/>
+          </a:effectRef>
+          <a:fontRef idx="minor">
+            <a:schemeClr val="lt1"/>
+          </a:fontRef>
+        </p:style>
+        <p:txBody>
+          <a:bodyPr rtlCol="0" anchor="ctr"/>
+          <a:lstStyle/>
+          <a:p>
+            <a:pPr algn="ctr"/>
+          </a:p>
+        </p:txBody>
+      </p:sp>
+      <p:sp>
+        <p:nvSpPr>
+          <p:cNvPr id="15" name="TextBox 14"/>
+          <p:cNvSpPr txBox="1"/>
+          <p:nvPr/>
+        </p:nvSpPr>
+        <p:spPr>
+          <a:xfrm>
+            <a:off x="548640" y="3474720"/>
+            <a:ext cx="10972800" cy="457200"/>
+          </a:xfrm>
+          <a:prstGeom prst="rect">
+            <a:avLst/>
+          </a:prstGeom>
+          <a:noFill/>
+        </p:spPr>
+        <p:txBody>
+          <a:bodyPr wrap="square">
+            <a:spAutoFit/>
+          </a:bodyPr>
+          <a:lstStyle/>
+          <a:p>
+            <a:pPr algn="ctr">
+              <a:defRPr sz="1800" b="1">
+                <a:solidFill>
+                  <a:srgbClr val="00CC66"/>
+                </a:solidFill>
+              </a:defRPr>
+            </a:pPr>
+            <a:r>
+              <a:t>SAC 提供 replay buffer → HER 重标目标 → 失败轨迹变废为宝，两者天然互补</a:t>
+            </a:r>
+          </a:p>
+        </p:txBody>
+      </p:sp>
+    </p:spTree>
+  </p:cSld>
+  <p:clrMapOvr>
+    <a:masterClrMapping/>
+  </p:clrMapOvr>
+</p:sld>
+</file>
+
+<file path=ppt/slides/slide6.xml><?xml version="1.0" encoding="utf-8"?>
+<p:sld xmlns:a="http://schemas.openxmlformats.org/drawingml/2006/main" xmlns:p="http://schemas.openxmlformats.org/presentationml/2006/main" xmlns:r="http://schemas.openxmlformats.org/officeDocument/2006/relationships">
+  <p:cSld>
+    <p:bg>
+      <p:bgPr>
+        <a:solidFill>
+          <a:srgbClr val="1A1A2E"/>
+        </a:solidFill>
+        <a:effectLst/>
+      </p:bgPr>
+    </p:bg>
+    <p:spTree>
+      <p:nvGrpSpPr>
+        <p:cNvPr id="1" name=""/>
+        <p:cNvGrpSpPr/>
+        <p:nvPr/>
+      </p:nvGrpSpPr>
+      <p:grpSpPr/>
+      <p:sp>
+        <p:nvSpPr>
+          <p:cNvPr id="2" name="Rectangle 1"/>
+          <p:cNvSpPr/>
+          <p:nvPr/>
+        </p:nvSpPr>
+        <p:spPr>
+          <a:xfrm>
+            <a:off x="0" y="0"/>
+            <a:ext cx="109728" cy="6858000"/>
+          </a:xfrm>
+          <a:prstGeom prst="rect">
+            <a:avLst/>
+          </a:prstGeom>
+          <a:solidFill>
+            <a:srgbClr val="FFD700"/>
+          </a:solidFill>
+          <a:ln>
+            <a:noFill/>
+          </a:ln>
+        </p:spPr>
+        <p:style>
+          <a:lnRef idx="1">
+            <a:schemeClr val="accent1"/>
+          </a:lnRef>
+          <a:fillRef idx="3">
+            <a:schemeClr val="accent1"/>
+          </a:fillRef>
+          <a:effectRef idx="2">
+            <a:schemeClr val="accent1"/>
+          </a:effectRef>
+          <a:fontRef idx="minor">
+            <a:schemeClr val="lt1"/>
+          </a:fontRef>
+        </p:style>
+        <p:txBody>
+          <a:bodyPr rtlCol="0" anchor="ctr"/>
+          <a:lstStyle/>
+          <a:p>
+            <a:pPr algn="ctr"/>
+          </a:p>
+        </p:txBody>
+      </p:sp>
+      <p:sp>
+        <p:nvSpPr>
+          <p:cNvPr id="3" name="TextBox 2"/>
+          <p:cNvSpPr txBox="1"/>
+          <p:nvPr/>
+        </p:nvSpPr>
+        <p:spPr>
+          <a:xfrm>
+            <a:off x="548640" y="182880"/>
+            <a:ext cx="9144000" cy="548640"/>
+          </a:xfrm>
+          <a:prstGeom prst="rect">
+            <a:avLst/>
+          </a:prstGeom>
+          <a:noFill/>
+        </p:spPr>
+        <p:txBody>
+          <a:bodyPr wrap="square">
+            <a:spAutoFit/>
+          </a:bodyPr>
+          <a:lstStyle/>
+          <a:p>
+            <a:pPr algn="l">
+              <a:defRPr sz="2800" b="1">
+                <a:solidFill>
+                  <a:srgbClr val="FFFFFF"/>
+                </a:solidFill>
+              </a:defRPr>
+            </a:pPr>
+            <a:r>
+              <a:t>实验结果对比：PPO vs SAC+HER</a:t>
+            </a:r>
+          </a:p>
+        </p:txBody>
+      </p:sp>
+      <p:graphicFrame>
+        <p:nvGraphicFramePr>
+          <p:cNvPr id="4" name="Table 3"/>
+          <p:cNvGraphicFramePr>
+            <a:graphicFrameLocks noGrp="1"/>
+          </p:cNvGraphicFramePr>
+          <p:nvPr/>
+        </p:nvGraphicFramePr>
+        <p:xfrm>
+          <a:off x="1371600" y="1097280"/>
+          <a:ext cx="9418320" cy="3200400"/>
+        </p:xfrm>
+        <a:graphic>
+          <a:graphicData uri="http://schemas.openxmlformats.org/drawingml/2006/table">
+            <a:tbl>
+              <a:tblPr firstRow="1" bandRow="1">
+                <a:tableStyleId>{5C22544A-7EE6-4342-B048-85BDC9FD1C3A}</a:tableStyleId>
+              </a:tblPr>
+              <a:tblGrid>
+                <a:gridCol w="3017520"/>
+                <a:gridCol w="3200400"/>
+                <a:gridCol w="3200400"/>
+              </a:tblGrid>
+              <a:tr h="640080">
+                <a:tc>
+                  <a:txBody>
+                    <a:bodyPr/>
+                    <a:lstStyle/>
+                    <a:p>
+                      <a:pPr algn="ctr">
+                        <a:defRPr sz="2000" b="1">
+                          <a:solidFill>
+                            <a:srgbClr val="FFFFFF"/>
+                          </a:solidFill>
+                        </a:defRPr>
+                      </a:pPr>
+                      <a:r>
+                        <a:t>指标</a:t>
+                      </a:r>
+                    </a:p>
+                  </a:txBody>
+                  <a:tcPr/>
+                </a:tc>
+                <a:tc>
+                  <a:txBody>
+                    <a:bodyPr/>
+                    <a:lstStyle/>
+                    <a:p>
+                      <a:pPr algn="ctr">
+                        <a:defRPr sz="2000" b="1">
+                          <a:solidFill>
+                            <a:srgbClr val="FFFFFF"/>
+                          </a:solidFill>
+                        </a:defRPr>
+                      </a:pPr>
+                      <a:r>
+                        <a:t>PPO</a:t>
+                      </a:r>
+                    </a:p>
+                  </a:txBody>
+                  <a:tcPr/>
+                </a:tc>
+                <a:tc>
+                  <a:txBody>
+                    <a:bodyPr/>
+                    <a:lstStyle/>
+                    <a:p>
+                      <a:pPr algn="ctr">
+                        <a:defRPr sz="2000" b="1">
+                          <a:solidFill>
+                            <a:srgbClr val="FFFFFF"/>
+                          </a:solidFill>
+                        </a:defRPr>
+                      </a:pPr>
+                      <a:r>
+                        <a:t>SAC+HER</a:t>
+                      </a:r>
+                    </a:p>
+                  </a:txBody>
+                  <a:tcPr/>
+                </a:tc>
+              </a:tr>
+              <a:tr h="640080">
+                <a:tc>
+                  <a:txBody>
+                    <a:bodyPr/>
+                    <a:lstStyle/>
+                    <a:p>
+                      <a:pPr algn="ctr">
+                        <a:defRPr sz="1800">
+                          <a:solidFill>
+                            <a:srgbClr val="FFFFFF"/>
+                          </a:solidFill>
+                        </a:defRPr>
+                      </a:pPr>
+                      <a:r>
+                        <a:t>训练总步数</a:t>
+                      </a:r>
+                    </a:p>
+                  </a:txBody>
+                  <a:tcPr/>
+                </a:tc>
+                <a:tc>
+                  <a:txBody>
+                    <a:bodyPr/>
+                    <a:lstStyle/>
+                    <a:p>
+                      <a:pPr algn="ctr">
+                        <a:defRPr sz="1800">
+                          <a:solidFill>
+                            <a:srgbClr val="FFFFFF"/>
+                          </a:solidFill>
+                        </a:defRPr>
+                      </a:pPr>
+                      <a:r>
+                        <a:t>760 万</a:t>
+                      </a:r>
+                    </a:p>
+                  </a:txBody>
+                  <a:tcPr/>
+                </a:tc>
+                <a:tc>
+                  <a:txBody>
+                    <a:bodyPr/>
+                    <a:lstStyle/>
+                    <a:p>
+                      <a:pPr algn="ctr">
+                        <a:defRPr sz="1800">
+                          <a:solidFill>
+                            <a:srgbClr val="FFFFFF"/>
+                          </a:solidFill>
+                        </a:defRPr>
+                      </a:pPr>
+                      <a:r>
+                        <a:t>100 万</a:t>
+                      </a:r>
+                    </a:p>
+                  </a:txBody>
+                  <a:tcPr/>
+                </a:tc>
+              </a:tr>
+              <a:tr h="640080">
+                <a:tc>
+                  <a:txBody>
+                    <a:bodyPr/>
+                    <a:lstStyle/>
+                    <a:p>
+                      <a:pPr algn="ctr">
+                        <a:defRPr sz="1800">
+                          <a:solidFill>
+                            <a:srgbClr val="FFFFFF"/>
+                          </a:solidFill>
+                        </a:defRPr>
+                      </a:pPr>
+                      <a:r>
+                        <a:t>100 轮测试成功率</a:t>
+                      </a:r>
+                    </a:p>
+                  </a:txBody>
+                  <a:tcPr/>
+                </a:tc>
+                <a:tc>
+                  <a:txBody>
+                    <a:bodyPr/>
+                    <a:lstStyle/>
+                    <a:p>
+                      <a:pPr algn="ctr">
+                        <a:defRPr sz="1800">
+                          <a:solidFill>
+                            <a:srgbClr val="FFFFFF"/>
+                          </a:solidFill>
+                        </a:defRPr>
+                      </a:pPr>
+                      <a:r>
+                        <a:t>4% (4/100)</a:t>
+                      </a:r>
+                    </a:p>
+                  </a:txBody>
+                  <a:tcPr/>
+                </a:tc>
+                <a:tc>
+                  <a:txBody>
+                    <a:bodyPr/>
+                    <a:lstStyle/>
+                    <a:p>
+                      <a:pPr algn="ctr">
+                        <a:defRPr sz="1800">
+                          <a:solidFill>
+                            <a:srgbClr val="FFFFFF"/>
+                          </a:solidFill>
+                        </a:defRPr>
+                      </a:pPr>
+                      <a:r>
+                        <a:t>99~100%</a:t>
+                      </a:r>
+                    </a:p>
+                  </a:txBody>
+                  <a:tcPr/>
+                </a:tc>
+              </a:tr>
+              <a:tr h="640080">
+                <a:tc>
+                  <a:txBody>
+                    <a:bodyPr/>
+                    <a:lstStyle/>
+                    <a:p>
+                      <a:pPr algn="ctr">
+                        <a:defRPr sz="1800">
+                          <a:solidFill>
+                            <a:srgbClr val="FFFFFF"/>
+                          </a:solidFill>
+                        </a:defRPr>
+                      </a:pPr>
+                      <a:r>
+                        <a:t>平均完成步数</a:t>
+                      </a:r>
+                    </a:p>
+                  </a:txBody>
+                  <a:tcPr/>
+                </a:tc>
+                <a:tc>
+                  <a:txBody>
+                    <a:bodyPr/>
+                    <a:lstStyle/>
+                    <a:p>
+                      <a:pPr algn="ctr">
+                        <a:defRPr sz="1800">
+                          <a:solidFill>
+                            <a:srgbClr val="FFFFFF"/>
+                          </a:solidFill>
+                        </a:defRPr>
+                      </a:pPr>
+                      <a:r>
+                        <a:t>50（全部超时）</a:t>
+                      </a:r>
+                    </a:p>
+                  </a:txBody>
+                  <a:tcPr/>
+                </a:tc>
+                <a:tc>
+                  <a:txBody>
+                    <a:bodyPr/>
+                    <a:lstStyle/>
+                    <a:p>
+                      <a:pPr algn="ctr">
+                        <a:defRPr sz="1800">
+                          <a:solidFill>
+                            <a:srgbClr val="FFFFFF"/>
+                          </a:solidFill>
+                        </a:defRPr>
+                      </a:pPr>
+                      <a:r>
+                        <a:t>8.5 步</a:t>
+                      </a:r>
+                    </a:p>
+                  </a:txBody>
+                  <a:tcPr/>
+                </a:tc>
+              </a:tr>
+              <a:tr h="640080">
+                <a:tc>
+                  <a:txBody>
+                    <a:bodyPr/>
+                    <a:lstStyle/>
+                    <a:p>
+                      <a:pPr algn="ctr">
+                        <a:defRPr sz="1800">
+                          <a:solidFill>
+                            <a:srgbClr val="FFFFFF"/>
+                          </a:solidFill>
+                        </a:defRPr>
+                      </a:pPr>
+                      <a:r>
+                        <a:t>最快完成</a:t>
+                      </a:r>
+                    </a:p>
+                  </a:txBody>
+                  <a:tcPr/>
+                </a:tc>
+                <a:tc>
+                  <a:txBody>
+                    <a:bodyPr/>
+                    <a:lstStyle/>
+                    <a:p>
+                      <a:pPr algn="ctr">
+                        <a:defRPr sz="1800">
+                          <a:solidFill>
+                            <a:srgbClr val="FFFFFF"/>
+                          </a:solidFill>
+                        </a:defRPr>
+                      </a:pPr>
+                      <a:r>
+                        <a:t>无一成功</a:t>
+                      </a:r>
+                    </a:p>
+                  </a:txBody>
+                  <a:tcPr/>
+                </a:tc>
+                <a:tc>
+                  <a:txBody>
+                    <a:bodyPr/>
+                    <a:lstStyle/>
+                    <a:p>
+                      <a:pPr algn="ctr">
+                        <a:defRPr sz="1800">
+                          <a:solidFill>
+                            <a:srgbClr val="FFFFFF"/>
+                          </a:solidFill>
+                        </a:defRPr>
+                      </a:pPr>
+                      <a:r>
+                        <a:t>5 步</a:t>
+                      </a:r>
+                    </a:p>
+                  </a:txBody>
+                  <a:tcPr/>
+                </a:tc>
+              </a:tr>
+            </a:tbl>
+          </a:graphicData>
+        </a:graphic>
+      </p:graphicFrame>
     </p:spTree>
   </p:cSld>
   <p:clrMapOvr>
@@ -5695,7 +7027,7 @@
             <a:avLst/>
           </a:prstGeom>
           <a:solidFill>
-            <a:srgbClr val="E86C00"/>
+            <a:srgbClr val="00CC66"/>
           </a:solidFill>
           <a:ln>
             <a:noFill/>
@@ -5731,8 +7063,8 @@
         </p:nvSpPr>
         <p:spPr>
           <a:xfrm>
-            <a:off x="548640" y="274320"/>
-            <a:ext cx="7315200" cy="731520"/>
+            <a:off x="548640" y="137160"/>
+            <a:ext cx="9144000" cy="457200"/>
           </a:xfrm>
           <a:prstGeom prst="rect">
             <a:avLst/>
@@ -5746,196 +7078,21 @@
           <a:lstStyle/>
           <a:p>
             <a:pPr algn="l">
-              <a:defRPr sz="3200" b="1">
-                <a:solidFill>
-                  <a:srgbClr val="E86C00"/>
+              <a:defRPr sz="2600" b="1">
+                <a:solidFill>
+                  <a:srgbClr val="FFFFFF"/>
                 </a:solidFill>
               </a:defRPr>
             </a:pPr>
             <a:r>
-              <a:t>分析：为什么 PPO 不行</a:t>
-            </a:r>
-          </a:p>
-        </p:txBody>
-      </p:sp>
-      <p:sp>
-        <p:nvSpPr>
-          <p:cNvPr id="4" name="TextBox 3"/>
-          <p:cNvSpPr txBox="1"/>
-          <p:nvPr/>
-        </p:nvSpPr>
-        <p:spPr>
-          <a:xfrm>
-            <a:off x="731520" y="1371600"/>
-            <a:ext cx="10058400" cy="457200"/>
-          </a:xfrm>
-          <a:prstGeom prst="rect">
-            <a:avLst/>
-          </a:prstGeom>
-          <a:noFill/>
-        </p:spPr>
-        <p:txBody>
-          <a:bodyPr wrap="square">
-            <a:spAutoFit/>
-          </a:bodyPr>
-          <a:lstStyle/>
-          <a:p>
-            <a:pPr algn="l">
-              <a:defRPr sz="1800" b="0">
-                <a:solidFill>
-                  <a:srgbClr val="CCCCDD"/>
-                </a:solidFill>
-              </a:defRPr>
-            </a:pPr>
-            <a:r>
-              <a:t>▸ On-policy 本质：失败轨迹采集完就丢弃，信息浪费严重</a:t>
-            </a:r>
-          </a:p>
-        </p:txBody>
-      </p:sp>
-      <p:sp>
-        <p:nvSpPr>
-          <p:cNvPr id="5" name="TextBox 4"/>
-          <p:cNvSpPr txBox="1"/>
-          <p:nvPr/>
-        </p:nvSpPr>
-        <p:spPr>
-          <a:xfrm>
-            <a:off x="731520" y="2103120"/>
-            <a:ext cx="10058400" cy="457200"/>
-          </a:xfrm>
-          <a:prstGeom prst="rect">
-            <a:avLst/>
-          </a:prstGeom>
-          <a:noFill/>
-        </p:spPr>
-        <p:txBody>
-          <a:bodyPr wrap="square">
-            <a:spAutoFit/>
-          </a:bodyPr>
-          <a:lstStyle/>
-          <a:p>
-            <a:pPr algn="l">
-              <a:defRPr sz="1800" b="0">
-                <a:solidFill>
-                  <a:srgbClr val="CCCCDD"/>
-                </a:solidFill>
-              </a:defRPr>
-            </a:pPr>
-            <a:r>
-              <a:t>▸ PickAndPlace 是多阶段任务（接近→抓→抬→移→放），每步都可能失败</a:t>
-            </a:r>
-          </a:p>
-        </p:txBody>
-      </p:sp>
-      <p:sp>
-        <p:nvSpPr>
-          <p:cNvPr id="6" name="TextBox 5"/>
-          <p:cNvSpPr txBox="1"/>
-          <p:nvPr/>
-        </p:nvSpPr>
-        <p:spPr>
-          <a:xfrm>
-            <a:off x="731520" y="2834639"/>
-            <a:ext cx="10058400" cy="457200"/>
-          </a:xfrm>
-          <a:prstGeom prst="rect">
-            <a:avLst/>
-          </a:prstGeom>
-          <a:noFill/>
-        </p:spPr>
-        <p:txBody>
-          <a:bodyPr wrap="square">
-            <a:spAutoFit/>
-          </a:bodyPr>
-          <a:lstStyle/>
-          <a:p>
-            <a:pPr algn="l">
-              <a:defRPr sz="1800" b="0">
-                <a:solidFill>
-                  <a:srgbClr val="CCCCDD"/>
-                </a:solidFill>
-              </a:defRPr>
-            </a:pPr>
-            <a:r>
-              <a:t>▸ 单次失败概率高 → 完整成功轨迹极少 → 策略几乎学不到正面信息</a:t>
-            </a:r>
-          </a:p>
-        </p:txBody>
-      </p:sp>
-      <p:sp>
-        <p:nvSpPr>
-          <p:cNvPr id="7" name="TextBox 6"/>
-          <p:cNvSpPr txBox="1"/>
-          <p:nvPr/>
-        </p:nvSpPr>
-        <p:spPr>
-          <a:xfrm>
-            <a:off x="731520" y="3566159"/>
-            <a:ext cx="10058400" cy="457200"/>
-          </a:xfrm>
-          <a:prstGeom prst="rect">
-            <a:avLst/>
-          </a:prstGeom>
-          <a:noFill/>
-        </p:spPr>
-        <p:txBody>
-          <a:bodyPr wrap="square">
-            <a:spAutoFit/>
-          </a:bodyPr>
-          <a:lstStyle/>
-          <a:p>
-            <a:pPr algn="l">
-              <a:defRPr sz="1800" b="0">
-                <a:solidFill>
-                  <a:srgbClr val="CCCCDD"/>
-                </a:solidFill>
-              </a:defRPr>
-            </a:pPr>
-            <a:r>
-              <a:t>▸ 增加训练步数到 2000 万可能有效，但成本过高</a:t>
-            </a:r>
-          </a:p>
-        </p:txBody>
-      </p:sp>
-      <p:sp>
-        <p:nvSpPr>
-          <p:cNvPr id="8" name="TextBox 7"/>
-          <p:cNvSpPr txBox="1"/>
-          <p:nvPr/>
-        </p:nvSpPr>
-        <p:spPr>
-          <a:xfrm>
-            <a:off x="731520" y="4572000"/>
-            <a:ext cx="5486400" cy="457200"/>
-          </a:xfrm>
-          <a:prstGeom prst="rect">
-            <a:avLst/>
-          </a:prstGeom>
-          <a:noFill/>
-        </p:spPr>
-        <p:txBody>
-          <a:bodyPr wrap="square">
-            <a:spAutoFit/>
-          </a:bodyPr>
-          <a:lstStyle/>
-          <a:p>
-            <a:pPr algn="l">
-              <a:defRPr sz="2400" b="1">
-                <a:solidFill>
-                  <a:srgbClr val="E86C00"/>
-                </a:solidFill>
-              </a:defRPr>
-            </a:pPr>
-            <a:r>
-              <a:t>PPO on PickAndPlace：760万步 → 4% 成功率</a:t>
+              <a:t>SAC+HER — 评估曲线 (100 轮测试)</a:t>
             </a:r>
           </a:p>
         </p:txBody>
       </p:sp>
       <p:pic>
         <p:nvPicPr>
-          <p:cNvPr id="9" name="Picture 8" descr="dc398dbe04db115277e63eef7e7bd66f.png"/>
+          <p:cNvPr id="4" name="Picture 3" descr="09bc5469299131d4fc954b1dd36f6d26.png"/>
           <p:cNvPicPr>
             <a:picLocks noChangeAspect="1"/>
           </p:cNvPicPr>
@@ -5949,8 +7106,8 @@
         </p:blipFill>
         <p:spPr>
           <a:xfrm>
-            <a:off x="6858000" y="365759"/>
-            <a:ext cx="4572000" cy="2965458"/>
+            <a:off x="457200" y="822960"/>
+            <a:ext cx="5486400" cy="2017726"/>
           </a:xfrm>
           <a:prstGeom prst="rect">
             <a:avLst/>
@@ -5959,7 +7116,7 @@
       </p:pic>
       <p:pic>
         <p:nvPicPr>
-          <p:cNvPr id="10" name="Picture 9" descr="fc42f661c07dc4f34ce9182b29781a2b.png"/>
+          <p:cNvPr id="5" name="Picture 4" descr="09ebe14fa9615ec77f6585c060862148.png"/>
           <p:cNvPicPr>
             <a:picLocks noChangeAspect="1"/>
           </p:cNvPicPr>
@@ -5973,14 +7130,97 @@
         </p:blipFill>
         <p:spPr>
           <a:xfrm>
-            <a:off x="6858000" y="2011680"/>
-            <a:ext cx="4572000" cy="2883135"/>
+            <a:off x="6217920" y="822960"/>
+            <a:ext cx="5486400" cy="2934299"/>
           </a:xfrm>
           <a:prstGeom prst="rect">
             <a:avLst/>
           </a:prstGeom>
         </p:spPr>
       </p:pic>
+      <p:pic>
+        <p:nvPicPr>
+          <p:cNvPr id="6" name="Picture 5" descr="59d5b45f5efed7c0d6e0c6b5b95b2f3e.png"/>
+          <p:cNvPicPr>
+            <a:picLocks noChangeAspect="1"/>
+          </p:cNvPicPr>
+          <p:nvPr/>
+        </p:nvPicPr>
+        <p:blipFill>
+          <a:blip r:embed="rId4"/>
+          <a:stretch>
+            <a:fillRect/>
+          </a:stretch>
+        </p:blipFill>
+        <p:spPr>
+          <a:xfrm>
+            <a:off x="457200" y="3657600"/>
+            <a:ext cx="5486400" cy="2960422"/>
+          </a:xfrm>
+          <a:prstGeom prst="rect">
+            <a:avLst/>
+          </a:prstGeom>
+        </p:spPr>
+      </p:pic>
+      <p:pic>
+        <p:nvPicPr>
+          <p:cNvPr id="7" name="Picture 6" descr="cbe012e68294c8e1acfb801d606c9fe8.png"/>
+          <p:cNvPicPr>
+            <a:picLocks noChangeAspect="1"/>
+          </p:cNvPicPr>
+          <p:nvPr/>
+        </p:nvPicPr>
+        <p:blipFill>
+          <a:blip r:embed="rId5"/>
+          <a:stretch>
+            <a:fillRect/>
+          </a:stretch>
+        </p:blipFill>
+        <p:spPr>
+          <a:xfrm>
+            <a:off x="6217920" y="3657600"/>
+            <a:ext cx="5486400" cy="2916195"/>
+          </a:xfrm>
+          <a:prstGeom prst="rect">
+            <a:avLst/>
+          </a:prstGeom>
+        </p:spPr>
+      </p:pic>
+      <p:sp>
+        <p:nvSpPr>
+          <p:cNvPr id="8" name="TextBox 7"/>
+          <p:cNvSpPr txBox="1"/>
+          <p:nvPr/>
+        </p:nvSpPr>
+        <p:spPr>
+          <a:xfrm>
+            <a:off x="457200" y="6400800"/>
+            <a:ext cx="10972800" cy="365760"/>
+          </a:xfrm>
+          <a:prstGeom prst="rect">
+            <a:avLst/>
+          </a:prstGeom>
+          <a:noFill/>
+        </p:spPr>
+        <p:txBody>
+          <a:bodyPr wrap="square">
+            <a:spAutoFit/>
+          </a:bodyPr>
+          <a:lstStyle/>
+          <a:p>
+            <a:pPr algn="ctr">
+              <a:defRPr sz="1500" b="0">
+                <a:solidFill>
+                  <a:srgbClr val="8888AA"/>
+                </a:solidFill>
+              </a:defRPr>
+            </a:pPr>
+            <a:r>
+              <a:t>100 轮评估：成功率 100%，平均 8.5 步完成，5 步即可成功</a:t>
+            </a:r>
+          </a:p>
+        </p:txBody>
+      </p:sp>
     </p:spTree>
   </p:cSld>
   <p:clrMapOvr>
@@ -6022,7 +7262,7 @@
             <a:avLst/>
           </a:prstGeom>
           <a:solidFill>
-            <a:srgbClr val="00CC66"/>
+            <a:srgbClr val="E86C00"/>
           </a:solidFill>
           <a:ln>
             <a:noFill/>
@@ -6059,7 +7299,7 @@
         <p:spPr>
           <a:xfrm>
             <a:off x="548640" y="274320"/>
-            <a:ext cx="7315200" cy="731520"/>
+            <a:ext cx="9144000" cy="640080"/>
           </a:xfrm>
           <a:prstGeom prst="rect">
             <a:avLst/>
@@ -6073,28 +7313,114 @@
           <a:lstStyle/>
           <a:p>
             <a:pPr algn="l">
-              <a:defRPr sz="3200" b="1">
-                <a:solidFill>
-                  <a:srgbClr val="00CC66"/>
+              <a:defRPr sz="2800" b="1">
+                <a:solidFill>
+                  <a:srgbClr val="FFFFFF"/>
                 </a:solidFill>
               </a:defRPr>
             </a:pPr>
             <a:r>
-              <a:t>分析：为什么 SAC+HER 行</a:t>
-            </a:r>
-          </a:p>
-        </p:txBody>
-      </p:sp>
-      <p:sp>
-        <p:nvSpPr>
-          <p:cNvPr id="4" name="TextBox 3"/>
+              <a:t>PPO 为什么在 PickAndPlace 上失败？</a:t>
+            </a:r>
+          </a:p>
+        </p:txBody>
+      </p:sp>
+      <p:sp>
+        <p:nvSpPr>
+          <p:cNvPr id="4" name="Rectangle 3"/>
+          <p:cNvSpPr/>
+          <p:nvPr/>
+        </p:nvSpPr>
+        <p:spPr>
+          <a:xfrm>
+            <a:off x="548640" y="1097280"/>
+            <a:ext cx="109728" cy="914400"/>
+          </a:xfrm>
+          <a:prstGeom prst="rect">
+            <a:avLst/>
+          </a:prstGeom>
+          <a:solidFill>
+            <a:srgbClr val="E86C00"/>
+          </a:solidFill>
+          <a:ln>
+            <a:noFill/>
+          </a:ln>
+        </p:spPr>
+        <p:style>
+          <a:lnRef idx="1">
+            <a:schemeClr val="accent1"/>
+          </a:lnRef>
+          <a:fillRef idx="3">
+            <a:schemeClr val="accent1"/>
+          </a:fillRef>
+          <a:effectRef idx="2">
+            <a:schemeClr val="accent1"/>
+          </a:effectRef>
+          <a:fontRef idx="minor">
+            <a:schemeClr val="lt1"/>
+          </a:fontRef>
+        </p:style>
+        <p:txBody>
+          <a:bodyPr rtlCol="0" anchor="ctr"/>
+          <a:lstStyle/>
+          <a:p>
+            <a:pPr algn="ctr"/>
+          </a:p>
+        </p:txBody>
+      </p:sp>
+      <p:sp>
+        <p:nvSpPr>
+          <p:cNvPr id="5" name="Rectangle 4"/>
+          <p:cNvSpPr/>
+          <p:nvPr/>
+        </p:nvSpPr>
+        <p:spPr>
+          <a:xfrm>
+            <a:off x="914400" y="1097280"/>
+            <a:ext cx="10515600" cy="914400"/>
+          </a:xfrm>
+          <a:prstGeom prst="rect">
+            <a:avLst/>
+          </a:prstGeom>
+          <a:solidFill>
+            <a:srgbClr val="252540"/>
+          </a:solidFill>
+          <a:ln>
+            <a:noFill/>
+          </a:ln>
+        </p:spPr>
+        <p:style>
+          <a:lnRef idx="1">
+            <a:schemeClr val="accent1"/>
+          </a:lnRef>
+          <a:fillRef idx="3">
+            <a:schemeClr val="accent1"/>
+          </a:fillRef>
+          <a:effectRef idx="2">
+            <a:schemeClr val="accent1"/>
+          </a:effectRef>
+          <a:fontRef idx="minor">
+            <a:schemeClr val="lt1"/>
+          </a:fontRef>
+        </p:style>
+        <p:txBody>
+          <a:bodyPr rtlCol="0" anchor="ctr"/>
+          <a:lstStyle/>
+          <a:p>
+            <a:pPr algn="ctr"/>
+          </a:p>
+        </p:txBody>
+      </p:sp>
+      <p:sp>
+        <p:nvSpPr>
+          <p:cNvPr id="6" name="TextBox 5"/>
           <p:cNvSpPr txBox="1"/>
           <p:nvPr/>
         </p:nvSpPr>
         <p:spPr>
           <a:xfrm>
-            <a:off x="731520" y="1371600"/>
-            <a:ext cx="10058400" cy="457200"/>
+            <a:off x="1188720" y="1143000"/>
+            <a:ext cx="9144000" cy="365760"/>
           </a:xfrm>
           <a:prstGeom prst="rect">
             <a:avLst/>
@@ -6108,28 +7434,28 @@
           <a:lstStyle/>
           <a:p>
             <a:pPr algn="l">
-              <a:defRPr sz="1800" b="0">
-                <a:solidFill>
-                  <a:srgbClr val="CCCCDD"/>
+              <a:defRPr sz="2000" b="1">
+                <a:solidFill>
+                  <a:srgbClr val="E86C00"/>
                 </a:solidFill>
               </a:defRPr>
             </a:pPr>
             <a:r>
-              <a:t>▸ SAC 的 replay buffer 存下所有历史轨迹，反复回放学习</a:t>
-            </a:r>
-          </a:p>
-        </p:txBody>
-      </p:sp>
-      <p:sp>
-        <p:nvSpPr>
-          <p:cNvPr id="5" name="TextBox 4"/>
+              <a:t>On-policy 本质</a:t>
+            </a:r>
+          </a:p>
+        </p:txBody>
+      </p:sp>
+      <p:sp>
+        <p:nvSpPr>
+          <p:cNvPr id="7" name="TextBox 6"/>
           <p:cNvSpPr txBox="1"/>
           <p:nvPr/>
         </p:nvSpPr>
         <p:spPr>
           <a:xfrm>
-            <a:off x="731520" y="2103120"/>
-            <a:ext cx="10058400" cy="457200"/>
+            <a:off x="1188720" y="1508760"/>
+            <a:ext cx="9601200" cy="457200"/>
           </a:xfrm>
           <a:prstGeom prst="rect">
             <a:avLst/>
@@ -6143,28 +7469,114 @@
           <a:lstStyle/>
           <a:p>
             <a:pPr algn="l">
-              <a:defRPr sz="1800" b="0">
+              <a:defRPr sz="1500" b="0">
                 <a:solidFill>
                   <a:srgbClr val="CCCCDD"/>
                 </a:solidFill>
               </a:defRPr>
             </a:pPr>
             <a:r>
-              <a:t>▸ HER 将失败轨迹重新解释为目标接近样本，变废为宝</a:t>
-            </a:r>
-          </a:p>
-        </p:txBody>
-      </p:sp>
-      <p:sp>
-        <p:nvSpPr>
-          <p:cNvPr id="6" name="TextBox 5"/>
+              <a:t>失败轨迹采集完就丢弃，无法反复利用。与 off-policy 不同，PPO 没有持久化的 replay buffer</a:t>
+            </a:r>
+          </a:p>
+        </p:txBody>
+      </p:sp>
+      <p:sp>
+        <p:nvSpPr>
+          <p:cNvPr id="8" name="Rectangle 7"/>
+          <p:cNvSpPr/>
+          <p:nvPr/>
+        </p:nvSpPr>
+        <p:spPr>
+          <a:xfrm>
+            <a:off x="548640" y="2377439"/>
+            <a:ext cx="109728" cy="914400"/>
+          </a:xfrm>
+          <a:prstGeom prst="rect">
+            <a:avLst/>
+          </a:prstGeom>
+          <a:solidFill>
+            <a:srgbClr val="E86C00"/>
+          </a:solidFill>
+          <a:ln>
+            <a:noFill/>
+          </a:ln>
+        </p:spPr>
+        <p:style>
+          <a:lnRef idx="1">
+            <a:schemeClr val="accent1"/>
+          </a:lnRef>
+          <a:fillRef idx="3">
+            <a:schemeClr val="accent1"/>
+          </a:fillRef>
+          <a:effectRef idx="2">
+            <a:schemeClr val="accent1"/>
+          </a:effectRef>
+          <a:fontRef idx="minor">
+            <a:schemeClr val="lt1"/>
+          </a:fontRef>
+        </p:style>
+        <p:txBody>
+          <a:bodyPr rtlCol="0" anchor="ctr"/>
+          <a:lstStyle/>
+          <a:p>
+            <a:pPr algn="ctr"/>
+          </a:p>
+        </p:txBody>
+      </p:sp>
+      <p:sp>
+        <p:nvSpPr>
+          <p:cNvPr id="9" name="Rectangle 8"/>
+          <p:cNvSpPr/>
+          <p:nvPr/>
+        </p:nvSpPr>
+        <p:spPr>
+          <a:xfrm>
+            <a:off x="914400" y="2377439"/>
+            <a:ext cx="10515600" cy="914400"/>
+          </a:xfrm>
+          <a:prstGeom prst="rect">
+            <a:avLst/>
+          </a:prstGeom>
+          <a:solidFill>
+            <a:srgbClr val="252540"/>
+          </a:solidFill>
+          <a:ln>
+            <a:noFill/>
+          </a:ln>
+        </p:spPr>
+        <p:style>
+          <a:lnRef idx="1">
+            <a:schemeClr val="accent1"/>
+          </a:lnRef>
+          <a:fillRef idx="3">
+            <a:schemeClr val="accent1"/>
+          </a:fillRef>
+          <a:effectRef idx="2">
+            <a:schemeClr val="accent1"/>
+          </a:effectRef>
+          <a:fontRef idx="minor">
+            <a:schemeClr val="lt1"/>
+          </a:fontRef>
+        </p:style>
+        <p:txBody>
+          <a:bodyPr rtlCol="0" anchor="ctr"/>
+          <a:lstStyle/>
+          <a:p>
+            <a:pPr algn="ctr"/>
+          </a:p>
+        </p:txBody>
+      </p:sp>
+      <p:sp>
+        <p:nvSpPr>
+          <p:cNvPr id="10" name="TextBox 9"/>
           <p:cNvSpPr txBox="1"/>
           <p:nvPr/>
         </p:nvSpPr>
         <p:spPr>
           <a:xfrm>
-            <a:off x="731520" y="2834639"/>
-            <a:ext cx="10058400" cy="457200"/>
+            <a:off x="1188720" y="2423159"/>
+            <a:ext cx="9144000" cy="365760"/>
           </a:xfrm>
           <a:prstGeom prst="rect">
             <a:avLst/>
@@ -6178,28 +7590,28 @@
           <a:lstStyle/>
           <a:p>
             <a:pPr algn="l">
-              <a:defRPr sz="1800" b="0">
-                <a:solidFill>
-                  <a:srgbClr val="CCCCDD"/>
+              <a:defRPr sz="2000" b="1">
+                <a:solidFill>
+                  <a:srgbClr val="E86C00"/>
                 </a:solidFill>
               </a:defRPr>
             </a:pPr>
             <a:r>
-              <a:t>▸ 40 万步即达 87% 成功率，100 万步 99%~100%</a:t>
-            </a:r>
-          </a:p>
-        </p:txBody>
-      </p:sp>
-      <p:sp>
-        <p:nvSpPr>
-          <p:cNvPr id="7" name="TextBox 6"/>
+              <a:t>多阶段任务的困境</a:t>
+            </a:r>
+          </a:p>
+        </p:txBody>
+      </p:sp>
+      <p:sp>
+        <p:nvSpPr>
+          <p:cNvPr id="11" name="TextBox 10"/>
           <p:cNvSpPr txBox="1"/>
           <p:nvPr/>
         </p:nvSpPr>
         <p:spPr>
           <a:xfrm>
-            <a:off x="731520" y="3566159"/>
-            <a:ext cx="10058400" cy="457200"/>
+            <a:off x="1188720" y="2788920"/>
+            <a:ext cx="9601200" cy="457200"/>
           </a:xfrm>
           <a:prstGeom prst="rect">
             <a:avLst/>
@@ -6213,28 +7625,114 @@
           <a:lstStyle/>
           <a:p>
             <a:pPr algn="l">
-              <a:defRPr sz="1800" b="0">
+              <a:defRPr sz="1500" b="0">
                 <a:solidFill>
                   <a:srgbClr val="CCCCDD"/>
                 </a:solidFill>
               </a:defRPr>
             </a:pPr>
             <a:r>
-              <a:t>▸ 样本效率远超 PPO：约 1/10 步数达到远超 PPO 的效果</a:t>
-            </a:r>
-          </a:p>
-        </p:txBody>
-      </p:sp>
-      <p:sp>
-        <p:nvSpPr>
-          <p:cNvPr id="8" name="TextBox 7"/>
+              <a:t>接近→抓→抬→移→放，5 个环节每步都可能失败，整体成功率=各环节成功率乘积</a:t>
+            </a:r>
+          </a:p>
+        </p:txBody>
+      </p:sp>
+      <p:sp>
+        <p:nvSpPr>
+          <p:cNvPr id="12" name="Rectangle 11"/>
+          <p:cNvSpPr/>
+          <p:nvPr/>
+        </p:nvSpPr>
+        <p:spPr>
+          <a:xfrm>
+            <a:off x="548640" y="3657600"/>
+            <a:ext cx="109728" cy="914400"/>
+          </a:xfrm>
+          <a:prstGeom prst="rect">
+            <a:avLst/>
+          </a:prstGeom>
+          <a:solidFill>
+            <a:srgbClr val="E86C00"/>
+          </a:solidFill>
+          <a:ln>
+            <a:noFill/>
+          </a:ln>
+        </p:spPr>
+        <p:style>
+          <a:lnRef idx="1">
+            <a:schemeClr val="accent1"/>
+          </a:lnRef>
+          <a:fillRef idx="3">
+            <a:schemeClr val="accent1"/>
+          </a:fillRef>
+          <a:effectRef idx="2">
+            <a:schemeClr val="accent1"/>
+          </a:effectRef>
+          <a:fontRef idx="minor">
+            <a:schemeClr val="lt1"/>
+          </a:fontRef>
+        </p:style>
+        <p:txBody>
+          <a:bodyPr rtlCol="0" anchor="ctr"/>
+          <a:lstStyle/>
+          <a:p>
+            <a:pPr algn="ctr"/>
+          </a:p>
+        </p:txBody>
+      </p:sp>
+      <p:sp>
+        <p:nvSpPr>
+          <p:cNvPr id="13" name="Rectangle 12"/>
+          <p:cNvSpPr/>
+          <p:nvPr/>
+        </p:nvSpPr>
+        <p:spPr>
+          <a:xfrm>
+            <a:off x="914400" y="3657600"/>
+            <a:ext cx="10515600" cy="914400"/>
+          </a:xfrm>
+          <a:prstGeom prst="rect">
+            <a:avLst/>
+          </a:prstGeom>
+          <a:solidFill>
+            <a:srgbClr val="252540"/>
+          </a:solidFill>
+          <a:ln>
+            <a:noFill/>
+          </a:ln>
+        </p:spPr>
+        <p:style>
+          <a:lnRef idx="1">
+            <a:schemeClr val="accent1"/>
+          </a:lnRef>
+          <a:fillRef idx="3">
+            <a:schemeClr val="accent1"/>
+          </a:fillRef>
+          <a:effectRef idx="2">
+            <a:schemeClr val="accent1"/>
+          </a:effectRef>
+          <a:fontRef idx="minor">
+            <a:schemeClr val="lt1"/>
+          </a:fontRef>
+        </p:style>
+        <p:txBody>
+          <a:bodyPr rtlCol="0" anchor="ctr"/>
+          <a:lstStyle/>
+          <a:p>
+            <a:pPr algn="ctr"/>
+          </a:p>
+        </p:txBody>
+      </p:sp>
+      <p:sp>
+        <p:nvSpPr>
+          <p:cNvPr id="14" name="TextBox 13"/>
           <p:cNvSpPr txBox="1"/>
           <p:nvPr/>
         </p:nvSpPr>
         <p:spPr>
           <a:xfrm>
-            <a:off x="731520" y="4572000"/>
-            <a:ext cx="7315200" cy="457200"/>
+            <a:off x="1188720" y="3703320"/>
+            <a:ext cx="9144000" cy="365760"/>
           </a:xfrm>
           <a:prstGeom prst="rect">
             <a:avLst/>
@@ -6248,114 +7746,209 @@
           <a:lstStyle/>
           <a:p>
             <a:pPr algn="l">
-              <a:defRPr sz="2400" b="1">
-                <a:solidFill>
-                  <a:srgbClr val="00CC66"/>
+              <a:defRPr sz="2000" b="1">
+                <a:solidFill>
+                  <a:srgbClr val="E86C00"/>
                 </a:solidFill>
               </a:defRPr>
             </a:pPr>
             <a:r>
-              <a:t>SAC+HER on PickAndPlace：100万步 → 99% 成功率</a:t>
-            </a:r>
-          </a:p>
-        </p:txBody>
-      </p:sp>
-      <p:pic>
-        <p:nvPicPr>
-          <p:cNvPr id="9" name="Picture 8" descr="09bc5469299131d4fc954b1dd36f6d26.png"/>
-          <p:cNvPicPr>
-            <a:picLocks noChangeAspect="1"/>
-          </p:cNvPicPr>
-          <p:nvPr/>
-        </p:nvPicPr>
-        <p:blipFill>
-          <a:blip r:embed="rId2"/>
-          <a:stretch>
-            <a:fillRect/>
-          </a:stretch>
-        </p:blipFill>
-        <p:spPr>
-          <a:xfrm>
-            <a:off x="6858000" y="3657600"/>
-            <a:ext cx="2377440" cy="874348"/>
-          </a:xfrm>
-          <a:prstGeom prst="rect">
-            <a:avLst/>
-          </a:prstGeom>
-        </p:spPr>
-      </p:pic>
-      <p:pic>
-        <p:nvPicPr>
-          <p:cNvPr id="10" name="Picture 9" descr="09ebe14fa9615ec77f6585c060862148.png"/>
-          <p:cNvPicPr>
-            <a:picLocks noChangeAspect="1"/>
-          </p:cNvPicPr>
-          <p:nvPr/>
-        </p:nvPicPr>
-        <p:blipFill>
-          <a:blip r:embed="rId3"/>
-          <a:stretch>
-            <a:fillRect/>
-          </a:stretch>
-        </p:blipFill>
-        <p:spPr>
-          <a:xfrm>
-            <a:off x="9418320" y="3657600"/>
-            <a:ext cx="2377440" cy="1271530"/>
-          </a:xfrm>
-          <a:prstGeom prst="rect">
-            <a:avLst/>
-          </a:prstGeom>
-        </p:spPr>
-      </p:pic>
-      <p:pic>
-        <p:nvPicPr>
-          <p:cNvPr id="11" name="Picture 10" descr="59d5b45f5efed7c0d6e0c6b5b95b2f3e.png"/>
-          <p:cNvPicPr>
-            <a:picLocks noChangeAspect="1"/>
-          </p:cNvPicPr>
-          <p:nvPr/>
-        </p:nvPicPr>
-        <p:blipFill>
-          <a:blip r:embed="rId4"/>
-          <a:stretch>
-            <a:fillRect/>
-          </a:stretch>
-        </p:blipFill>
-        <p:spPr>
-          <a:xfrm>
-            <a:off x="6858000" y="5120640"/>
-            <a:ext cx="2377440" cy="1282849"/>
-          </a:xfrm>
-          <a:prstGeom prst="rect">
-            <a:avLst/>
-          </a:prstGeom>
-        </p:spPr>
-      </p:pic>
-      <p:pic>
-        <p:nvPicPr>
-          <p:cNvPr id="12" name="Picture 11" descr="cbe012e68294c8e1acfb801d606c9fe8.png"/>
-          <p:cNvPicPr>
-            <a:picLocks noChangeAspect="1"/>
-          </p:cNvPicPr>
-          <p:nvPr/>
-        </p:nvPicPr>
-        <p:blipFill>
-          <a:blip r:embed="rId5"/>
-          <a:stretch>
-            <a:fillRect/>
-          </a:stretch>
-        </p:blipFill>
-        <p:spPr>
-          <a:xfrm>
-            <a:off x="9418320" y="5120640"/>
-            <a:ext cx="2377440" cy="1263684"/>
-          </a:xfrm>
-          <a:prstGeom prst="rect">
-            <a:avLst/>
-          </a:prstGeom>
-        </p:spPr>
-      </p:pic>
+              <a:t>稀疏正面信号</a:t>
+            </a:r>
+          </a:p>
+        </p:txBody>
+      </p:sp>
+      <p:sp>
+        <p:nvSpPr>
+          <p:cNvPr id="15" name="TextBox 14"/>
+          <p:cNvSpPr txBox="1"/>
+          <p:nvPr/>
+        </p:nvSpPr>
+        <p:spPr>
+          <a:xfrm>
+            <a:off x="1188720" y="4069080"/>
+            <a:ext cx="9601200" cy="457200"/>
+          </a:xfrm>
+          <a:prstGeom prst="rect">
+            <a:avLst/>
+          </a:prstGeom>
+          <a:noFill/>
+        </p:spPr>
+        <p:txBody>
+          <a:bodyPr wrap="square">
+            <a:spAutoFit/>
+          </a:bodyPr>
+          <a:lstStyle/>
+          <a:p>
+            <a:pPr algn="l">
+              <a:defRPr sz="1500" b="0">
+                <a:solidFill>
+                  <a:srgbClr val="CCCCDD"/>
+                </a:solidFill>
+              </a:defRPr>
+            </a:pPr>
+            <a:r>
+              <a:t>在 760 万步训练中，完整成功的轨迹极少，策略几乎学不到"怎么做才对"</a:t>
+            </a:r>
+          </a:p>
+        </p:txBody>
+      </p:sp>
+      <p:sp>
+        <p:nvSpPr>
+          <p:cNvPr id="16" name="Rectangle 15"/>
+          <p:cNvSpPr/>
+          <p:nvPr/>
+        </p:nvSpPr>
+        <p:spPr>
+          <a:xfrm>
+            <a:off x="548640" y="4937759"/>
+            <a:ext cx="109728" cy="914400"/>
+          </a:xfrm>
+          <a:prstGeom prst="rect">
+            <a:avLst/>
+          </a:prstGeom>
+          <a:solidFill>
+            <a:srgbClr val="E86C00"/>
+          </a:solidFill>
+          <a:ln>
+            <a:noFill/>
+          </a:ln>
+        </p:spPr>
+        <p:style>
+          <a:lnRef idx="1">
+            <a:schemeClr val="accent1"/>
+          </a:lnRef>
+          <a:fillRef idx="3">
+            <a:schemeClr val="accent1"/>
+          </a:fillRef>
+          <a:effectRef idx="2">
+            <a:schemeClr val="accent1"/>
+          </a:effectRef>
+          <a:fontRef idx="minor">
+            <a:schemeClr val="lt1"/>
+          </a:fontRef>
+        </p:style>
+        <p:txBody>
+          <a:bodyPr rtlCol="0" anchor="ctr"/>
+          <a:lstStyle/>
+          <a:p>
+            <a:pPr algn="ctr"/>
+          </a:p>
+        </p:txBody>
+      </p:sp>
+      <p:sp>
+        <p:nvSpPr>
+          <p:cNvPr id="17" name="Rectangle 16"/>
+          <p:cNvSpPr/>
+          <p:nvPr/>
+        </p:nvSpPr>
+        <p:spPr>
+          <a:xfrm>
+            <a:off x="914400" y="4937759"/>
+            <a:ext cx="10515600" cy="914400"/>
+          </a:xfrm>
+          <a:prstGeom prst="rect">
+            <a:avLst/>
+          </a:prstGeom>
+          <a:solidFill>
+            <a:srgbClr val="252540"/>
+          </a:solidFill>
+          <a:ln>
+            <a:noFill/>
+          </a:ln>
+        </p:spPr>
+        <p:style>
+          <a:lnRef idx="1">
+            <a:schemeClr val="accent1"/>
+          </a:lnRef>
+          <a:fillRef idx="3">
+            <a:schemeClr val="accent1"/>
+          </a:fillRef>
+          <a:effectRef idx="2">
+            <a:schemeClr val="accent1"/>
+          </a:effectRef>
+          <a:fontRef idx="minor">
+            <a:schemeClr val="lt1"/>
+          </a:fontRef>
+        </p:style>
+        <p:txBody>
+          <a:bodyPr rtlCol="0" anchor="ctr"/>
+          <a:lstStyle/>
+          <a:p>
+            <a:pPr algn="ctr"/>
+          </a:p>
+        </p:txBody>
+      </p:sp>
+      <p:sp>
+        <p:nvSpPr>
+          <p:cNvPr id="18" name="TextBox 17"/>
+          <p:cNvSpPr txBox="1"/>
+          <p:nvPr/>
+        </p:nvSpPr>
+        <p:spPr>
+          <a:xfrm>
+            <a:off x="1188720" y="4983479"/>
+            <a:ext cx="9144000" cy="365760"/>
+          </a:xfrm>
+          <a:prstGeom prst="rect">
+            <a:avLst/>
+          </a:prstGeom>
+          <a:noFill/>
+        </p:spPr>
+        <p:txBody>
+          <a:bodyPr wrap="square">
+            <a:spAutoFit/>
+          </a:bodyPr>
+          <a:lstStyle/>
+          <a:p>
+            <a:pPr algn="l">
+              <a:defRPr sz="2000" b="1">
+                <a:solidFill>
+                  <a:srgbClr val="E86C00"/>
+                </a:solidFill>
+              </a:defRPr>
+            </a:pPr>
+            <a:r>
+              <a:t>结论</a:t>
+            </a:r>
+          </a:p>
+        </p:txBody>
+      </p:sp>
+      <p:sp>
+        <p:nvSpPr>
+          <p:cNvPr id="19" name="TextBox 18"/>
+          <p:cNvSpPr txBox="1"/>
+          <p:nvPr/>
+        </p:nvSpPr>
+        <p:spPr>
+          <a:xfrm>
+            <a:off x="1188720" y="5349240"/>
+            <a:ext cx="9601200" cy="457200"/>
+          </a:xfrm>
+          <a:prstGeom prst="rect">
+            <a:avLst/>
+          </a:prstGeom>
+          <a:noFill/>
+        </p:spPr>
+        <p:txBody>
+          <a:bodyPr wrap="square">
+            <a:spAutoFit/>
+          </a:bodyPr>
+          <a:lstStyle/>
+          <a:p>
+            <a:pPr algn="l">
+              <a:defRPr sz="1500" b="0">
+                <a:solidFill>
+                  <a:srgbClr val="CCCCDD"/>
+                </a:solidFill>
+              </a:defRPr>
+            </a:pPr>
+            <a:r>
+              <a:t>PPO 理论上可能学会，但需要 5000 万步以上，代价远超实际需求</a:t>
+            </a:r>
+          </a:p>
+        </p:txBody>
+      </p:sp>
     </p:spTree>
   </p:cSld>
   <p:clrMapOvr>
@@ -6397,7 +7990,7 @@
             <a:avLst/>
           </a:prstGeom>
           <a:solidFill>
-            <a:srgbClr val="FFD700"/>
+            <a:srgbClr val="E86C00"/>
           </a:solidFill>
           <a:ln>
             <a:noFill/>
@@ -6433,8 +8026,8 @@
         </p:nvSpPr>
         <p:spPr>
           <a:xfrm>
-            <a:off x="548640" y="274320"/>
-            <a:ext cx="4572000" cy="731520"/>
+            <a:off x="548640" y="137160"/>
+            <a:ext cx="9144000" cy="457200"/>
           </a:xfrm>
           <a:prstGeom prst="rect">
             <a:avLst/>
@@ -6448,71 +8041,124 @@
           <a:lstStyle/>
           <a:p>
             <a:pPr algn="l">
-              <a:defRPr sz="3200" b="1">
-                <a:solidFill>
-                  <a:srgbClr val="FFD700"/>
+              <a:defRPr sz="2600" b="1">
+                <a:solidFill>
+                  <a:srgbClr val="FFFFFF"/>
                 </a:solidFill>
               </a:defRPr>
             </a:pPr>
             <a:r>
-              <a:t>总结</a:t>
-            </a:r>
-          </a:p>
-        </p:txBody>
-      </p:sp>
-      <p:sp>
-        <p:nvSpPr>
-          <p:cNvPr id="4" name="Rectangle 3"/>
-          <p:cNvSpPr/>
-          <p:nvPr/>
-        </p:nvSpPr>
-        <p:spPr>
-          <a:xfrm>
-            <a:off x="548640" y="1188720"/>
-            <a:ext cx="109728" cy="548640"/>
-          </a:xfrm>
-          <a:prstGeom prst="rect">
-            <a:avLst/>
-          </a:prstGeom>
-          <a:solidFill>
-            <a:srgbClr val="E86C00"/>
-          </a:solidFill>
-          <a:ln>
-            <a:noFill/>
-          </a:ln>
-        </p:spPr>
-        <p:style>
-          <a:lnRef idx="1">
-            <a:schemeClr val="accent1"/>
-          </a:lnRef>
-          <a:fillRef idx="3">
-            <a:schemeClr val="accent1"/>
-          </a:fillRef>
-          <a:effectRef idx="2">
-            <a:schemeClr val="accent1"/>
-          </a:effectRef>
-          <a:fontRef idx="minor">
-            <a:schemeClr val="lt1"/>
-          </a:fontRef>
-        </p:style>
-        <p:txBody>
-          <a:bodyPr rtlCol="0" anchor="ctr"/>
-          <a:lstStyle/>
-          <a:p>
-            <a:pPr algn="ctr"/>
-          </a:p>
-        </p:txBody>
-      </p:sp>
-      <p:sp>
-        <p:nvSpPr>
-          <p:cNvPr id="5" name="TextBox 4"/>
+              <a:t>PPO — PandaPickAndPlace 训练曲线</a:t>
+            </a:r>
+          </a:p>
+        </p:txBody>
+      </p:sp>
+      <p:pic>
+        <p:nvPicPr>
+          <p:cNvPr id="4" name="Picture 3" descr="8690929472d650ef4562661878cdc4ec.png"/>
+          <p:cNvPicPr>
+            <a:picLocks noChangeAspect="1"/>
+          </p:cNvPicPr>
+          <p:nvPr/>
+        </p:nvPicPr>
+        <p:blipFill>
+          <a:blip r:embed="rId2"/>
+          <a:stretch>
+            <a:fillRect/>
+          </a:stretch>
+        </p:blipFill>
+        <p:spPr>
+          <a:xfrm>
+            <a:off x="457200" y="822960"/>
+            <a:ext cx="5669280" cy="1745112"/>
+          </a:xfrm>
+          <a:prstGeom prst="rect">
+            <a:avLst/>
+          </a:prstGeom>
+        </p:spPr>
+      </p:pic>
+      <p:pic>
+        <p:nvPicPr>
+          <p:cNvPr id="5" name="Picture 4" descr="b861f2f26ef619bfd02dcb2d180747cf.png"/>
+          <p:cNvPicPr>
+            <a:picLocks noChangeAspect="1"/>
+          </p:cNvPicPr>
+          <p:nvPr/>
+        </p:nvPicPr>
+        <p:blipFill>
+          <a:blip r:embed="rId3"/>
+          <a:stretch>
+            <a:fillRect/>
+          </a:stretch>
+        </p:blipFill>
+        <p:spPr>
+          <a:xfrm>
+            <a:off x="6126480" y="822960"/>
+            <a:ext cx="5669280" cy="3657085"/>
+          </a:xfrm>
+          <a:prstGeom prst="rect">
+            <a:avLst/>
+          </a:prstGeom>
+        </p:spPr>
+      </p:pic>
+      <p:pic>
+        <p:nvPicPr>
+          <p:cNvPr id="6" name="Picture 5" descr="dc398dbe04db115277e63eef7e7bd66f.png"/>
+          <p:cNvPicPr>
+            <a:picLocks noChangeAspect="1"/>
+          </p:cNvPicPr>
+          <p:nvPr/>
+        </p:nvPicPr>
+        <p:blipFill>
+          <a:blip r:embed="rId4"/>
+          <a:stretch>
+            <a:fillRect/>
+          </a:stretch>
+        </p:blipFill>
+        <p:spPr>
+          <a:xfrm>
+            <a:off x="457200" y="3657600"/>
+            <a:ext cx="5669280" cy="3677168"/>
+          </a:xfrm>
+          <a:prstGeom prst="rect">
+            <a:avLst/>
+          </a:prstGeom>
+        </p:spPr>
+      </p:pic>
+      <p:pic>
+        <p:nvPicPr>
+          <p:cNvPr id="7" name="Picture 6" descr="fc42f661c07dc4f34ce9182b29781a2b.png"/>
+          <p:cNvPicPr>
+            <a:picLocks noChangeAspect="1"/>
+          </p:cNvPicPr>
+          <p:nvPr/>
+        </p:nvPicPr>
+        <p:blipFill>
+          <a:blip r:embed="rId5"/>
+          <a:stretch>
+            <a:fillRect/>
+          </a:stretch>
+        </p:blipFill>
+        <p:spPr>
+          <a:xfrm>
+            <a:off x="6126480" y="3657600"/>
+            <a:ext cx="5669280" cy="3575087"/>
+          </a:xfrm>
+          <a:prstGeom prst="rect">
+            <a:avLst/>
+          </a:prstGeom>
+        </p:spPr>
+      </p:pic>
+      <p:sp>
+        <p:nvSpPr>
+          <p:cNvPr id="8" name="TextBox 7"/>
           <p:cNvSpPr txBox="1"/>
           <p:nvPr/>
         </p:nvSpPr>
         <p:spPr>
           <a:xfrm>
-            <a:off x="914400" y="1188720"/>
-            <a:ext cx="3657600" cy="457200"/>
+            <a:off x="457200" y="6400800"/>
+            <a:ext cx="10972800" cy="365760"/>
           </a:xfrm>
           <a:prstGeom prst="rect">
             <a:avLst/>
@@ -6525,366 +8171,15 @@
           </a:bodyPr>
           <a:lstStyle/>
           <a:p>
-            <a:pPr algn="l">
-              <a:defRPr sz="2200" b="1">
-                <a:solidFill>
-                  <a:srgbClr val="E86C00"/>
+            <a:pPr algn="ctr">
+              <a:defRPr sz="1500" b="0">
+                <a:solidFill>
+                  <a:srgbClr val="8888AA"/>
                 </a:solidFill>
               </a:defRPr>
             </a:pPr>
             <a:r>
-              <a:t>PPO</a:t>
-            </a:r>
-          </a:p>
-        </p:txBody>
-      </p:sp>
-      <p:sp>
-        <p:nvSpPr>
-          <p:cNvPr id="6" name="TextBox 5"/>
-          <p:cNvSpPr txBox="1"/>
-          <p:nvPr/>
-        </p:nvSpPr>
-        <p:spPr>
-          <a:xfrm>
-            <a:off x="914400" y="1691640"/>
-            <a:ext cx="10058400" cy="731520"/>
-          </a:xfrm>
-          <a:prstGeom prst="rect">
-            <a:avLst/>
-          </a:prstGeom>
-          <a:noFill/>
-        </p:spPr>
-        <p:txBody>
-          <a:bodyPr wrap="square">
-            <a:spAutoFit/>
-          </a:bodyPr>
-          <a:lstStyle/>
-          <a:p>
-            <a:pPr algn="l">
-              <a:defRPr sz="1600" b="0">
-                <a:solidFill>
-                  <a:srgbClr val="CCCCDD"/>
-                </a:solidFill>
-              </a:defRPr>
-            </a:pPr>
-            <a:r>
-              <a:t>适合简单单阶段任务（如 Reach），稳定可控</a:t>
-            </a:r>
-            <a:br/>
-            <a:r>
-              <a:t>在多阶段复杂任务上样本效率严重不足</a:t>
-            </a:r>
-          </a:p>
-        </p:txBody>
-      </p:sp>
-      <p:sp>
-        <p:nvSpPr>
-          <p:cNvPr id="7" name="Rectangle 6"/>
-          <p:cNvSpPr/>
-          <p:nvPr/>
-        </p:nvSpPr>
-        <p:spPr>
-          <a:xfrm>
-            <a:off x="548640" y="2834640"/>
-            <a:ext cx="109728" cy="548640"/>
-          </a:xfrm>
-          <a:prstGeom prst="rect">
-            <a:avLst/>
-          </a:prstGeom>
-          <a:solidFill>
-            <a:srgbClr val="00CC66"/>
-          </a:solidFill>
-          <a:ln>
-            <a:noFill/>
-          </a:ln>
-        </p:spPr>
-        <p:style>
-          <a:lnRef idx="1">
-            <a:schemeClr val="accent1"/>
-          </a:lnRef>
-          <a:fillRef idx="3">
-            <a:schemeClr val="accent1"/>
-          </a:fillRef>
-          <a:effectRef idx="2">
-            <a:schemeClr val="accent1"/>
-          </a:effectRef>
-          <a:fontRef idx="minor">
-            <a:schemeClr val="lt1"/>
-          </a:fontRef>
-        </p:style>
-        <p:txBody>
-          <a:bodyPr rtlCol="0" anchor="ctr"/>
-          <a:lstStyle/>
-          <a:p>
-            <a:pPr algn="ctr"/>
-          </a:p>
-        </p:txBody>
-      </p:sp>
-      <p:sp>
-        <p:nvSpPr>
-          <p:cNvPr id="8" name="TextBox 7"/>
-          <p:cNvSpPr txBox="1"/>
-          <p:nvPr/>
-        </p:nvSpPr>
-        <p:spPr>
-          <a:xfrm>
-            <a:off x="914400" y="2834640"/>
-            <a:ext cx="3657600" cy="457200"/>
-          </a:xfrm>
-          <a:prstGeom prst="rect">
-            <a:avLst/>
-          </a:prstGeom>
-          <a:noFill/>
-        </p:spPr>
-        <p:txBody>
-          <a:bodyPr wrap="square">
-            <a:spAutoFit/>
-          </a:bodyPr>
-          <a:lstStyle/>
-          <a:p>
-            <a:pPr algn="l">
-              <a:defRPr sz="2200" b="1">
-                <a:solidFill>
-                  <a:srgbClr val="00CC66"/>
-                </a:solidFill>
-              </a:defRPr>
-            </a:pPr>
-            <a:r>
-              <a:t>SAC + HER</a:t>
-            </a:r>
-          </a:p>
-        </p:txBody>
-      </p:sp>
-      <p:sp>
-        <p:nvSpPr>
-          <p:cNvPr id="9" name="TextBox 8"/>
-          <p:cNvSpPr txBox="1"/>
-          <p:nvPr/>
-        </p:nvSpPr>
-        <p:spPr>
-          <a:xfrm>
-            <a:off x="914400" y="3337560"/>
-            <a:ext cx="10058400" cy="731520"/>
-          </a:xfrm>
-          <a:prstGeom prst="rect">
-            <a:avLst/>
-          </a:prstGeom>
-          <a:noFill/>
-        </p:spPr>
-        <p:txBody>
-          <a:bodyPr wrap="square">
-            <a:spAutoFit/>
-          </a:bodyPr>
-          <a:lstStyle/>
-          <a:p>
-            <a:pPr algn="l">
-              <a:defRPr sz="1600" b="0">
-                <a:solidFill>
-                  <a:srgbClr val="CCCCDD"/>
-                </a:solidFill>
-              </a:defRPr>
-            </a:pPr>
-            <a:r>
-              <a:t>off-policy + HER 天然适合多阶段任务</a:t>
-            </a:r>
-            <a:br/>
-            <a:r>
-              <a:t>样本效率高，是近三年 RL 领域重要成果</a:t>
-            </a:r>
-          </a:p>
-        </p:txBody>
-      </p:sp>
-      <p:sp>
-        <p:nvSpPr>
-          <p:cNvPr id="10" name="Rectangle 9"/>
-          <p:cNvSpPr/>
-          <p:nvPr/>
-        </p:nvSpPr>
-        <p:spPr>
-          <a:xfrm>
-            <a:off x="548640" y="4480560"/>
-            <a:ext cx="109728" cy="548640"/>
-          </a:xfrm>
-          <a:prstGeom prst="rect">
-            <a:avLst/>
-          </a:prstGeom>
-          <a:solidFill>
-            <a:srgbClr val="00D2FF"/>
-          </a:solidFill>
-          <a:ln>
-            <a:noFill/>
-          </a:ln>
-        </p:spPr>
-        <p:style>
-          <a:lnRef idx="1">
-            <a:schemeClr val="accent1"/>
-          </a:lnRef>
-          <a:fillRef idx="3">
-            <a:schemeClr val="accent1"/>
-          </a:fillRef>
-          <a:effectRef idx="2">
-            <a:schemeClr val="accent1"/>
-          </a:effectRef>
-          <a:fontRef idx="minor">
-            <a:schemeClr val="lt1"/>
-          </a:fontRef>
-        </p:style>
-        <p:txBody>
-          <a:bodyPr rtlCol="0" anchor="ctr"/>
-          <a:lstStyle/>
-          <a:p>
-            <a:pPr algn="ctr"/>
-          </a:p>
-        </p:txBody>
-      </p:sp>
-      <p:sp>
-        <p:nvSpPr>
-          <p:cNvPr id="11" name="TextBox 10"/>
-          <p:cNvSpPr txBox="1"/>
-          <p:nvPr/>
-        </p:nvSpPr>
-        <p:spPr>
-          <a:xfrm>
-            <a:off x="914400" y="4480560"/>
-            <a:ext cx="3657600" cy="457200"/>
-          </a:xfrm>
-          <a:prstGeom prst="rect">
-            <a:avLst/>
-          </a:prstGeom>
-          <a:noFill/>
-        </p:spPr>
-        <p:txBody>
-          <a:bodyPr wrap="square">
-            <a:spAutoFit/>
-          </a:bodyPr>
-          <a:lstStyle/>
-          <a:p>
-            <a:pPr algn="l">
-              <a:defRPr sz="2200" b="1">
-                <a:solidFill>
-                  <a:srgbClr val="00D2FF"/>
-                </a:solidFill>
-              </a:defRPr>
-            </a:pPr>
-            <a:r>
-              <a:t>实验结论</a:t>
-            </a:r>
-          </a:p>
-        </p:txBody>
-      </p:sp>
-      <p:sp>
-        <p:nvSpPr>
-          <p:cNvPr id="12" name="TextBox 11"/>
-          <p:cNvSpPr txBox="1"/>
-          <p:nvPr/>
-        </p:nvSpPr>
-        <p:spPr>
-          <a:xfrm>
-            <a:off x="914400" y="4983480"/>
-            <a:ext cx="10058400" cy="731520"/>
-          </a:xfrm>
-          <a:prstGeom prst="rect">
-            <a:avLst/>
-          </a:prstGeom>
-          <a:noFill/>
-        </p:spPr>
-        <p:txBody>
-          <a:bodyPr wrap="square">
-            <a:spAutoFit/>
-          </a:bodyPr>
-          <a:lstStyle/>
-          <a:p>
-            <a:pPr algn="l">
-              <a:defRPr sz="1600" b="0">
-                <a:solidFill>
-                  <a:srgbClr val="CCCCDD"/>
-                </a:solidFill>
-              </a:defRPr>
-            </a:pPr>
-            <a:r>
-              <a:t>算法选择应匹配任务特性</a:t>
-            </a:r>
-            <a:br/>
-            <a:r>
-              <a:t>HER 有效解决了稀疏奖励和多阶段问题</a:t>
-            </a:r>
-          </a:p>
-        </p:txBody>
-      </p:sp>
-      <p:sp>
-        <p:nvSpPr>
-          <p:cNvPr id="13" name="Rectangle 12"/>
-          <p:cNvSpPr/>
-          <p:nvPr/>
-        </p:nvSpPr>
-        <p:spPr>
-          <a:xfrm>
-            <a:off x="548640" y="5943600"/>
-            <a:ext cx="10972800" cy="36576"/>
-          </a:xfrm>
-          <a:prstGeom prst="rect">
-            <a:avLst/>
-          </a:prstGeom>
-          <a:solidFill>
-            <a:srgbClr val="00D2FF"/>
-          </a:solidFill>
-          <a:ln>
-            <a:noFill/>
-          </a:ln>
-        </p:spPr>
-        <p:style>
-          <a:lnRef idx="1">
-            <a:schemeClr val="accent1"/>
-          </a:lnRef>
-          <a:fillRef idx="3">
-            <a:schemeClr val="accent1"/>
-          </a:fillRef>
-          <a:effectRef idx="2">
-            <a:schemeClr val="accent1"/>
-          </a:effectRef>
-          <a:fontRef idx="minor">
-            <a:schemeClr val="lt1"/>
-          </a:fontRef>
-        </p:style>
-        <p:txBody>
-          <a:bodyPr rtlCol="0" anchor="ctr"/>
-          <a:lstStyle/>
-          <a:p>
-            <a:pPr algn="ctr"/>
-          </a:p>
-        </p:txBody>
-      </p:sp>
-      <p:sp>
-        <p:nvSpPr>
-          <p:cNvPr id="14" name="TextBox 13"/>
-          <p:cNvSpPr txBox="1"/>
-          <p:nvPr/>
-        </p:nvSpPr>
-        <p:spPr>
-          <a:xfrm>
-            <a:off x="548640" y="6126480"/>
-            <a:ext cx="10058400" cy="365760"/>
-          </a:xfrm>
-          <a:prstGeom prst="rect">
-            <a:avLst/>
-          </a:prstGeom>
-          <a:noFill/>
-        </p:spPr>
-        <p:txBody>
-          <a:bodyPr wrap="square">
-            <a:spAutoFit/>
-          </a:bodyPr>
-          <a:lstStyle/>
-          <a:p>
-            <a:pPr algn="ctr">
-              <a:defRPr sz="1400" b="0">
-                <a:solidFill>
-                  <a:srgbClr val="8888AA"/>
-                </a:solidFill>
-              </a:defRPr>
-            </a:pPr>
-            <a:r>
-              <a:t>HER 论文：Hindsight Experience Replay (Andrychowicz et al., 2017)</a:t>
+              <a:t>760 万步训练 — 成功率仅 4%，50 步全部超时 — On-policy 不适合多阶段任务</a:t>
             </a:r>
           </a:p>
         </p:txBody>
